--- a/5-Implementation-Projects/internet/jagports/solution/vieps/UI_CONCEPTS/VIEPS UI-Concepts.pptx
+++ b/5-Implementation-Projects/internet/jagports/solution/vieps/UI_CONCEPTS/VIEPS UI-Concepts.pptx
@@ -119,6 +119,7 @@
 <file path=ppt/revisionInfo.xml><?xml version="1.0" encoding="utf-8"?>
 <p1510:revInfo xmlns:a="http://schemas.openxmlformats.org/drawingml/2006/main" xmlns:r="http://schemas.openxmlformats.org/officeDocument/2006/relationships" xmlns:p1510="http://schemas.microsoft.com/office/powerpoint/2015/10/main">
   <p1510:revLst>
+    <p1510:client id="{40F9EE7E-8F40-43E2-BB4D-50812324D88A}" v="5" dt="2026-09-14T05:49:58.183"/>
     <p1510:client id="{4DECE69C-0D69-4376-B837-DA0BA91C450E}" v="5" dt="2026-09-14T03:14:25.393"/>
   </p1510:revLst>
 </p1510:revInfo>
@@ -129,7 +130,7 @@
   <pc:docChgLst>
     <pc:chgData name="Tomi Lind" userId="8de46aee-b41d-491b-a3c8-daf1b5776a2e" providerId="ADAL" clId="{DA4176E6-4A74-4541-B8FC-EC14009AAF7D}"/>
     <pc:docChg chg="undo custSel addSld modSld sldOrd">
-      <pc:chgData name="Tomi Lind" userId="8de46aee-b41d-491b-a3c8-daf1b5776a2e" providerId="ADAL" clId="{DA4176E6-4A74-4541-B8FC-EC14009AAF7D}" dt="2026-09-14T03:26:07.974" v="1570" actId="20577"/>
+      <pc:chgData name="Tomi Lind" userId="8de46aee-b41d-491b-a3c8-daf1b5776a2e" providerId="ADAL" clId="{DA4176E6-4A74-4541-B8FC-EC14009AAF7D}" dt="2026-09-14T05:50:26.695" v="1766" actId="20577"/>
       <pc:docMkLst>
         <pc:docMk/>
       </pc:docMkLst>
@@ -642,13 +643,13 @@
         </pc:picChg>
       </pc:sldChg>
       <pc:sldChg chg="addSp delSp modSp add mod">
-        <pc:chgData name="Tomi Lind" userId="8de46aee-b41d-491b-a3c8-daf1b5776a2e" providerId="ADAL" clId="{DA4176E6-4A74-4541-B8FC-EC14009AAF7D}" dt="2026-09-14T03:26:07.974" v="1570" actId="20577"/>
+        <pc:chgData name="Tomi Lind" userId="8de46aee-b41d-491b-a3c8-daf1b5776a2e" providerId="ADAL" clId="{DA4176E6-4A74-4541-B8FC-EC14009AAF7D}" dt="2026-09-14T05:50:26.695" v="1766" actId="20577"/>
         <pc:sldMkLst>
           <pc:docMk/>
           <pc:sldMk cId="2519818258" sldId="260"/>
         </pc:sldMkLst>
         <pc:spChg chg="mod">
-          <ac:chgData name="Tomi Lind" userId="8de46aee-b41d-491b-a3c8-daf1b5776a2e" providerId="ADAL" clId="{DA4176E6-4A74-4541-B8FC-EC14009AAF7D}" dt="2026-09-14T03:18:18.521" v="1351" actId="1076"/>
+          <ac:chgData name="Tomi Lind" userId="8de46aee-b41d-491b-a3c8-daf1b5776a2e" providerId="ADAL" clId="{DA4176E6-4A74-4541-B8FC-EC14009AAF7D}" dt="2026-09-14T05:46:32.449" v="1638" actId="122"/>
           <ac:spMkLst>
             <pc:docMk/>
             <pc:sldMk cId="2519818258" sldId="260"/>
@@ -656,7 +657,7 @@
           </ac:spMkLst>
         </pc:spChg>
         <pc:spChg chg="add mod">
-          <ac:chgData name="Tomi Lind" userId="8de46aee-b41d-491b-a3c8-daf1b5776a2e" providerId="ADAL" clId="{DA4176E6-4A74-4541-B8FC-EC14009AAF7D}" dt="2026-09-14T03:15:09.590" v="1199" actId="207"/>
+          <ac:chgData name="Tomi Lind" userId="8de46aee-b41d-491b-a3c8-daf1b5776a2e" providerId="ADAL" clId="{DA4176E6-4A74-4541-B8FC-EC14009AAF7D}" dt="2026-09-14T05:49:41.369" v="1710" actId="1076"/>
           <ac:spMkLst>
             <pc:docMk/>
             <pc:sldMk cId="2519818258" sldId="260"/>
@@ -664,15 +665,23 @@
           </ac:spMkLst>
         </pc:spChg>
         <pc:spChg chg="mod">
-          <ac:chgData name="Tomi Lind" userId="8de46aee-b41d-491b-a3c8-daf1b5776a2e" providerId="ADAL" clId="{DA4176E6-4A74-4541-B8FC-EC14009AAF7D}" dt="2026-09-14T03:26:07.974" v="1570" actId="20577"/>
+          <ac:chgData name="Tomi Lind" userId="8de46aee-b41d-491b-a3c8-daf1b5776a2e" providerId="ADAL" clId="{DA4176E6-4A74-4541-B8FC-EC14009AAF7D}" dt="2026-09-14T05:45:17.332" v="1622" actId="1076"/>
           <ac:spMkLst>
             <pc:docMk/>
             <pc:sldMk cId="2519818258" sldId="260"/>
             <ac:spMk id="5" creationId="{B7D21118-CD4E-3935-22BD-95EFEFFE031B}"/>
           </ac:spMkLst>
         </pc:spChg>
+        <pc:spChg chg="add mod">
+          <ac:chgData name="Tomi Lind" userId="8de46aee-b41d-491b-a3c8-daf1b5776a2e" providerId="ADAL" clId="{DA4176E6-4A74-4541-B8FC-EC14009AAF7D}" dt="2026-09-14T05:43:46.804" v="1594" actId="571"/>
+          <ac:spMkLst>
+            <pc:docMk/>
+            <pc:sldMk cId="2519818258" sldId="260"/>
+            <ac:spMk id="7" creationId="{B49B30F2-762E-CF05-10EF-7E0F1AC69C0D}"/>
+          </ac:spMkLst>
+        </pc:spChg>
         <pc:spChg chg="mod">
-          <ac:chgData name="Tomi Lind" userId="8de46aee-b41d-491b-a3c8-daf1b5776a2e" providerId="ADAL" clId="{DA4176E6-4A74-4541-B8FC-EC14009AAF7D}" dt="2026-09-14T03:23:14.825" v="1477" actId="207"/>
+          <ac:chgData name="Tomi Lind" userId="8de46aee-b41d-491b-a3c8-daf1b5776a2e" providerId="ADAL" clId="{DA4176E6-4A74-4541-B8FC-EC14009AAF7D}" dt="2026-09-14T05:50:26.695" v="1766" actId="20577"/>
           <ac:spMkLst>
             <pc:docMk/>
             <pc:sldMk cId="2519818258" sldId="260"/>
@@ -680,7 +689,7 @@
           </ac:spMkLst>
         </pc:spChg>
         <pc:spChg chg="add mod">
-          <ac:chgData name="Tomi Lind" userId="8de46aee-b41d-491b-a3c8-daf1b5776a2e" providerId="ADAL" clId="{DA4176E6-4A74-4541-B8FC-EC14009AAF7D}" dt="2026-09-14T03:16:24.001" v="1228" actId="14100"/>
+          <ac:chgData name="Tomi Lind" userId="8de46aee-b41d-491b-a3c8-daf1b5776a2e" providerId="ADAL" clId="{DA4176E6-4A74-4541-B8FC-EC14009AAF7D}" dt="2026-09-14T05:46:23.747" v="1636" actId="14100"/>
           <ac:spMkLst>
             <pc:docMk/>
             <pc:sldMk cId="2519818258" sldId="260"/>
@@ -696,7 +705,7 @@
           </ac:spMkLst>
         </pc:spChg>
         <pc:spChg chg="mod">
-          <ac:chgData name="Tomi Lind" userId="8de46aee-b41d-491b-a3c8-daf1b5776a2e" providerId="ADAL" clId="{DA4176E6-4A74-4541-B8FC-EC14009AAF7D}" dt="2026-09-14T03:17:39.816" v="1339" actId="1076"/>
+          <ac:chgData name="Tomi Lind" userId="8de46aee-b41d-491b-a3c8-daf1b5776a2e" providerId="ADAL" clId="{DA4176E6-4A74-4541-B8FC-EC14009AAF7D}" dt="2026-09-14T05:47:05.059" v="1663" actId="207"/>
           <ac:spMkLst>
             <pc:docMk/>
             <pc:sldMk cId="2519818258" sldId="260"/>
@@ -704,7 +713,7 @@
           </ac:spMkLst>
         </pc:spChg>
         <pc:spChg chg="mod">
-          <ac:chgData name="Tomi Lind" userId="8de46aee-b41d-491b-a3c8-daf1b5776a2e" providerId="ADAL" clId="{DA4176E6-4A74-4541-B8FC-EC14009AAF7D}" dt="2026-09-14T03:18:08.401" v="1348" actId="20577"/>
+          <ac:chgData name="Tomi Lind" userId="8de46aee-b41d-491b-a3c8-daf1b5776a2e" providerId="ADAL" clId="{DA4176E6-4A74-4541-B8FC-EC14009AAF7D}" dt="2026-09-14T05:47:43.961" v="1702" actId="20577"/>
           <ac:spMkLst>
             <pc:docMk/>
             <pc:sldMk cId="2519818258" sldId="260"/>
@@ -712,7 +721,7 @@
           </ac:spMkLst>
         </pc:spChg>
         <pc:spChg chg="add mod">
-          <ac:chgData name="Tomi Lind" userId="8de46aee-b41d-491b-a3c8-daf1b5776a2e" providerId="ADAL" clId="{DA4176E6-4A74-4541-B8FC-EC14009AAF7D}" dt="2026-09-14T03:23:37.956" v="1482" actId="1076"/>
+          <ac:chgData name="Tomi Lind" userId="8de46aee-b41d-491b-a3c8-daf1b5776a2e" providerId="ADAL" clId="{DA4176E6-4A74-4541-B8FC-EC14009AAF7D}" dt="2026-09-14T05:46:56.117" v="1662" actId="1038"/>
           <ac:spMkLst>
             <pc:docMk/>
             <pc:sldMk cId="2519818258" sldId="260"/>
@@ -720,7 +729,7 @@
           </ac:spMkLst>
         </pc:spChg>
         <pc:spChg chg="mod">
-          <ac:chgData name="Tomi Lind" userId="8de46aee-b41d-491b-a3c8-daf1b5776a2e" providerId="ADAL" clId="{DA4176E6-4A74-4541-B8FC-EC14009AAF7D}" dt="2026-09-14T03:24:07.220" v="1488" actId="20577"/>
+          <ac:chgData name="Tomi Lind" userId="8de46aee-b41d-491b-a3c8-daf1b5776a2e" providerId="ADAL" clId="{DA4176E6-4A74-4541-B8FC-EC14009AAF7D}" dt="2026-09-14T05:46:47.672" v="1641" actId="122"/>
           <ac:spMkLst>
             <pc:docMk/>
             <pc:sldMk cId="2519818258" sldId="260"/>
@@ -728,15 +737,23 @@
           </ac:spMkLst>
         </pc:spChg>
         <pc:spChg chg="add mod">
-          <ac:chgData name="Tomi Lind" userId="8de46aee-b41d-491b-a3c8-daf1b5776a2e" providerId="ADAL" clId="{DA4176E6-4A74-4541-B8FC-EC14009AAF7D}" dt="2026-09-14T03:17:51.433" v="1342" actId="14100"/>
+          <ac:chgData name="Tomi Lind" userId="8de46aee-b41d-491b-a3c8-daf1b5776a2e" providerId="ADAL" clId="{DA4176E6-4A74-4541-B8FC-EC14009AAF7D}" dt="2026-09-14T05:43:10.756" v="1587" actId="14100"/>
           <ac:spMkLst>
             <pc:docMk/>
             <pc:sldMk cId="2519818258" sldId="260"/>
             <ac:spMk id="19" creationId="{5C20AF56-422F-376B-079B-56CAE9AEA370}"/>
           </ac:spMkLst>
         </pc:spChg>
+        <pc:spChg chg="add mod">
+          <ac:chgData name="Tomi Lind" userId="8de46aee-b41d-491b-a3c8-daf1b5776a2e" providerId="ADAL" clId="{DA4176E6-4A74-4541-B8FC-EC14009AAF7D}" dt="2026-09-14T05:49:56.062" v="1713" actId="14100"/>
+          <ac:spMkLst>
+            <pc:docMk/>
+            <pc:sldMk cId="2519818258" sldId="260"/>
+            <ac:spMk id="20" creationId="{1CCA70B1-F593-96DA-9E2B-6A4CF1D0B2B2}"/>
+          </ac:spMkLst>
+        </pc:spChg>
         <pc:spChg chg="mod">
-          <ac:chgData name="Tomi Lind" userId="8de46aee-b41d-491b-a3c8-daf1b5776a2e" providerId="ADAL" clId="{DA4176E6-4A74-4541-B8FC-EC14009AAF7D}" dt="2026-09-14T03:23:17.957" v="1478" actId="207"/>
+          <ac:chgData name="Tomi Lind" userId="8de46aee-b41d-491b-a3c8-daf1b5776a2e" providerId="ADAL" clId="{DA4176E6-4A74-4541-B8FC-EC14009AAF7D}" dt="2026-09-14T05:46:56.117" v="1662" actId="1038"/>
           <ac:spMkLst>
             <pc:docMk/>
             <pc:sldMk cId="2519818258" sldId="260"/>
@@ -744,7 +761,7 @@
           </ac:spMkLst>
         </pc:spChg>
         <pc:spChg chg="add mod">
-          <ac:chgData name="Tomi Lind" userId="8de46aee-b41d-491b-a3c8-daf1b5776a2e" providerId="ADAL" clId="{DA4176E6-4A74-4541-B8FC-EC14009AAF7D}" dt="2026-09-14T03:18:01.568" v="1345" actId="14100"/>
+          <ac:chgData name="Tomi Lind" userId="8de46aee-b41d-491b-a3c8-daf1b5776a2e" providerId="ADAL" clId="{DA4176E6-4A74-4541-B8FC-EC14009AAF7D}" dt="2026-09-14T05:46:09.705" v="1633" actId="14100"/>
           <ac:spMkLst>
             <pc:docMk/>
             <pc:sldMk cId="2519818258" sldId="260"/>
@@ -752,7 +769,15 @@
           </ac:spMkLst>
         </pc:spChg>
         <pc:spChg chg="add mod">
-          <ac:chgData name="Tomi Lind" userId="8de46aee-b41d-491b-a3c8-daf1b5776a2e" providerId="ADAL" clId="{DA4176E6-4A74-4541-B8FC-EC14009AAF7D}" dt="2026-09-14T03:18:51.161" v="1358" actId="14100"/>
+          <ac:chgData name="Tomi Lind" userId="8de46aee-b41d-491b-a3c8-daf1b5776a2e" providerId="ADAL" clId="{DA4176E6-4A74-4541-B8FC-EC14009AAF7D}" dt="2026-09-14T05:50:16.929" v="1750" actId="1076"/>
+          <ac:spMkLst>
+            <pc:docMk/>
+            <pc:sldMk cId="2519818258" sldId="260"/>
+            <ac:spMk id="25" creationId="{6E4D0859-D71B-9F6E-1178-5695507839BB}"/>
+          </ac:spMkLst>
+        </pc:spChg>
+        <pc:spChg chg="add mod">
+          <ac:chgData name="Tomi Lind" userId="8de46aee-b41d-491b-a3c8-daf1b5776a2e" providerId="ADAL" clId="{DA4176E6-4A74-4541-B8FC-EC14009AAF7D}" dt="2026-09-14T05:45:46.312" v="1629" actId="14100"/>
           <ac:spMkLst>
             <pc:docMk/>
             <pc:sldMk cId="2519818258" sldId="260"/>
@@ -768,7 +793,7 @@
           </ac:spMkLst>
         </pc:spChg>
         <pc:spChg chg="add mod">
-          <ac:chgData name="Tomi Lind" userId="8de46aee-b41d-491b-a3c8-daf1b5776a2e" providerId="ADAL" clId="{DA4176E6-4A74-4541-B8FC-EC14009AAF7D}" dt="2026-09-14T03:22:57.819" v="1476" actId="1076"/>
+          <ac:chgData name="Tomi Lind" userId="8de46aee-b41d-491b-a3c8-daf1b5776a2e" providerId="ADAL" clId="{DA4176E6-4A74-4541-B8FC-EC14009AAF7D}" dt="2026-09-14T05:45:53.902" v="1630" actId="164"/>
           <ac:spMkLst>
             <pc:docMk/>
             <pc:sldMk cId="2519818258" sldId="260"/>
@@ -776,7 +801,7 @@
           </ac:spMkLst>
         </pc:spChg>
         <pc:spChg chg="add mod">
-          <ac:chgData name="Tomi Lind" userId="8de46aee-b41d-491b-a3c8-daf1b5776a2e" providerId="ADAL" clId="{DA4176E6-4A74-4541-B8FC-EC14009AAF7D}" dt="2026-09-14T03:23:54.019" v="1485" actId="14100"/>
+          <ac:chgData name="Tomi Lind" userId="8de46aee-b41d-491b-a3c8-daf1b5776a2e" providerId="ADAL" clId="{DA4176E6-4A74-4541-B8FC-EC14009AAF7D}" dt="2026-09-14T05:46:12.505" v="1634" actId="14100"/>
           <ac:spMkLst>
             <pc:docMk/>
             <pc:sldMk cId="2519818258" sldId="260"/>
@@ -784,15 +809,31 @@
           </ac:spMkLst>
         </pc:spChg>
         <pc:grpChg chg="add mod">
-          <ac:chgData name="Tomi Lind" userId="8de46aee-b41d-491b-a3c8-daf1b5776a2e" providerId="ADAL" clId="{DA4176E6-4A74-4541-B8FC-EC14009AAF7D}" dt="2026-09-14T03:14:28.816" v="1195" actId="1076"/>
+          <ac:chgData name="Tomi Lind" userId="8de46aee-b41d-491b-a3c8-daf1b5776a2e" providerId="ADAL" clId="{DA4176E6-4A74-4541-B8FC-EC14009AAF7D}" dt="2026-09-14T05:46:17.828" v="1635" actId="1076"/>
           <ac:grpSpMkLst>
             <pc:docMk/>
             <pc:sldMk cId="2519818258" sldId="260"/>
             <ac:grpSpMk id="3" creationId="{284472C1-C8C3-6005-4193-F6FC9642BD03}"/>
           </ac:grpSpMkLst>
         </pc:grpChg>
+        <pc:grpChg chg="add mod">
+          <ac:chgData name="Tomi Lind" userId="8de46aee-b41d-491b-a3c8-daf1b5776a2e" providerId="ADAL" clId="{DA4176E6-4A74-4541-B8FC-EC14009AAF7D}" dt="2026-09-14T05:45:59.710" v="1631" actId="1076"/>
+          <ac:grpSpMkLst>
+            <pc:docMk/>
+            <pc:sldMk cId="2519818258" sldId="260"/>
+            <ac:grpSpMk id="11" creationId="{6CD2A034-4E76-CFD3-6537-DB021DC36714}"/>
+          </ac:grpSpMkLst>
+        </pc:grpChg>
+        <pc:graphicFrameChg chg="mod">
+          <ac:chgData name="Tomi Lind" userId="8de46aee-b41d-491b-a3c8-daf1b5776a2e" providerId="ADAL" clId="{DA4176E6-4A74-4541-B8FC-EC14009AAF7D}" dt="2026-09-14T05:49:41.369" v="1710" actId="1076"/>
+          <ac:graphicFrameMkLst>
+            <pc:docMk/>
+            <pc:sldMk cId="2519818258" sldId="260"/>
+            <ac:graphicFrameMk id="6" creationId="{1BAD16F7-3E4E-84AE-B364-CCA27300127C}"/>
+          </ac:graphicFrameMkLst>
+        </pc:graphicFrameChg>
         <pc:picChg chg="mod">
-          <ac:chgData name="Tomi Lind" userId="8de46aee-b41d-491b-a3c8-daf1b5776a2e" providerId="ADAL" clId="{DA4176E6-4A74-4541-B8FC-EC14009AAF7D}" dt="2026-09-14T03:14:31.470" v="1196" actId="1076"/>
+          <ac:chgData name="Tomi Lind" userId="8de46aee-b41d-491b-a3c8-daf1b5776a2e" providerId="ADAL" clId="{DA4176E6-4A74-4541-B8FC-EC14009AAF7D}" dt="2026-09-14T05:46:17.828" v="1635" actId="1076"/>
           <ac:picMkLst>
             <pc:docMk/>
             <pc:sldMk cId="2519818258" sldId="260"/>
@@ -800,7 +841,7 @@
           </ac:picMkLst>
         </pc:picChg>
         <pc:picChg chg="mod">
-          <ac:chgData name="Tomi Lind" userId="8de46aee-b41d-491b-a3c8-daf1b5776a2e" providerId="ADAL" clId="{DA4176E6-4A74-4541-B8FC-EC14009AAF7D}" dt="2026-09-14T03:22:45.645" v="1469" actId="1076"/>
+          <ac:chgData name="Tomi Lind" userId="8de46aee-b41d-491b-a3c8-daf1b5776a2e" providerId="ADAL" clId="{DA4176E6-4A74-4541-B8FC-EC14009AAF7D}" dt="2026-09-14T05:45:53.902" v="1630" actId="164"/>
           <ac:picMkLst>
             <pc:docMk/>
             <pc:sldMk cId="2519818258" sldId="260"/>
@@ -824,7 +865,7 @@
           </ac:picMkLst>
         </pc:picChg>
         <pc:picChg chg="mod">
-          <ac:chgData name="Tomi Lind" userId="8de46aee-b41d-491b-a3c8-daf1b5776a2e" providerId="ADAL" clId="{DA4176E6-4A74-4541-B8FC-EC14009AAF7D}" dt="2026-09-14T03:17:36.816" v="1338" actId="1076"/>
+          <ac:chgData name="Tomi Lind" userId="8de46aee-b41d-491b-a3c8-daf1b5776a2e" providerId="ADAL" clId="{DA4176E6-4A74-4541-B8FC-EC14009AAF7D}" dt="2026-09-14T05:43:03.305" v="1585" actId="1076"/>
           <ac:picMkLst>
             <pc:docMk/>
             <pc:sldMk cId="2519818258" sldId="260"/>
@@ -832,7 +873,7 @@
           </ac:picMkLst>
         </pc:picChg>
         <pc:picChg chg="mod">
-          <ac:chgData name="Tomi Lind" userId="8de46aee-b41d-491b-a3c8-daf1b5776a2e" providerId="ADAL" clId="{DA4176E6-4A74-4541-B8FC-EC14009AAF7D}" dt="2026-09-14T03:17:34.737" v="1337" actId="1076"/>
+          <ac:chgData name="Tomi Lind" userId="8de46aee-b41d-491b-a3c8-daf1b5776a2e" providerId="ADAL" clId="{DA4176E6-4A74-4541-B8FC-EC14009AAF7D}" dt="2026-09-14T05:43:01.215" v="1584" actId="1076"/>
           <ac:picMkLst>
             <pc:docMk/>
             <pc:sldMk cId="2519818258" sldId="260"/>
@@ -4109,7 +4150,7 @@
         </p:blipFill>
         <p:spPr>
           <a:xfrm>
-            <a:off x="5412010" y="4892534"/>
+            <a:off x="6096000" y="4889096"/>
             <a:ext cx="1527982" cy="1662516"/>
           </a:xfrm>
           <a:prstGeom prst="rect">
@@ -4131,7 +4172,7 @@
         </p:nvSpPr>
         <p:spPr>
           <a:xfrm>
-            <a:off x="3376013" y="213146"/>
+            <a:off x="4082180" y="213146"/>
             <a:ext cx="2719988" cy="723275"/>
           </a:xfrm>
           <a:prstGeom prst="rect">
@@ -4223,7 +4264,7 @@
         </p:blipFill>
         <p:spPr>
           <a:xfrm>
-            <a:off x="6340177" y="1434897"/>
+            <a:off x="3376013" y="2126173"/>
             <a:ext cx="2698044" cy="745067"/>
           </a:xfrm>
           <a:prstGeom prst="rect">
@@ -4259,7 +4300,7 @@
         </p:blipFill>
         <p:spPr>
           <a:xfrm>
-            <a:off x="3570057" y="1306510"/>
+            <a:off x="3382468" y="2943230"/>
             <a:ext cx="2705100" cy="1057275"/>
           </a:xfrm>
           <a:prstGeom prst="rect">
@@ -4281,8 +4322,8 @@
         </p:nvSpPr>
         <p:spPr>
           <a:xfrm>
-            <a:off x="9674834" y="880578"/>
-            <a:ext cx="1527982" cy="2092881"/>
+            <a:off x="3201113" y="1413305"/>
+            <a:ext cx="7827671" cy="246221"/>
           </a:xfrm>
           <a:prstGeom prst="rect">
             <a:avLst/>
@@ -4290,86 +4331,15 @@
           <a:noFill/>
         </p:spPr>
         <p:txBody>
-          <a:bodyPr wrap="none" rtlCol="0">
+          <a:bodyPr wrap="square" rtlCol="0">
             <a:spAutoFit/>
           </a:bodyPr>
           <a:lstStyle/>
           <a:p>
+            <a:pPr algn="ctr"/>
             <a:r>
               <a:rPr lang="en-US" sz="1000" dirty="0"/>
-              <a:t>   Jaguar Accessories</a:t>
-            </a:r>
-          </a:p>
-          <a:p>
-            <a:r>
-              <a:rPr lang="en-US" sz="1000" dirty="0"/>
-              <a:t>   Daimler Limousine</a:t>
-            </a:r>
-          </a:p>
-          <a:p>
-            <a:r>
-              <a:rPr lang="en-US" sz="1000" dirty="0"/>
-              <a:t>   E-Pace</a:t>
-            </a:r>
-          </a:p>
-          <a:p>
-            <a:r>
-              <a:rPr lang="en-US" sz="1000" dirty="0"/>
-              <a:t>   E-Type</a:t>
-            </a:r>
-          </a:p>
-          <a:p>
-            <a:r>
-              <a:rPr lang="en-US" sz="1000" dirty="0"/>
-              <a:t>   F-Pace</a:t>
-            </a:r>
-          </a:p>
-          <a:p>
-            <a:r>
-              <a:rPr lang="en-US" sz="1000" dirty="0"/>
-              <a:t>   F-Type</a:t>
-            </a:r>
-          </a:p>
-          <a:p>
-            <a:r>
-              <a:rPr lang="en-US" sz="1000" dirty="0"/>
-              <a:t>   S-Type</a:t>
-            </a:r>
-          </a:p>
-          <a:p>
-            <a:r>
-              <a:rPr lang="en-US" sz="1000" dirty="0"/>
-              <a:t>   X-Type</a:t>
-            </a:r>
-          </a:p>
-          <a:p>
-            <a:r>
-              <a:rPr lang="en-US" sz="1000" dirty="0"/>
-              <a:t>   XE Range</a:t>
-            </a:r>
-          </a:p>
-          <a:p>
-            <a:r>
-              <a:rPr lang="en-US" sz="1000" dirty="0"/>
-              <a:t>   XF Range</a:t>
-            </a:r>
-          </a:p>
-          <a:p>
-            <a:r>
-              <a:rPr lang="en-US" sz="1000" dirty="0"/>
-              <a:t>   XJ Range</a:t>
-            </a:r>
-          </a:p>
-          <a:p>
-            <a:r>
-              <a:rPr lang="en-US" sz="1000" dirty="0"/>
-              <a:t>   XJS Coupe/Convertible</a:t>
-            </a:r>
-          </a:p>
-          <a:p>
-            <a:r>
-              <a:rPr lang="en-US" sz="1000" dirty="0"/>
-              <a:t>[x]  XK Range (Modern)</a:t>
+              <a:t>Jaguar Accessories - Daimler Limousine - E-Pace E-Type F-Pace F-Type S-Type X-Type XE Range XF Range XJ Range XJS [x] XK Range</a:t>
             </a:r>
             <a:endParaRPr lang="LID4096" sz="1000" dirty="0"/>
           </a:p>
@@ -4389,8 +4359,8 @@
         </p:nvSpPr>
         <p:spPr>
           <a:xfrm>
-            <a:off x="3296901" y="2556231"/>
-            <a:ext cx="5461664" cy="461665"/>
+            <a:off x="6599089" y="1793072"/>
+            <a:ext cx="4307593" cy="400110"/>
           </a:xfrm>
           <a:prstGeom prst="rect">
             <a:avLst/>
@@ -4405,7 +4375,7 @@
           <a:p>
             <a:pPr algn="ctr"/>
             <a:r>
-              <a:rPr lang="en-US" sz="1200" dirty="0">
+              <a:rPr lang="en-US" sz="1000" dirty="0">
                 <a:solidFill>
                   <a:schemeClr val="tx2">
                     <a:lumMod val="50000"/>
@@ -4416,7 +4386,7 @@
               <a:t>Suitability/Filter (or fact when one part number is selected):</a:t>
             </a:r>
             <a:br>
-              <a:rPr lang="en-US" sz="1200" dirty="0">
+              <a:rPr lang="en-US" sz="1000" dirty="0">
                 <a:solidFill>
                   <a:schemeClr val="tx2">
                     <a:lumMod val="50000"/>
@@ -4426,7 +4396,7 @@
               </a:rPr>
             </a:br>
             <a:r>
-              <a:rPr lang="en-US" sz="1200" dirty="0">
+              <a:rPr lang="en-US" sz="1000" dirty="0">
                 <a:solidFill>
                   <a:schemeClr val="tx2">
                     <a:lumMod val="50000"/>
@@ -4437,7 +4407,7 @@
               <a:t>[Selection list(s)] [&lt;Models&gt;&lt;</a:t>
             </a:r>
             <a:r>
-              <a:rPr lang="en-US" sz="1200" dirty="0" err="1">
+              <a:rPr lang="en-US" sz="1000" dirty="0" err="1">
                 <a:solidFill>
                   <a:schemeClr val="tx2">
                     <a:lumMod val="50000"/>
@@ -4448,7 +4418,7 @@
               <a:t>ModelYear</a:t>
             </a:r>
             <a:r>
-              <a:rPr lang="en-US" sz="1200" dirty="0">
+              <a:rPr lang="en-US" sz="1000" dirty="0">
                 <a:solidFill>
                   <a:schemeClr val="tx2">
                     <a:lumMod val="50000"/>
@@ -4459,7 +4429,7 @@
               <a:t>&gt;&lt;</a:t>
             </a:r>
             <a:r>
-              <a:rPr lang="en-US" sz="1200" dirty="0" err="1">
+              <a:rPr lang="en-US" sz="1000" dirty="0" err="1">
                 <a:solidFill>
                   <a:schemeClr val="tx2">
                     <a:lumMod val="50000"/>
@@ -4470,7 +4440,7 @@
               <a:t>VINRanges</a:t>
             </a:r>
             <a:r>
-              <a:rPr lang="en-US" sz="1200" dirty="0">
+              <a:rPr lang="en-US" sz="1000" dirty="0">
                 <a:solidFill>
                   <a:schemeClr val="tx2">
                     <a:lumMod val="50000"/>
@@ -4481,7 +4451,7 @@
               <a:t>&gt; &lt;features&gt; &lt;</a:t>
             </a:r>
             <a:r>
-              <a:rPr lang="en-US" sz="1200" dirty="0" err="1">
+              <a:rPr lang="en-US" sz="1000" dirty="0" err="1">
                 <a:solidFill>
                   <a:schemeClr val="tx2">
                     <a:lumMod val="50000"/>
@@ -4492,7 +4462,7 @@
               <a:t>etc</a:t>
             </a:r>
             <a:r>
-              <a:rPr lang="en-US" sz="1200">
+              <a:rPr lang="en-US" sz="1000" dirty="0">
                 <a:solidFill>
                   <a:schemeClr val="tx2">
                     <a:lumMod val="50000"/>
@@ -4502,7 +4472,7 @@
               </a:rPr>
               <a:t>&gt;]</a:t>
             </a:r>
-            <a:endParaRPr lang="LID4096" sz="1200" dirty="0">
+            <a:endParaRPr lang="LID4096" sz="1000" dirty="0">
               <a:solidFill>
                 <a:schemeClr val="tx2">
                   <a:lumMod val="50000"/>
@@ -4527,8 +4497,8 @@
         </p:nvSpPr>
         <p:spPr>
           <a:xfrm>
-            <a:off x="259590" y="217275"/>
-            <a:ext cx="3080509" cy="646331"/>
+            <a:off x="253485" y="1770828"/>
+            <a:ext cx="2845302" cy="584775"/>
           </a:xfrm>
           <a:prstGeom prst="rect">
             <a:avLst/>
@@ -4541,8 +4511,9 @@
           </a:bodyPr>
           <a:lstStyle/>
           <a:p>
-            <a:r>
-              <a:rPr lang="en-US" dirty="0">
+            <a:pPr algn="ctr"/>
+            <a:r>
+              <a:rPr lang="en-US" sz="1600" dirty="0">
                 <a:solidFill>
                   <a:schemeClr val="tx2">
                     <a:lumMod val="50000"/>
@@ -4550,12 +4521,32 @@
                   </a:schemeClr>
                 </a:solidFill>
               </a:rPr>
-              <a:t>Parts tree</a:t>
-            </a:r>
-          </a:p>
-          <a:p>
-            <a:r>
-              <a:rPr lang="en-US" dirty="0">
+              <a:t>Parts tree (</a:t>
+            </a:r>
+            <a:r>
+              <a:rPr lang="en-US" sz="1600">
+                <a:solidFill>
+                  <a:schemeClr val="tx2">
+                    <a:lumMod val="50000"/>
+                    <a:lumOff val="50000"/>
+                  </a:schemeClr>
+                </a:solidFill>
+              </a:rPr>
+              <a:t>scrolling list</a:t>
+            </a:r>
+            <a:endParaRPr lang="en-US" sz="1600" dirty="0">
+              <a:solidFill>
+                <a:schemeClr val="tx2">
+                  <a:lumMod val="50000"/>
+                  <a:lumOff val="50000"/>
+                </a:schemeClr>
+              </a:solidFill>
+            </a:endParaRPr>
+          </a:p>
+          <a:p>
+            <a:pPr algn="ctr"/>
+            <a:r>
+              <a:rPr lang="en-US" sz="1600" dirty="0">
                 <a:solidFill>
                   <a:schemeClr val="tx2">
                     <a:lumMod val="50000"/>
@@ -4565,7 +4556,7 @@
               </a:rPr>
               <a:t>[show only relevant path(s)]</a:t>
             </a:r>
-            <a:endParaRPr lang="LID4096" dirty="0">
+            <a:endParaRPr lang="LID4096" sz="1600" dirty="0">
               <a:solidFill>
                 <a:schemeClr val="tx2">
                   <a:lumMod val="50000"/>
@@ -4590,7 +4581,7 @@
         </p:nvSpPr>
         <p:spPr>
           <a:xfrm>
-            <a:off x="5532191" y="1009147"/>
+            <a:off x="3901045" y="1794900"/>
             <a:ext cx="1728550" cy="369332"/>
           </a:xfrm>
           <a:prstGeom prst="rect">
@@ -4607,7 +4598,10 @@
             <a:r>
               <a:rPr lang="en-US" dirty="0">
                 <a:solidFill>
-                  <a:srgbClr val="FFC000"/>
+                  <a:schemeClr val="tx2">
+                    <a:lumMod val="50000"/>
+                    <a:lumOff val="50000"/>
+                  </a:schemeClr>
                 </a:solidFill>
               </a:rPr>
               <a:t>Location at car:</a:t>
@@ -4629,8 +4623,8 @@
         </p:nvSpPr>
         <p:spPr>
           <a:xfrm>
-            <a:off x="9546259" y="313173"/>
-            <a:ext cx="2517164" cy="523220"/>
+            <a:off x="3201112" y="1033126"/>
+            <a:ext cx="7827671" cy="307777"/>
           </a:xfrm>
           <a:prstGeom prst="rect">
             <a:avLst/>
@@ -4638,11 +4632,12 @@
           <a:noFill/>
         </p:spPr>
         <p:txBody>
-          <a:bodyPr wrap="none" rtlCol="0">
+          <a:bodyPr wrap="square" rtlCol="0">
             <a:spAutoFit/>
           </a:bodyPr>
           <a:lstStyle/>
           <a:p>
+            <a:pPr algn="ctr"/>
             <a:r>
               <a:rPr lang="en-US" sz="1400" dirty="0">
                 <a:solidFill>
@@ -4652,20 +4647,7 @@
                   </a:schemeClr>
                 </a:solidFill>
               </a:rPr>
-              <a:t>Suitability Model Ranges</a:t>
-            </a:r>
-          </a:p>
-          <a:p>
-            <a:r>
-              <a:rPr lang="en-US" sz="1400" dirty="0">
-                <a:solidFill>
-                  <a:schemeClr val="tx2">
-                    <a:lumMod val="50000"/>
-                    <a:lumOff val="50000"/>
-                  </a:schemeClr>
-                </a:solidFill>
-              </a:rPr>
-              <a:t>[Filter &amp; Check Boxes show fit]</a:t>
+              <a:t>Suitability Model Ranges [Filter &amp; Check Boxes show fit]</a:t>
             </a:r>
             <a:endParaRPr lang="LID4096" sz="1400" dirty="0">
               <a:solidFill>
@@ -4690,10 +4672,16 @@
           <p:cNvGraphicFramePr>
             <a:graphicFrameLocks noGrp="1"/>
           </p:cNvGraphicFramePr>
-          <p:nvPr/>
+          <p:nvPr>
+            <p:extLst>
+              <p:ext uri="{D42A27DB-BD31-4B8C-83A1-F6EECF244321}">
+                <p14:modId xmlns:p14="http://schemas.microsoft.com/office/powerpoint/2010/main" val="2347003586"/>
+              </p:ext>
+            </p:extLst>
+          </p:nvPr>
         </p:nvGraphicFramePr>
         <p:xfrm>
-          <a:off x="502551" y="863606"/>
+          <a:off x="496445" y="2417159"/>
           <a:ext cx="2102610" cy="5608683"/>
         </p:xfrm>
         <a:graphic>
@@ -5510,8 +5498,8 @@
         </p:nvSpPr>
         <p:spPr>
           <a:xfrm>
-            <a:off x="3646479" y="3042611"/>
-            <a:ext cx="4553769" cy="1169551"/>
+            <a:off x="6570005" y="2330781"/>
+            <a:ext cx="4553769" cy="1785104"/>
           </a:xfrm>
           <a:prstGeom prst="rect">
             <a:avLst/>
@@ -5596,42 +5584,56 @@
               <a:rPr lang="" sz="1000" dirty="0"/>
               <a:t>Other Option</a:t>
             </a:r>
+          </a:p>
+          <a:p>
+            <a:pPr marL="171450" indent="-171450">
+              <a:buFont typeface="Arial" panose="020B0604020202020204" pitchFamily="34" charset="0"/>
+              <a:buChar char="•"/>
+            </a:pPr>
+            <a:r>
+              <a:rPr lang="" sz="1000" dirty="0">
+                <a:effectLst/>
+              </a:rPr>
+              <a:t>20”</a:t>
+            </a:r>
+          </a:p>
+          <a:p>
+            <a:pPr marL="171450" indent="-171450">
+              <a:buFont typeface="Arial" panose="020B0604020202020204" pitchFamily="34" charset="0"/>
+              <a:buChar char="•"/>
+            </a:pPr>
+            <a:r>
+              <a:rPr lang="" sz="1000" dirty="0"/>
+              <a:t>Silverstone</a:t>
+            </a:r>
+          </a:p>
+          <a:p>
+            <a:pPr marL="171450" indent="-171450">
+              <a:buFont typeface="Arial" panose="020B0604020202020204" pitchFamily="34" charset="0"/>
+              <a:buChar char="•"/>
+            </a:pPr>
+            <a:r>
+              <a:rPr lang="" sz="1000" dirty="0">
+                <a:effectLst/>
+              </a:rPr>
+              <a:t>Japan</a:t>
+            </a:r>
+          </a:p>
+          <a:p>
+            <a:pPr marL="171450" indent="-171450">
+              <a:buFont typeface="Arial" panose="020B0604020202020204" pitchFamily="34" charset="0"/>
+              <a:buChar char="•"/>
+            </a:pPr>
+            <a:r>
+              <a:rPr lang="" sz="1000" dirty="0"/>
+              <a:t>RHD</a:t>
+            </a:r>
             <a:endParaRPr lang="" sz="1000" dirty="0">
               <a:effectLst/>
             </a:endParaRPr>
           </a:p>
         </p:txBody>
       </p:sp>
-      <p:pic>
-        <p:nvPicPr>
-          <p:cNvPr id="17" name="Picture 16">
-            <a:extLst>
-              <a:ext uri="{FF2B5EF4-FFF2-40B4-BE49-F238E27FC236}">
-                <a16:creationId xmlns:a16="http://schemas.microsoft.com/office/drawing/2014/main" id="{1D25B9A8-3B9B-5153-D2A9-6BC407A702B0}"/>
-              </a:ext>
-            </a:extLst>
-          </p:cNvPr>
-          <p:cNvPicPr>
-            <a:picLocks noChangeAspect="1"/>
-          </p:cNvPicPr>
-          <p:nvPr/>
-        </p:nvPicPr>
-        <p:blipFill>
-          <a:blip r:embed="rId7"/>
-          <a:stretch>
-            <a:fillRect/>
-          </a:stretch>
-        </p:blipFill>
-        <p:spPr>
-          <a:xfrm>
-            <a:off x="5132498" y="3214173"/>
-            <a:ext cx="190500" cy="190500"/>
-          </a:xfrm>
-          <a:prstGeom prst="rect">
-            <a:avLst/>
-          </a:prstGeom>
-        </p:spPr>
-      </p:pic>
       <p:grpSp>
         <p:nvGrpSpPr>
           <p:cNvPr id="3" name="Group 2">
@@ -5646,7 +5648,7 @@
         </p:nvGrpSpPr>
         <p:grpSpPr>
           <a:xfrm>
-            <a:off x="4673349" y="4236877"/>
+            <a:off x="5357339" y="4233439"/>
             <a:ext cx="2845302" cy="630942"/>
             <a:chOff x="4853634" y="5796327"/>
             <a:chExt cx="2845302" cy="630942"/>
@@ -5734,7 +5736,7 @@
             <p:nvPr/>
           </p:nvPicPr>
           <p:blipFill>
-            <a:blip r:embed="rId8"/>
+            <a:blip r:embed="rId7"/>
             <a:stretch>
               <a:fillRect/>
             </a:stretch>
@@ -5764,7 +5766,7 @@
             <p:nvPr/>
           </p:nvPicPr>
           <p:blipFill>
-            <a:blip r:embed="rId9"/>
+            <a:blip r:embed="rId8"/>
             <a:stretch>
               <a:fillRect/>
             </a:stretch>
@@ -5794,7 +5796,7 @@
         </p:nvSpPr>
         <p:spPr>
           <a:xfrm>
-            <a:off x="128577" y="217275"/>
+            <a:off x="122471" y="1770828"/>
             <a:ext cx="2976315" cy="6423450"/>
           </a:xfrm>
           <a:prstGeom prst="roundRect">
@@ -5841,8 +5843,8 @@
         </p:nvSpPr>
         <p:spPr>
           <a:xfrm>
-            <a:off x="3144765" y="217275"/>
-            <a:ext cx="6338060" cy="743861"/>
+            <a:off x="3201112" y="217275"/>
+            <a:ext cx="7827672" cy="743861"/>
           </a:xfrm>
           <a:prstGeom prst="roundRect">
             <a:avLst/>
@@ -5888,7 +5890,7 @@
         </p:nvSpPr>
         <p:spPr>
           <a:xfrm>
-            <a:off x="6461135" y="278831"/>
+            <a:off x="7167302" y="278831"/>
             <a:ext cx="2719988" cy="584775"/>
           </a:xfrm>
           <a:prstGeom prst="rect">
@@ -5946,8 +5948,8 @@
         </p:nvSpPr>
         <p:spPr>
           <a:xfrm>
-            <a:off x="3144765" y="1023266"/>
-            <a:ext cx="6338060" cy="1492143"/>
+            <a:off x="3168324" y="1794900"/>
+            <a:ext cx="3193992" cy="2333922"/>
           </a:xfrm>
           <a:prstGeom prst="roundRect">
             <a:avLst/>
@@ -5993,8 +5995,8 @@
         </p:nvSpPr>
         <p:spPr>
           <a:xfrm>
-            <a:off x="3144765" y="2577785"/>
-            <a:ext cx="6338060" cy="1634377"/>
+            <a:off x="6461135" y="1794623"/>
+            <a:ext cx="4662639" cy="2333922"/>
           </a:xfrm>
           <a:prstGeom prst="roundRect">
             <a:avLst/>
@@ -6040,8 +6042,8 @@
         </p:nvSpPr>
         <p:spPr>
           <a:xfrm>
-            <a:off x="9546257" y="213147"/>
-            <a:ext cx="2517165" cy="4023730"/>
+            <a:off x="3201113" y="1033126"/>
+            <a:ext cx="7827671" cy="682948"/>
           </a:xfrm>
           <a:prstGeom prst="roundRect">
             <a:avLst/>
@@ -6073,65 +6075,116 @@
           </a:p>
         </p:txBody>
       </p:sp>
-      <p:sp>
-        <p:nvSpPr>
-          <p:cNvPr id="30" name="TextBox 29">
-            <a:extLst>
-              <a:ext uri="{FF2B5EF4-FFF2-40B4-BE49-F238E27FC236}">
-                <a16:creationId xmlns:a16="http://schemas.microsoft.com/office/drawing/2014/main" id="{C010A92E-A68D-664F-4DA6-9516D354DE86}"/>
-              </a:ext>
-            </a:extLst>
-          </p:cNvPr>
-          <p:cNvSpPr txBox="1"/>
+      <p:grpSp>
+        <p:nvGrpSpPr>
+          <p:cNvPr id="11" name="Group 10">
+            <a:extLst>
+              <a:ext uri="{FF2B5EF4-FFF2-40B4-BE49-F238E27FC236}">
+                <a16:creationId xmlns:a16="http://schemas.microsoft.com/office/drawing/2014/main" id="{6CD2A034-4E76-CFD3-6537-DB021DC36714}"/>
+              </a:ext>
+            </a:extLst>
+          </p:cNvPr>
+          <p:cNvGrpSpPr/>
           <p:nvPr/>
-        </p:nvSpPr>
-        <p:spPr>
+        </p:nvGrpSpPr>
+        <p:grpSpPr>
           <a:xfrm>
-            <a:off x="5322998" y="3259354"/>
-            <a:ext cx="1337408" cy="400110"/>
+            <a:off x="8066009" y="2529603"/>
+            <a:ext cx="1527908" cy="445291"/>
+            <a:chOff x="11626560" y="4891658"/>
+            <a:chExt cx="1527908" cy="445291"/>
           </a:xfrm>
-          <a:prstGeom prst="rect">
-            <a:avLst/>
-          </a:prstGeom>
-          <a:noFill/>
-        </p:spPr>
-        <p:txBody>
-          <a:bodyPr wrap="square">
-            <a:spAutoFit/>
-          </a:bodyPr>
-          <a:lstStyle/>
-          <a:p>
-            <a:pPr algn="ctr"/>
-            <a:r>
-              <a:rPr lang="en-US" sz="1000" dirty="0"/>
-              <a:t>(</a:t>
-            </a:r>
-            <a:r>
-              <a:rPr lang="en-US" sz="1000" dirty="0" err="1"/>
-              <a:t>i</a:t>
-            </a:r>
-            <a:r>
-              <a:rPr lang="en-US" sz="1000" dirty="0"/>
-              <a:t>) Icon is link to open</a:t>
-            </a:r>
-          </a:p>
-          <a:p>
-            <a:pPr algn="ctr"/>
-            <a:r>
-              <a:rPr lang="en-US" sz="500" dirty="0"/>
-              <a:t>[Model Family &amp; Year Introduction </a:t>
-            </a:r>
-            <a:br>
-              <a:rPr lang="en-US" sz="500" dirty="0"/>
-            </a:br>
-            <a:r>
-              <a:rPr lang="en-US" sz="500" dirty="0"/>
-              <a:t>PDF Document]</a:t>
-            </a:r>
-            <a:endParaRPr lang="LID4096" sz="500" dirty="0"/>
-          </a:p>
-        </p:txBody>
-      </p:sp>
+        </p:grpSpPr>
+        <p:pic>
+          <p:nvPicPr>
+            <p:cNvPr id="17" name="Picture 16">
+              <a:extLst>
+                <a:ext uri="{FF2B5EF4-FFF2-40B4-BE49-F238E27FC236}">
+                  <a16:creationId xmlns:a16="http://schemas.microsoft.com/office/drawing/2014/main" id="{1D25B9A8-3B9B-5153-D2A9-6BC407A702B0}"/>
+                </a:ext>
+              </a:extLst>
+            </p:cNvPr>
+            <p:cNvPicPr>
+              <a:picLocks noChangeAspect="1"/>
+            </p:cNvPicPr>
+            <p:nvPr/>
+          </p:nvPicPr>
+          <p:blipFill>
+            <a:blip r:embed="rId9"/>
+            <a:stretch>
+              <a:fillRect/>
+            </a:stretch>
+          </p:blipFill>
+          <p:spPr>
+            <a:xfrm>
+              <a:off x="11626560" y="4891658"/>
+              <a:ext cx="190500" cy="190500"/>
+            </a:xfrm>
+            <a:prstGeom prst="rect">
+              <a:avLst/>
+            </a:prstGeom>
+          </p:spPr>
+        </p:pic>
+        <p:sp>
+          <p:nvSpPr>
+            <p:cNvPr id="30" name="TextBox 29">
+              <a:extLst>
+                <a:ext uri="{FF2B5EF4-FFF2-40B4-BE49-F238E27FC236}">
+                  <a16:creationId xmlns:a16="http://schemas.microsoft.com/office/drawing/2014/main" id="{C010A92E-A68D-664F-4DA6-9516D354DE86}"/>
+                </a:ext>
+              </a:extLst>
+            </p:cNvPr>
+            <p:cNvSpPr txBox="1"/>
+            <p:nvPr/>
+          </p:nvSpPr>
+          <p:spPr>
+            <a:xfrm>
+              <a:off x="11817060" y="4936839"/>
+              <a:ext cx="1337408" cy="400110"/>
+            </a:xfrm>
+            <a:prstGeom prst="rect">
+              <a:avLst/>
+            </a:prstGeom>
+            <a:noFill/>
+          </p:spPr>
+          <p:txBody>
+            <a:bodyPr wrap="square">
+              <a:spAutoFit/>
+            </a:bodyPr>
+            <a:lstStyle/>
+            <a:p>
+              <a:pPr algn="ctr"/>
+              <a:r>
+                <a:rPr lang="en-US" sz="1000" dirty="0"/>
+                <a:t>(</a:t>
+              </a:r>
+              <a:r>
+                <a:rPr lang="en-US" sz="1000" dirty="0" err="1"/>
+                <a:t>i</a:t>
+              </a:r>
+              <a:r>
+                <a:rPr lang="en-US" sz="1000" dirty="0"/>
+                <a:t>) Icon is link to open</a:t>
+              </a:r>
+            </a:p>
+            <a:p>
+              <a:pPr algn="ctr"/>
+              <a:r>
+                <a:rPr lang="en-US" sz="500" dirty="0"/>
+                <a:t>[Model Family &amp; Year Introduction </a:t>
+              </a:r>
+              <a:br>
+                <a:rPr lang="en-US" sz="500" dirty="0"/>
+              </a:br>
+              <a:r>
+                <a:rPr lang="en-US" sz="500" dirty="0"/>
+                <a:t>PDF Document]</a:t>
+              </a:r>
+              <a:endParaRPr lang="LID4096" sz="500" dirty="0"/>
+            </a:p>
+          </p:txBody>
+        </p:sp>
+      </p:grpSp>
       <p:sp>
         <p:nvSpPr>
           <p:cNvPr id="33" name="Rectangle: Rounded Corners 32">
@@ -6146,8 +6199,8 @@
         </p:nvSpPr>
         <p:spPr>
           <a:xfrm>
-            <a:off x="3148197" y="4233716"/>
-            <a:ext cx="6338060" cy="2407009"/>
+            <a:off x="3148196" y="4233716"/>
+            <a:ext cx="7975577" cy="2407009"/>
           </a:xfrm>
           <a:prstGeom prst="roundRect">
             <a:avLst/>
@@ -6176,6 +6229,89 @@
           <a:p>
             <a:pPr algn="ctr"/>
             <a:endParaRPr lang="LID4096"/>
+          </a:p>
+        </p:txBody>
+      </p:sp>
+      <p:sp>
+        <p:nvSpPr>
+          <p:cNvPr id="20" name="Rectangle: Rounded Corners 19">
+            <a:extLst>
+              <a:ext uri="{FF2B5EF4-FFF2-40B4-BE49-F238E27FC236}">
+                <a16:creationId xmlns:a16="http://schemas.microsoft.com/office/drawing/2014/main" id="{1CCA70B1-F593-96DA-9E2B-6A4CF1D0B2B2}"/>
+              </a:ext>
+            </a:extLst>
+          </p:cNvPr>
+          <p:cNvSpPr/>
+          <p:nvPr/>
+        </p:nvSpPr>
+        <p:spPr>
+          <a:xfrm>
+            <a:off x="137705" y="217275"/>
+            <a:ext cx="2976315" cy="1491997"/>
+          </a:xfrm>
+          <a:prstGeom prst="roundRect">
+            <a:avLst/>
+          </a:prstGeom>
+          <a:noFill/>
+        </p:spPr>
+        <p:style>
+          <a:lnRef idx="2">
+            <a:schemeClr val="accent1">
+              <a:shade val="15000"/>
+            </a:schemeClr>
+          </a:lnRef>
+          <a:fillRef idx="1">
+            <a:schemeClr val="accent1"/>
+          </a:fillRef>
+          <a:effectRef idx="0">
+            <a:schemeClr val="accent1"/>
+          </a:effectRef>
+          <a:fontRef idx="minor">
+            <a:schemeClr val="lt1"/>
+          </a:fontRef>
+        </p:style>
+        <p:txBody>
+          <a:bodyPr rtlCol="0" anchor="ctr"/>
+          <a:lstStyle/>
+          <a:p>
+            <a:pPr algn="ctr"/>
+            <a:endParaRPr lang="LID4096"/>
+          </a:p>
+        </p:txBody>
+      </p:sp>
+      <p:sp>
+        <p:nvSpPr>
+          <p:cNvPr id="25" name="TextBox 24">
+            <a:extLst>
+              <a:ext uri="{FF2B5EF4-FFF2-40B4-BE49-F238E27FC236}">
+                <a16:creationId xmlns:a16="http://schemas.microsoft.com/office/drawing/2014/main" id="{6E4D0859-D71B-9F6E-1178-5695507839BB}"/>
+              </a:ext>
+            </a:extLst>
+          </p:cNvPr>
+          <p:cNvSpPr txBox="1"/>
+          <p:nvPr/>
+        </p:nvSpPr>
+        <p:spPr>
+          <a:xfrm>
+            <a:off x="208834" y="663794"/>
+            <a:ext cx="2803588" cy="369332"/>
+          </a:xfrm>
+          <a:prstGeom prst="rect">
+            <a:avLst/>
+          </a:prstGeom>
+          <a:noFill/>
+        </p:spPr>
+        <p:txBody>
+          <a:bodyPr wrap="none" rtlCol="0">
+            <a:spAutoFit/>
+          </a:bodyPr>
+          <a:lstStyle/>
+          <a:p>
+            <a:r>
+              <a:rPr lang="en-GB" dirty="0"/>
+              <a:t>Logos and instructions etc</a:t>
+            </a:r>
+            <a:endParaRPr lang="LID4096" dirty="0"/>
           </a:p>
         </p:txBody>
       </p:sp>

--- a/5-Implementation-Projects/internet/jagports/solution/vieps/UI_CONCEPTS/VIEPS UI-Concepts.pptx
+++ b/5-Implementation-Projects/internet/jagports/solution/vieps/UI_CONCEPTS/VIEPS UI-Concepts.pptx
@@ -121,6 +121,7 @@
   <p1510:revLst>
     <p1510:client id="{40F9EE7E-8F40-43E2-BB4D-50812324D88A}" v="5" dt="2026-09-14T05:49:58.183"/>
     <p1510:client id="{4DECE69C-0D69-4376-B837-DA0BA91C450E}" v="5" dt="2026-09-14T03:14:25.393"/>
+    <p1510:client id="{C50B5A6B-7C2A-453A-A603-CAE8B696E475}" v="3" dt="2026-09-14T05:54:42.416"/>
   </p1510:revLst>
 </p1510:revInfo>
 </file>
@@ -130,7 +131,7 @@
   <pc:docChgLst>
     <pc:chgData name="Tomi Lind" userId="8de46aee-b41d-491b-a3c8-daf1b5776a2e" providerId="ADAL" clId="{DA4176E6-4A74-4541-B8FC-EC14009AAF7D}"/>
     <pc:docChg chg="undo custSel addSld modSld sldOrd">
-      <pc:chgData name="Tomi Lind" userId="8de46aee-b41d-491b-a3c8-daf1b5776a2e" providerId="ADAL" clId="{DA4176E6-4A74-4541-B8FC-EC14009AAF7D}" dt="2026-09-14T05:50:26.695" v="1766" actId="20577"/>
+      <pc:chgData name="Tomi Lind" userId="8de46aee-b41d-491b-a3c8-daf1b5776a2e" providerId="ADAL" clId="{DA4176E6-4A74-4541-B8FC-EC14009AAF7D}" dt="2026-09-14T05:55:12.003" v="1822" actId="1076"/>
       <pc:docMkLst>
         <pc:docMk/>
       </pc:docMkLst>
@@ -643,7 +644,7 @@
         </pc:picChg>
       </pc:sldChg>
       <pc:sldChg chg="addSp delSp modSp add mod">
-        <pc:chgData name="Tomi Lind" userId="8de46aee-b41d-491b-a3c8-daf1b5776a2e" providerId="ADAL" clId="{DA4176E6-4A74-4541-B8FC-EC14009AAF7D}" dt="2026-09-14T05:50:26.695" v="1766" actId="20577"/>
+        <pc:chgData name="Tomi Lind" userId="8de46aee-b41d-491b-a3c8-daf1b5776a2e" providerId="ADAL" clId="{DA4176E6-4A74-4541-B8FC-EC14009AAF7D}" dt="2026-09-14T05:55:12.003" v="1822" actId="1076"/>
         <pc:sldMkLst>
           <pc:docMk/>
           <pc:sldMk cId="2519818258" sldId="260"/>
@@ -670,6 +671,14 @@
             <pc:docMk/>
             <pc:sldMk cId="2519818258" sldId="260"/>
             <ac:spMk id="5" creationId="{B7D21118-CD4E-3935-22BD-95EFEFFE031B}"/>
+          </ac:spMkLst>
+        </pc:spChg>
+        <pc:spChg chg="add mod">
+          <ac:chgData name="Tomi Lind" userId="8de46aee-b41d-491b-a3c8-daf1b5776a2e" providerId="ADAL" clId="{DA4176E6-4A74-4541-B8FC-EC14009AAF7D}" dt="2026-09-14T05:55:12.003" v="1822" actId="1076"/>
+          <ac:spMkLst>
+            <pc:docMk/>
+            <pc:sldMk cId="2519818258" sldId="260"/>
+            <ac:spMk id="7" creationId="{272B1F46-BC3D-86B5-4969-535AB0FEA2A6}"/>
           </ac:spMkLst>
         </pc:spChg>
         <pc:spChg chg="add mod">
@@ -769,7 +778,7 @@
           </ac:spMkLst>
         </pc:spChg>
         <pc:spChg chg="add mod">
-          <ac:chgData name="Tomi Lind" userId="8de46aee-b41d-491b-a3c8-daf1b5776a2e" providerId="ADAL" clId="{DA4176E6-4A74-4541-B8FC-EC14009AAF7D}" dt="2026-09-14T05:50:16.929" v="1750" actId="1076"/>
+          <ac:chgData name="Tomi Lind" userId="8de46aee-b41d-491b-a3c8-daf1b5776a2e" providerId="ADAL" clId="{DA4176E6-4A74-4541-B8FC-EC14009AAF7D}" dt="2026-09-14T05:55:08.299" v="1821" actId="1076"/>
           <ac:spMkLst>
             <pc:docMk/>
             <pc:sldMk cId="2519818258" sldId="260"/>
@@ -6293,7 +6302,7 @@
         </p:nvSpPr>
         <p:spPr>
           <a:xfrm>
-            <a:off x="208834" y="663794"/>
+            <a:off x="274342" y="252900"/>
             <a:ext cx="2803588" cy="369332"/>
           </a:xfrm>
           <a:prstGeom prst="rect">
@@ -6310,6 +6319,49 @@
             <a:r>
               <a:rPr lang="en-GB" dirty="0"/>
               <a:t>Logos and instructions etc</a:t>
+            </a:r>
+            <a:endParaRPr lang="LID4096" dirty="0"/>
+          </a:p>
+        </p:txBody>
+      </p:sp>
+      <p:sp>
+        <p:nvSpPr>
+          <p:cNvPr id="7" name="TextBox 6">
+            <a:extLst>
+              <a:ext uri="{FF2B5EF4-FFF2-40B4-BE49-F238E27FC236}">
+                <a16:creationId xmlns:a16="http://schemas.microsoft.com/office/drawing/2014/main" id="{272B1F46-BC3D-86B5-4969-535AB0FEA2A6}"/>
+              </a:ext>
+            </a:extLst>
+          </p:cNvPr>
+          <p:cNvSpPr txBox="1"/>
+          <p:nvPr/>
+        </p:nvSpPr>
+        <p:spPr>
+          <a:xfrm>
+            <a:off x="253485" y="863848"/>
+            <a:ext cx="1771191" cy="646331"/>
+          </a:xfrm>
+          <a:prstGeom prst="rect">
+            <a:avLst/>
+          </a:prstGeom>
+          <a:noFill/>
+        </p:spPr>
+        <p:txBody>
+          <a:bodyPr wrap="none" rtlCol="0">
+            <a:spAutoFit/>
+          </a:bodyPr>
+          <a:lstStyle/>
+          <a:p>
+            <a:r>
+              <a:rPr lang="en-GB" dirty="0"/>
+              <a:t>Flags Language </a:t>
+            </a:r>
+            <a:br>
+              <a:rPr lang="en-GB" dirty="0"/>
+            </a:br>
+            <a:r>
+              <a:rPr lang="en-GB" dirty="0"/>
+              <a:t>[UI]  [Parts]</a:t>
             </a:r>
             <a:endParaRPr lang="LID4096" dirty="0"/>
           </a:p>

--- a/5-Implementation-Projects/internet/jagports/solution/vieps/UI_CONCEPTS/VIEPS UI-Concepts.pptx
+++ b/5-Implementation-Projects/internet/jagports/solution/vieps/UI_CONCEPTS/VIEPS UI-Concepts.pptx
@@ -6,10 +6,11 @@
   </p:sldMasterIdLst>
   <p:sldIdLst>
     <p:sldId id="260" r:id="rId2"/>
-    <p:sldId id="259" r:id="rId3"/>
-    <p:sldId id="256" r:id="rId4"/>
-    <p:sldId id="257" r:id="rId5"/>
-    <p:sldId id="258" r:id="rId6"/>
+    <p:sldId id="261" r:id="rId3"/>
+    <p:sldId id="259" r:id="rId4"/>
+    <p:sldId id="256" r:id="rId5"/>
+    <p:sldId id="257" r:id="rId6"/>
+    <p:sldId id="258" r:id="rId7"/>
   </p:sldIdLst>
   <p:sldSz cx="12192000" cy="6858000"/>
   <p:notesSz cx="6858000" cy="9144000"/>
@@ -119,9 +120,7 @@
 <file path=ppt/revisionInfo.xml><?xml version="1.0" encoding="utf-8"?>
 <p1510:revInfo xmlns:a="http://schemas.openxmlformats.org/drawingml/2006/main" xmlns:r="http://schemas.openxmlformats.org/officeDocument/2006/relationships" xmlns:p1510="http://schemas.microsoft.com/office/powerpoint/2015/10/main">
   <p1510:revLst>
-    <p1510:client id="{40F9EE7E-8F40-43E2-BB4D-50812324D88A}" v="5" dt="2026-09-14T05:49:58.183"/>
-    <p1510:client id="{4DECE69C-0D69-4376-B837-DA0BA91C450E}" v="5" dt="2026-09-14T03:14:25.393"/>
-    <p1510:client id="{C50B5A6B-7C2A-453A-A603-CAE8B696E475}" v="3" dt="2026-09-14T05:54:42.416"/>
+    <p1510:client id="{7F930627-24DE-48E8-8022-5F862E6DD0FA}" v="5" dt="2026-09-22T11:41:51.436"/>
   </p1510:revLst>
 </p1510:revInfo>
 </file>
@@ -130,8 +129,8 @@
 <pc:chgInfo xmlns:a="http://schemas.openxmlformats.org/drawingml/2006/main" xmlns:r="http://schemas.openxmlformats.org/officeDocument/2006/relationships" xmlns:ac="http://schemas.microsoft.com/office/drawing/2013/main/command" xmlns:pc="http://schemas.microsoft.com/office/powerpoint/2013/main/command">
   <pc:docChgLst>
     <pc:chgData name="Tomi Lind" userId="8de46aee-b41d-491b-a3c8-daf1b5776a2e" providerId="ADAL" clId="{DA4176E6-4A74-4541-B8FC-EC14009AAF7D}"/>
-    <pc:docChg chg="undo custSel addSld modSld sldOrd">
-      <pc:chgData name="Tomi Lind" userId="8de46aee-b41d-491b-a3c8-daf1b5776a2e" providerId="ADAL" clId="{DA4176E6-4A74-4541-B8FC-EC14009AAF7D}" dt="2026-09-14T05:55:12.003" v="1822" actId="1076"/>
+    <pc:docChg chg="undo redo custSel addSld modSld sldOrd">
+      <pc:chgData name="Tomi Lind" userId="8de46aee-b41d-491b-a3c8-daf1b5776a2e" providerId="ADAL" clId="{DA4176E6-4A74-4541-B8FC-EC14009AAF7D}" dt="2026-09-22T11:45:00.208" v="2016" actId="1076"/>
       <pc:docMkLst>
         <pc:docMk/>
       </pc:docMkLst>
@@ -644,251 +643,354 @@
         </pc:picChg>
       </pc:sldChg>
       <pc:sldChg chg="addSp delSp modSp add mod">
-        <pc:chgData name="Tomi Lind" userId="8de46aee-b41d-491b-a3c8-daf1b5776a2e" providerId="ADAL" clId="{DA4176E6-4A74-4541-B8FC-EC14009AAF7D}" dt="2026-09-14T05:55:12.003" v="1822" actId="1076"/>
+        <pc:chgData name="Tomi Lind" userId="8de46aee-b41d-491b-a3c8-daf1b5776a2e" providerId="ADAL" clId="{DA4176E6-4A74-4541-B8FC-EC14009AAF7D}" dt="2026-09-22T11:45:00.208" v="2016" actId="1076"/>
         <pc:sldMkLst>
           <pc:docMk/>
           <pc:sldMk cId="2519818258" sldId="260"/>
         </pc:sldMkLst>
-        <pc:spChg chg="mod">
-          <ac:chgData name="Tomi Lind" userId="8de46aee-b41d-491b-a3c8-daf1b5776a2e" providerId="ADAL" clId="{DA4176E6-4A74-4541-B8FC-EC14009AAF7D}" dt="2026-09-14T05:46:32.449" v="1638" actId="122"/>
+        <pc:spChg chg="del mod">
+          <ac:chgData name="Tomi Lind" userId="8de46aee-b41d-491b-a3c8-daf1b5776a2e" providerId="ADAL" clId="{DA4176E6-4A74-4541-B8FC-EC14009AAF7D}" dt="2026-09-22T11:33:14.770" v="1824" actId="478"/>
           <ac:spMkLst>
             <pc:docMk/>
             <pc:sldMk cId="2519818258" sldId="260"/>
             <ac:spMk id="2" creationId="{AC05A1EE-4009-64AE-4DB0-59C1F889EA9B}"/>
           </ac:spMkLst>
         </pc:spChg>
-        <pc:spChg chg="add mod">
-          <ac:chgData name="Tomi Lind" userId="8de46aee-b41d-491b-a3c8-daf1b5776a2e" providerId="ADAL" clId="{DA4176E6-4A74-4541-B8FC-EC14009AAF7D}" dt="2026-09-14T05:49:41.369" v="1710" actId="1076"/>
+        <pc:spChg chg="add del mod">
+          <ac:chgData name="Tomi Lind" userId="8de46aee-b41d-491b-a3c8-daf1b5776a2e" providerId="ADAL" clId="{DA4176E6-4A74-4541-B8FC-EC14009AAF7D}" dt="2026-09-22T11:33:14.770" v="1824" actId="478"/>
           <ac:spMkLst>
             <pc:docMk/>
             <pc:sldMk cId="2519818258" sldId="260"/>
             <ac:spMk id="4" creationId="{0EC45FF4-EEFB-B446-D7C4-C9226B97D96A}"/>
           </ac:spMkLst>
         </pc:spChg>
-        <pc:spChg chg="mod">
-          <ac:chgData name="Tomi Lind" userId="8de46aee-b41d-491b-a3c8-daf1b5776a2e" providerId="ADAL" clId="{DA4176E6-4A74-4541-B8FC-EC14009AAF7D}" dt="2026-09-14T05:45:17.332" v="1622" actId="1076"/>
-          <ac:spMkLst>
-            <pc:docMk/>
-            <pc:sldMk cId="2519818258" sldId="260"/>
-            <ac:spMk id="5" creationId="{B7D21118-CD4E-3935-22BD-95EFEFFE031B}"/>
-          </ac:spMkLst>
-        </pc:spChg>
-        <pc:spChg chg="add mod">
-          <ac:chgData name="Tomi Lind" userId="8de46aee-b41d-491b-a3c8-daf1b5776a2e" providerId="ADAL" clId="{DA4176E6-4A74-4541-B8FC-EC14009AAF7D}" dt="2026-09-14T05:55:12.003" v="1822" actId="1076"/>
-          <ac:spMkLst>
-            <pc:docMk/>
-            <pc:sldMk cId="2519818258" sldId="260"/>
-            <ac:spMk id="7" creationId="{272B1F46-BC3D-86B5-4969-535AB0FEA2A6}"/>
-          </ac:spMkLst>
-        </pc:spChg>
-        <pc:spChg chg="add mod">
-          <ac:chgData name="Tomi Lind" userId="8de46aee-b41d-491b-a3c8-daf1b5776a2e" providerId="ADAL" clId="{DA4176E6-4A74-4541-B8FC-EC14009AAF7D}" dt="2026-09-14T05:43:46.804" v="1594" actId="571"/>
-          <ac:spMkLst>
-            <pc:docMk/>
-            <pc:sldMk cId="2519818258" sldId="260"/>
-            <ac:spMk id="7" creationId="{B49B30F2-762E-CF05-10EF-7E0F1AC69C0D}"/>
-          </ac:spMkLst>
-        </pc:spChg>
-        <pc:spChg chg="mod">
-          <ac:chgData name="Tomi Lind" userId="8de46aee-b41d-491b-a3c8-daf1b5776a2e" providerId="ADAL" clId="{DA4176E6-4A74-4541-B8FC-EC14009AAF7D}" dt="2026-09-14T05:50:26.695" v="1766" actId="20577"/>
-          <ac:spMkLst>
-            <pc:docMk/>
-            <pc:sldMk cId="2519818258" sldId="260"/>
-            <ac:spMk id="8" creationId="{00A5C7C5-F5D5-8176-4BBB-EEC3E36D2A7F}"/>
-          </ac:spMkLst>
-        </pc:spChg>
-        <pc:spChg chg="add mod">
-          <ac:chgData name="Tomi Lind" userId="8de46aee-b41d-491b-a3c8-daf1b5776a2e" providerId="ADAL" clId="{DA4176E6-4A74-4541-B8FC-EC14009AAF7D}" dt="2026-09-14T05:46:23.747" v="1636" actId="14100"/>
+        <pc:spChg chg="add del mod">
+          <ac:chgData name="Tomi Lind" userId="8de46aee-b41d-491b-a3c8-daf1b5776a2e" providerId="ADAL" clId="{DA4176E6-4A74-4541-B8FC-EC14009AAF7D}" dt="2026-09-22T11:33:14.770" v="1824" actId="478"/>
           <ac:spMkLst>
             <pc:docMk/>
             <pc:sldMk cId="2519818258" sldId="260"/>
             <ac:spMk id="9" creationId="{08E5B60B-ABAD-FB24-25C4-DD61D43E9207}"/>
           </ac:spMkLst>
         </pc:spChg>
-        <pc:spChg chg="mod">
-          <ac:chgData name="Tomi Lind" userId="8de46aee-b41d-491b-a3c8-daf1b5776a2e" providerId="ADAL" clId="{DA4176E6-4A74-4541-B8FC-EC14009AAF7D}" dt="2026-09-14T03:14:25.393" v="1194" actId="164"/>
-          <ac:spMkLst>
-            <pc:docMk/>
-            <pc:sldMk cId="2519818258" sldId="260"/>
-            <ac:spMk id="10" creationId="{2DFB7E50-80BB-753B-4893-390C1E282814}"/>
-          </ac:spMkLst>
-        </pc:spChg>
-        <pc:spChg chg="mod">
-          <ac:chgData name="Tomi Lind" userId="8de46aee-b41d-491b-a3c8-daf1b5776a2e" providerId="ADAL" clId="{DA4176E6-4A74-4541-B8FC-EC14009AAF7D}" dt="2026-09-14T05:47:05.059" v="1663" actId="207"/>
-          <ac:spMkLst>
-            <pc:docMk/>
-            <pc:sldMk cId="2519818258" sldId="260"/>
-            <ac:spMk id="12" creationId="{B69C9B89-0985-A9F4-077E-FAE8D74F4E59}"/>
-          </ac:spMkLst>
-        </pc:spChg>
-        <pc:spChg chg="mod">
-          <ac:chgData name="Tomi Lind" userId="8de46aee-b41d-491b-a3c8-daf1b5776a2e" providerId="ADAL" clId="{DA4176E6-4A74-4541-B8FC-EC14009AAF7D}" dt="2026-09-14T05:47:43.961" v="1702" actId="20577"/>
-          <ac:spMkLst>
-            <pc:docMk/>
-            <pc:sldMk cId="2519818258" sldId="260"/>
-            <ac:spMk id="14" creationId="{02E3853E-A774-FA28-DB61-B413E7048685}"/>
-          </ac:spMkLst>
-        </pc:spChg>
-        <pc:spChg chg="add mod">
-          <ac:chgData name="Tomi Lind" userId="8de46aee-b41d-491b-a3c8-daf1b5776a2e" providerId="ADAL" clId="{DA4176E6-4A74-4541-B8FC-EC14009AAF7D}" dt="2026-09-14T05:46:56.117" v="1662" actId="1038"/>
+        <pc:spChg chg="add del mod">
+          <ac:chgData name="Tomi Lind" userId="8de46aee-b41d-491b-a3c8-daf1b5776a2e" providerId="ADAL" clId="{DA4176E6-4A74-4541-B8FC-EC14009AAF7D}" dt="2026-09-22T11:33:14.770" v="1824" actId="478"/>
           <ac:spMkLst>
             <pc:docMk/>
             <pc:sldMk cId="2519818258" sldId="260"/>
             <ac:spMk id="15" creationId="{6C4DDCFF-6D93-F85F-85FA-0E1418A85086}"/>
           </ac:spMkLst>
         </pc:spChg>
-        <pc:spChg chg="mod">
-          <ac:chgData name="Tomi Lind" userId="8de46aee-b41d-491b-a3c8-daf1b5776a2e" providerId="ADAL" clId="{DA4176E6-4A74-4541-B8FC-EC14009AAF7D}" dt="2026-09-14T05:46:47.672" v="1641" actId="122"/>
-          <ac:spMkLst>
-            <pc:docMk/>
-            <pc:sldMk cId="2519818258" sldId="260"/>
-            <ac:spMk id="16" creationId="{B2AB43A0-62CE-B5F3-C44B-63923AC7EF51}"/>
-          </ac:spMkLst>
-        </pc:spChg>
-        <pc:spChg chg="add mod">
-          <ac:chgData name="Tomi Lind" userId="8de46aee-b41d-491b-a3c8-daf1b5776a2e" providerId="ADAL" clId="{DA4176E6-4A74-4541-B8FC-EC14009AAF7D}" dt="2026-09-14T05:43:10.756" v="1587" actId="14100"/>
+        <pc:spChg chg="add del mod">
+          <ac:chgData name="Tomi Lind" userId="8de46aee-b41d-491b-a3c8-daf1b5776a2e" providerId="ADAL" clId="{DA4176E6-4A74-4541-B8FC-EC14009AAF7D}" dt="2026-09-22T11:33:14.770" v="1824" actId="478"/>
           <ac:spMkLst>
             <pc:docMk/>
             <pc:sldMk cId="2519818258" sldId="260"/>
             <ac:spMk id="19" creationId="{5C20AF56-422F-376B-079B-56CAE9AEA370}"/>
           </ac:spMkLst>
         </pc:spChg>
-        <pc:spChg chg="add mod">
-          <ac:chgData name="Tomi Lind" userId="8de46aee-b41d-491b-a3c8-daf1b5776a2e" providerId="ADAL" clId="{DA4176E6-4A74-4541-B8FC-EC14009AAF7D}" dt="2026-09-14T05:49:56.062" v="1713" actId="14100"/>
+        <pc:spChg chg="add del mod">
+          <ac:chgData name="Tomi Lind" userId="8de46aee-b41d-491b-a3c8-daf1b5776a2e" providerId="ADAL" clId="{DA4176E6-4A74-4541-B8FC-EC14009AAF7D}" dt="2026-09-22T11:33:14.770" v="1824" actId="478"/>
           <ac:spMkLst>
             <pc:docMk/>
             <pc:sldMk cId="2519818258" sldId="260"/>
             <ac:spMk id="20" creationId="{1CCA70B1-F593-96DA-9E2B-6A4CF1D0B2B2}"/>
           </ac:spMkLst>
         </pc:spChg>
-        <pc:spChg chg="mod">
-          <ac:chgData name="Tomi Lind" userId="8de46aee-b41d-491b-a3c8-daf1b5776a2e" providerId="ADAL" clId="{DA4176E6-4A74-4541-B8FC-EC14009AAF7D}" dt="2026-09-14T05:46:56.117" v="1662" actId="1038"/>
+        <pc:spChg chg="del mod">
+          <ac:chgData name="Tomi Lind" userId="8de46aee-b41d-491b-a3c8-daf1b5776a2e" providerId="ADAL" clId="{DA4176E6-4A74-4541-B8FC-EC14009AAF7D}" dt="2026-09-22T11:33:14.770" v="1824" actId="478"/>
           <ac:spMkLst>
             <pc:docMk/>
             <pc:sldMk cId="2519818258" sldId="260"/>
             <ac:spMk id="21" creationId="{DCB9FF69-1B38-F336-5D1E-4AB4D36599E3}"/>
           </ac:spMkLst>
         </pc:spChg>
-        <pc:spChg chg="add mod">
-          <ac:chgData name="Tomi Lind" userId="8de46aee-b41d-491b-a3c8-daf1b5776a2e" providerId="ADAL" clId="{DA4176E6-4A74-4541-B8FC-EC14009AAF7D}" dt="2026-09-14T05:46:09.705" v="1633" actId="14100"/>
+        <pc:spChg chg="add del mod">
+          <ac:chgData name="Tomi Lind" userId="8de46aee-b41d-491b-a3c8-daf1b5776a2e" providerId="ADAL" clId="{DA4176E6-4A74-4541-B8FC-EC14009AAF7D}" dt="2026-09-22T11:33:14.770" v="1824" actId="478"/>
           <ac:spMkLst>
             <pc:docMk/>
             <pc:sldMk cId="2519818258" sldId="260"/>
             <ac:spMk id="22" creationId="{3C184AB4-3A5A-CB4E-DD2D-64EA265478AB}"/>
           </ac:spMkLst>
         </pc:spChg>
-        <pc:spChg chg="add mod">
-          <ac:chgData name="Tomi Lind" userId="8de46aee-b41d-491b-a3c8-daf1b5776a2e" providerId="ADAL" clId="{DA4176E6-4A74-4541-B8FC-EC14009AAF7D}" dt="2026-09-14T05:55:08.299" v="1821" actId="1076"/>
+        <pc:spChg chg="add del mod">
+          <ac:chgData name="Tomi Lind" userId="8de46aee-b41d-491b-a3c8-daf1b5776a2e" providerId="ADAL" clId="{DA4176E6-4A74-4541-B8FC-EC14009AAF7D}" dt="2026-09-22T11:33:14.770" v="1824" actId="478"/>
           <ac:spMkLst>
             <pc:docMk/>
             <pc:sldMk cId="2519818258" sldId="260"/>
             <ac:spMk id="25" creationId="{6E4D0859-D71B-9F6E-1178-5695507839BB}"/>
           </ac:spMkLst>
         </pc:spChg>
-        <pc:spChg chg="add mod">
-          <ac:chgData name="Tomi Lind" userId="8de46aee-b41d-491b-a3c8-daf1b5776a2e" providerId="ADAL" clId="{DA4176E6-4A74-4541-B8FC-EC14009AAF7D}" dt="2026-09-14T05:45:46.312" v="1629" actId="14100"/>
+        <pc:spChg chg="mod">
+          <ac:chgData name="Tomi Lind" userId="8de46aee-b41d-491b-a3c8-daf1b5776a2e" providerId="ADAL" clId="{DA4176E6-4A74-4541-B8FC-EC14009AAF7D}" dt="2026-09-22T11:43:07.993" v="2010" actId="1038"/>
           <ac:spMkLst>
             <pc:docMk/>
             <pc:sldMk cId="2519818258" sldId="260"/>
-            <ac:spMk id="26" creationId="{E0CB1401-A237-018D-E021-6379FC0F57B3}"/>
+            <ac:spMk id="28" creationId="{DCB9FF69-1B38-F336-5D1E-4AB4D36599E3}"/>
           </ac:spMkLst>
         </pc:spChg>
         <pc:spChg chg="add del mod">
-          <ac:chgData name="Tomi Lind" userId="8de46aee-b41d-491b-a3c8-daf1b5776a2e" providerId="ADAL" clId="{DA4176E6-4A74-4541-B8FC-EC14009AAF7D}" dt="2026-09-14T03:19:12.902" v="1363" actId="478"/>
-          <ac:spMkLst>
-            <pc:docMk/>
-            <pc:sldMk cId="2519818258" sldId="260"/>
-            <ac:spMk id="28" creationId="{AB0ECCEF-6B48-7975-B7E7-5B09D074BACF}"/>
-          </ac:spMkLst>
-        </pc:spChg>
-        <pc:spChg chg="add mod">
-          <ac:chgData name="Tomi Lind" userId="8de46aee-b41d-491b-a3c8-daf1b5776a2e" providerId="ADAL" clId="{DA4176E6-4A74-4541-B8FC-EC14009AAF7D}" dt="2026-09-14T05:45:53.902" v="1630" actId="164"/>
-          <ac:spMkLst>
-            <pc:docMk/>
-            <pc:sldMk cId="2519818258" sldId="260"/>
-            <ac:spMk id="30" creationId="{C010A92E-A68D-664F-4DA6-9516D354DE86}"/>
-          </ac:spMkLst>
-        </pc:spChg>
-        <pc:spChg chg="add mod">
-          <ac:chgData name="Tomi Lind" userId="8de46aee-b41d-491b-a3c8-daf1b5776a2e" providerId="ADAL" clId="{DA4176E6-4A74-4541-B8FC-EC14009AAF7D}" dt="2026-09-14T05:46:12.505" v="1634" actId="14100"/>
+          <ac:chgData name="Tomi Lind" userId="8de46aee-b41d-491b-a3c8-daf1b5776a2e" providerId="ADAL" clId="{DA4176E6-4A74-4541-B8FC-EC14009AAF7D}" dt="2026-09-22T11:33:14.770" v="1824" actId="478"/>
           <ac:spMkLst>
             <pc:docMk/>
             <pc:sldMk cId="2519818258" sldId="260"/>
             <ac:spMk id="33" creationId="{A24F25CB-340D-C6A3-4DD6-45D7B45D8A0C}"/>
           </ac:spMkLst>
         </pc:spChg>
-        <pc:grpChg chg="add mod">
-          <ac:chgData name="Tomi Lind" userId="8de46aee-b41d-491b-a3c8-daf1b5776a2e" providerId="ADAL" clId="{DA4176E6-4A74-4541-B8FC-EC14009AAF7D}" dt="2026-09-14T05:46:17.828" v="1635" actId="1076"/>
+        <pc:spChg chg="add del mod">
+          <ac:chgData name="Tomi Lind" userId="8de46aee-b41d-491b-a3c8-daf1b5776a2e" providerId="ADAL" clId="{DA4176E6-4A74-4541-B8FC-EC14009AAF7D}" dt="2026-09-22T11:41:19.602" v="1980" actId="478"/>
+          <ac:spMkLst>
+            <pc:docMk/>
+            <pc:sldMk cId="2519818258" sldId="260"/>
+            <ac:spMk id="35" creationId="{B7D21118-CD4E-3935-22BD-95EFEFFE031B}"/>
+          </ac:spMkLst>
+        </pc:spChg>
+        <pc:spChg chg="mod">
+          <ac:chgData name="Tomi Lind" userId="8de46aee-b41d-491b-a3c8-daf1b5776a2e" providerId="ADAL" clId="{DA4176E6-4A74-4541-B8FC-EC14009AAF7D}" dt="2026-09-22T11:42:30.872" v="2000" actId="1076"/>
+          <ac:spMkLst>
+            <pc:docMk/>
+            <pc:sldMk cId="2519818258" sldId="260"/>
+            <ac:spMk id="36" creationId="{00A5C7C5-F5D5-8176-4BBB-EEC3E36D2A7F}"/>
+          </ac:spMkLst>
+        </pc:spChg>
+        <pc:spChg chg="mod">
+          <ac:chgData name="Tomi Lind" userId="8de46aee-b41d-491b-a3c8-daf1b5776a2e" providerId="ADAL" clId="{DA4176E6-4A74-4541-B8FC-EC14009AAF7D}" dt="2026-09-22T11:34:44.593" v="1884" actId="1076"/>
+          <ac:spMkLst>
+            <pc:docMk/>
+            <pc:sldMk cId="2519818258" sldId="260"/>
+            <ac:spMk id="37" creationId="{B69C9B89-0985-A9F4-077E-FAE8D74F4E59}"/>
+          </ac:spMkLst>
+        </pc:spChg>
+        <pc:spChg chg="add mod">
+          <ac:chgData name="Tomi Lind" userId="8de46aee-b41d-491b-a3c8-daf1b5776a2e" providerId="ADAL" clId="{DA4176E6-4A74-4541-B8FC-EC14009AAF7D}" dt="2026-09-22T11:36:59.182" v="1900" actId="1076"/>
+          <ac:spMkLst>
+            <pc:docMk/>
+            <pc:sldMk cId="2519818258" sldId="260"/>
+            <ac:spMk id="38" creationId="{B2AB43A0-62CE-B5F3-C44B-63923AC7EF51}"/>
+          </ac:spMkLst>
+        </pc:spChg>
+        <pc:spChg chg="mod">
+          <ac:chgData name="Tomi Lind" userId="8de46aee-b41d-491b-a3c8-daf1b5776a2e" providerId="ADAL" clId="{DA4176E6-4A74-4541-B8FC-EC14009AAF7D}" dt="2026-09-22T11:42:05.852" v="1997" actId="1076"/>
+          <ac:spMkLst>
+            <pc:docMk/>
+            <pc:sldMk cId="2519818258" sldId="260"/>
+            <ac:spMk id="40" creationId="{02E3853E-A774-FA28-DB61-B413E7048685}"/>
+          </ac:spMkLst>
+        </pc:spChg>
+        <pc:spChg chg="add mod">
+          <ac:chgData name="Tomi Lind" userId="8de46aee-b41d-491b-a3c8-daf1b5776a2e" providerId="ADAL" clId="{DA4176E6-4A74-4541-B8FC-EC14009AAF7D}" dt="2026-09-22T11:38:49.095" v="1926" actId="14100"/>
+          <ac:spMkLst>
+            <pc:docMk/>
+            <pc:sldMk cId="2519818258" sldId="260"/>
+            <ac:spMk id="42" creationId="{0EC45FF4-EEFB-B446-D7C4-C9226B97D96A}"/>
+          </ac:spMkLst>
+        </pc:spChg>
+        <pc:spChg chg="add del mod">
+          <ac:chgData name="Tomi Lind" userId="8de46aee-b41d-491b-a3c8-daf1b5776a2e" providerId="ADAL" clId="{DA4176E6-4A74-4541-B8FC-EC14009AAF7D}" dt="2026-09-22T11:38:44.514" v="1925" actId="478"/>
+          <ac:spMkLst>
+            <pc:docMk/>
+            <pc:sldMk cId="2519818258" sldId="260"/>
+            <ac:spMk id="43" creationId="{08E5B60B-ABAD-FB24-25C4-DD61D43E9207}"/>
+          </ac:spMkLst>
+        </pc:spChg>
+        <pc:spChg chg="mod">
+          <ac:chgData name="Tomi Lind" userId="8de46aee-b41d-491b-a3c8-daf1b5776a2e" providerId="ADAL" clId="{DA4176E6-4A74-4541-B8FC-EC14009AAF7D}" dt="2026-09-22T11:36:10.195" v="1896" actId="1076"/>
+          <ac:spMkLst>
+            <pc:docMk/>
+            <pc:sldMk cId="2519818258" sldId="260"/>
+            <ac:spMk id="44" creationId="{6C4DDCFF-6D93-F85F-85FA-0E1418A85086}"/>
+          </ac:spMkLst>
+        </pc:spChg>
+        <pc:spChg chg="mod">
+          <ac:chgData name="Tomi Lind" userId="8de46aee-b41d-491b-a3c8-daf1b5776a2e" providerId="ADAL" clId="{DA4176E6-4A74-4541-B8FC-EC14009AAF7D}" dt="2026-09-22T11:34:44.593" v="1884" actId="1076"/>
+          <ac:spMkLst>
+            <pc:docMk/>
+            <pc:sldMk cId="2519818258" sldId="260"/>
+            <ac:spMk id="45" creationId="{5C20AF56-422F-376B-079B-56CAE9AEA370}"/>
+          </ac:spMkLst>
+        </pc:spChg>
+        <pc:spChg chg="add mod">
+          <ac:chgData name="Tomi Lind" userId="8de46aee-b41d-491b-a3c8-daf1b5776a2e" providerId="ADAL" clId="{DA4176E6-4A74-4541-B8FC-EC14009AAF7D}" dt="2026-09-22T11:42:20.453" v="1999" actId="14100"/>
+          <ac:spMkLst>
+            <pc:docMk/>
+            <pc:sldMk cId="2519818258" sldId="260"/>
+            <ac:spMk id="46" creationId="{3C184AB4-3A5A-CB4E-DD2D-64EA265478AB}"/>
+          </ac:spMkLst>
+        </pc:spChg>
+        <pc:spChg chg="add mod">
+          <ac:chgData name="Tomi Lind" userId="8de46aee-b41d-491b-a3c8-daf1b5776a2e" providerId="ADAL" clId="{DA4176E6-4A74-4541-B8FC-EC14009AAF7D}" dt="2026-09-22T11:42:59.206" v="2002" actId="14100"/>
+          <ac:spMkLst>
+            <pc:docMk/>
+            <pc:sldMk cId="2519818258" sldId="260"/>
+            <ac:spMk id="47" creationId="{E0CB1401-A237-018D-E021-6379FC0F57B3}"/>
+          </ac:spMkLst>
+        </pc:spChg>
+        <pc:spChg chg="del mod">
+          <ac:chgData name="Tomi Lind" userId="8de46aee-b41d-491b-a3c8-daf1b5776a2e" providerId="ADAL" clId="{DA4176E6-4A74-4541-B8FC-EC14009AAF7D}" dt="2026-09-22T11:35:21.149" v="1890" actId="478"/>
+          <ac:spMkLst>
+            <pc:docMk/>
+            <pc:sldMk cId="2519818258" sldId="260"/>
+            <ac:spMk id="49" creationId="{A24F25CB-340D-C6A3-4DD6-45D7B45D8A0C}"/>
+          </ac:spMkLst>
+        </pc:spChg>
+        <pc:spChg chg="add mod">
+          <ac:chgData name="Tomi Lind" userId="8de46aee-b41d-491b-a3c8-daf1b5776a2e" providerId="ADAL" clId="{DA4176E6-4A74-4541-B8FC-EC14009AAF7D}" dt="2026-09-22T11:34:00.516" v="1831" actId="14100"/>
+          <ac:spMkLst>
+            <pc:docMk/>
+            <pc:sldMk cId="2519818258" sldId="260"/>
+            <ac:spMk id="50" creationId="{1CCA70B1-F593-96DA-9E2B-6A4CF1D0B2B2}"/>
+          </ac:spMkLst>
+        </pc:spChg>
+        <pc:spChg chg="add mod">
+          <ac:chgData name="Tomi Lind" userId="8de46aee-b41d-491b-a3c8-daf1b5776a2e" providerId="ADAL" clId="{DA4176E6-4A74-4541-B8FC-EC14009AAF7D}" dt="2026-09-22T11:33:54.323" v="1830" actId="1076"/>
+          <ac:spMkLst>
+            <pc:docMk/>
+            <pc:sldMk cId="2519818258" sldId="260"/>
+            <ac:spMk id="51" creationId="{6E4D0859-D71B-9F6E-1178-5695507839BB}"/>
+          </ac:spMkLst>
+        </pc:spChg>
+        <pc:spChg chg="mod">
+          <ac:chgData name="Tomi Lind" userId="8de46aee-b41d-491b-a3c8-daf1b5776a2e" providerId="ADAL" clId="{DA4176E6-4A74-4541-B8FC-EC14009AAF7D}" dt="2026-09-22T11:33:45.989" v="1829" actId="404"/>
+          <ac:spMkLst>
+            <pc:docMk/>
+            <pc:sldMk cId="2519818258" sldId="260"/>
+            <ac:spMk id="52" creationId="{272B1F46-BC3D-86B5-4969-535AB0FEA2A6}"/>
+          </ac:spMkLst>
+        </pc:spChg>
+        <pc:spChg chg="add del mod">
+          <ac:chgData name="Tomi Lind" userId="8de46aee-b41d-491b-a3c8-daf1b5776a2e" providerId="ADAL" clId="{DA4176E6-4A74-4541-B8FC-EC14009AAF7D}" dt="2026-09-22T11:42:51.575" v="2001" actId="478"/>
+          <ac:spMkLst>
+            <pc:docMk/>
+            <pc:sldMk cId="2519818258" sldId="260"/>
+            <ac:spMk id="53" creationId="{9A7F19A5-6247-2C1F-FD92-5281D66149E8}"/>
+          </ac:spMkLst>
+        </pc:spChg>
+        <pc:spChg chg="mod">
+          <ac:chgData name="Tomi Lind" userId="8de46aee-b41d-491b-a3c8-daf1b5776a2e" providerId="ADAL" clId="{DA4176E6-4A74-4541-B8FC-EC14009AAF7D}" dt="2026-09-22T11:44:38.788" v="2015" actId="1076"/>
+          <ac:spMkLst>
+            <pc:docMk/>
+            <pc:sldMk cId="2519818258" sldId="260"/>
+            <ac:spMk id="54" creationId="{A7E3E50E-43C2-13C2-A9A7-2B8A6309E1A2}"/>
+          </ac:spMkLst>
+        </pc:spChg>
+        <pc:spChg chg="del mod">
+          <ac:chgData name="Tomi Lind" userId="8de46aee-b41d-491b-a3c8-daf1b5776a2e" providerId="ADAL" clId="{DA4176E6-4A74-4541-B8FC-EC14009AAF7D}" dt="2026-09-22T11:37:23.089" v="1906" actId="478"/>
+          <ac:spMkLst>
+            <pc:docMk/>
+            <pc:sldMk cId="2519818258" sldId="260"/>
+            <ac:spMk id="55" creationId="{187253FC-50C5-A1B8-09B6-2DB8D6FCBA48}"/>
+          </ac:spMkLst>
+        </pc:spChg>
+        <pc:spChg chg="mod">
+          <ac:chgData name="Tomi Lind" userId="8de46aee-b41d-491b-a3c8-daf1b5776a2e" providerId="ADAL" clId="{DA4176E6-4A74-4541-B8FC-EC14009AAF7D}" dt="2026-09-22T11:39:06.291" v="1930" actId="14100"/>
+          <ac:spMkLst>
+            <pc:docMk/>
+            <pc:sldMk cId="2519818258" sldId="260"/>
+            <ac:spMk id="56" creationId="{C9B063D2-6497-D4C9-2140-167E6EDDA68E}"/>
+          </ac:spMkLst>
+        </pc:spChg>
+        <pc:spChg chg="mod">
+          <ac:chgData name="Tomi Lind" userId="8de46aee-b41d-491b-a3c8-daf1b5776a2e" providerId="ADAL" clId="{DA4176E6-4A74-4541-B8FC-EC14009AAF7D}" dt="2026-09-22T11:41:00.306" v="1977" actId="20577"/>
+          <ac:spMkLst>
+            <pc:docMk/>
+            <pc:sldMk cId="2519818258" sldId="260"/>
+            <ac:spMk id="57" creationId="{7955AB9C-47FF-E30F-2B91-352A457C95A7}"/>
+          </ac:spMkLst>
+        </pc:spChg>
+        <pc:spChg chg="add mod">
+          <ac:chgData name="Tomi Lind" userId="8de46aee-b41d-491b-a3c8-daf1b5776a2e" providerId="ADAL" clId="{DA4176E6-4A74-4541-B8FC-EC14009AAF7D}" dt="2026-09-22T11:33:15.530" v="1825"/>
+          <ac:spMkLst>
+            <pc:docMk/>
+            <pc:sldMk cId="2519818258" sldId="260"/>
+            <ac:spMk id="59" creationId="{C010A92E-A68D-664F-4DA6-9516D354DE86}"/>
+          </ac:spMkLst>
+        </pc:spChg>
+        <pc:spChg chg="add mod">
+          <ac:chgData name="Tomi Lind" userId="8de46aee-b41d-491b-a3c8-daf1b5776a2e" providerId="ADAL" clId="{DA4176E6-4A74-4541-B8FC-EC14009AAF7D}" dt="2026-09-22T11:33:15.530" v="1825"/>
+          <ac:spMkLst>
+            <pc:docMk/>
+            <pc:sldMk cId="2519818258" sldId="260"/>
+            <ac:spMk id="60" creationId="{2DFB7E50-80BB-753B-4893-390C1E282814}"/>
+          </ac:spMkLst>
+        </pc:spChg>
+        <pc:spChg chg="add mod">
+          <ac:chgData name="Tomi Lind" userId="8de46aee-b41d-491b-a3c8-daf1b5776a2e" providerId="ADAL" clId="{DA4176E6-4A74-4541-B8FC-EC14009AAF7D}" dt="2026-09-22T11:44:19.217" v="2013" actId="14100"/>
+          <ac:spMkLst>
+            <pc:docMk/>
+            <pc:sldMk cId="2519818258" sldId="260"/>
+            <ac:spMk id="64" creationId="{34A68682-FD36-C58C-D8BC-CE7155A43C6B}"/>
+          </ac:spMkLst>
+        </pc:spChg>
+        <pc:spChg chg="add mod">
+          <ac:chgData name="Tomi Lind" userId="8de46aee-b41d-491b-a3c8-daf1b5776a2e" providerId="ADAL" clId="{DA4176E6-4A74-4541-B8FC-EC14009AAF7D}" dt="2026-09-22T11:45:00.208" v="2016" actId="1076"/>
+          <ac:spMkLst>
+            <pc:docMk/>
+            <pc:sldMk cId="2519818258" sldId="260"/>
+            <ac:spMk id="65" creationId="{7063681E-71FC-2A79-4094-0FD746882052}"/>
+          </ac:spMkLst>
+        </pc:spChg>
+        <pc:spChg chg="add del mod">
+          <ac:chgData name="Tomi Lind" userId="8de46aee-b41d-491b-a3c8-daf1b5776a2e" providerId="ADAL" clId="{DA4176E6-4A74-4541-B8FC-EC14009AAF7D}" dt="2026-09-22T11:44:03.335" v="2012" actId="478"/>
+          <ac:spMkLst>
+            <pc:docMk/>
+            <pc:sldMk cId="2519818258" sldId="260"/>
+            <ac:spMk id="67" creationId="{D0750063-7A47-ED8F-8A74-8869247C2078}"/>
+          </ac:spMkLst>
+        </pc:spChg>
+        <pc:spChg chg="add del mod">
+          <ac:chgData name="Tomi Lind" userId="8de46aee-b41d-491b-a3c8-daf1b5776a2e" providerId="ADAL" clId="{DA4176E6-4A74-4541-B8FC-EC14009AAF7D}" dt="2026-09-22T11:41:48.204" v="1991" actId="478"/>
+          <ac:spMkLst>
+            <pc:docMk/>
+            <pc:sldMk cId="2519818258" sldId="260"/>
+            <ac:spMk id="69" creationId="{F6696454-F025-0AB6-AC03-7B58000E68C4}"/>
+          </ac:spMkLst>
+        </pc:spChg>
+        <pc:grpChg chg="mod">
+          <ac:chgData name="Tomi Lind" userId="8de46aee-b41d-491b-a3c8-daf1b5776a2e" providerId="ADAL" clId="{DA4176E6-4A74-4541-B8FC-EC14009AAF7D}" dt="2026-09-22T11:43:17.410" v="2011" actId="1076"/>
           <ac:grpSpMkLst>
             <pc:docMk/>
             <pc:sldMk cId="2519818258" sldId="260"/>
-            <ac:grpSpMk id="3" creationId="{284472C1-C8C3-6005-4193-F6FC9642BD03}"/>
+            <ac:grpSpMk id="48" creationId="{6CD2A034-4E76-CFD3-6537-DB021DC36714}"/>
           </ac:grpSpMkLst>
         </pc:grpChg>
-        <pc:grpChg chg="add mod">
-          <ac:chgData name="Tomi Lind" userId="8de46aee-b41d-491b-a3c8-daf1b5776a2e" providerId="ADAL" clId="{DA4176E6-4A74-4541-B8FC-EC14009AAF7D}" dt="2026-09-14T05:45:59.710" v="1631" actId="1076"/>
-          <ac:grpSpMkLst>
-            <pc:docMk/>
-            <pc:sldMk cId="2519818258" sldId="260"/>
-            <ac:grpSpMk id="11" creationId="{6CD2A034-4E76-CFD3-6537-DB021DC36714}"/>
-          </ac:grpSpMkLst>
-        </pc:grpChg>
-        <pc:graphicFrameChg chg="mod">
-          <ac:chgData name="Tomi Lind" userId="8de46aee-b41d-491b-a3c8-daf1b5776a2e" providerId="ADAL" clId="{DA4176E6-4A74-4541-B8FC-EC14009AAF7D}" dt="2026-09-14T05:49:41.369" v="1710" actId="1076"/>
-          <ac:graphicFrameMkLst>
-            <pc:docMk/>
-            <pc:sldMk cId="2519818258" sldId="260"/>
-            <ac:graphicFrameMk id="6" creationId="{1BAD16F7-3E4E-84AE-B364-CCA27300127C}"/>
-          </ac:graphicFrameMkLst>
-        </pc:graphicFrameChg>
         <pc:picChg chg="mod">
-          <ac:chgData name="Tomi Lind" userId="8de46aee-b41d-491b-a3c8-daf1b5776a2e" providerId="ADAL" clId="{DA4176E6-4A74-4541-B8FC-EC14009AAF7D}" dt="2026-09-14T05:46:17.828" v="1635" actId="1076"/>
+          <ac:chgData name="Tomi Lind" userId="8de46aee-b41d-491b-a3c8-daf1b5776a2e" providerId="ADAL" clId="{DA4176E6-4A74-4541-B8FC-EC14009AAF7D}" dt="2026-09-22T11:36:59.182" v="1900" actId="1076"/>
           <ac:picMkLst>
             <pc:docMk/>
             <pc:sldMk cId="2519818258" sldId="260"/>
-            <ac:picMk id="13" creationId="{17AFC1A1-A608-E2E2-DD3B-D7984048C588}"/>
+            <ac:picMk id="18" creationId="{5BD08AAE-30D6-610D-E12A-53A41039600D}"/>
           </ac:picMkLst>
         </pc:picChg>
         <pc:picChg chg="mod">
-          <ac:chgData name="Tomi Lind" userId="8de46aee-b41d-491b-a3c8-daf1b5776a2e" providerId="ADAL" clId="{DA4176E6-4A74-4541-B8FC-EC14009AAF7D}" dt="2026-09-14T05:45:53.902" v="1630" actId="164"/>
+          <ac:chgData name="Tomi Lind" userId="8de46aee-b41d-491b-a3c8-daf1b5776a2e" providerId="ADAL" clId="{DA4176E6-4A74-4541-B8FC-EC14009AAF7D}" dt="2026-09-22T11:34:44.593" v="1884" actId="1076"/>
           <ac:picMkLst>
             <pc:docMk/>
             <pc:sldMk cId="2519818258" sldId="260"/>
-            <ac:picMk id="17" creationId="{1D25B9A8-3B9B-5153-D2A9-6BC407A702B0}"/>
+            <ac:picMk id="27" creationId="{17AFC1A1-A608-E2E2-DD3B-D7984048C588}"/>
           </ac:picMkLst>
         </pc:picChg>
         <pc:picChg chg="mod">
-          <ac:chgData name="Tomi Lind" userId="8de46aee-b41d-491b-a3c8-daf1b5776a2e" providerId="ADAL" clId="{DA4176E6-4A74-4541-B8FC-EC14009AAF7D}" dt="2026-09-14T03:14:25.393" v="1194" actId="164"/>
+          <ac:chgData name="Tomi Lind" userId="8de46aee-b41d-491b-a3c8-daf1b5776a2e" providerId="ADAL" clId="{DA4176E6-4A74-4541-B8FC-EC14009AAF7D}" dt="2026-09-22T11:34:44.593" v="1884" actId="1076"/>
           <ac:picMkLst>
             <pc:docMk/>
             <pc:sldMk cId="2519818258" sldId="260"/>
-            <ac:picMk id="23" creationId="{93224B44-5E2F-7738-6D28-68DF7DF00D1A}"/>
+            <ac:picMk id="29" creationId="{773A8B91-892E-A430-BABB-DD8D0DF57779}"/>
           </ac:picMkLst>
         </pc:picChg>
         <pc:picChg chg="mod">
-          <ac:chgData name="Tomi Lind" userId="8de46aee-b41d-491b-a3c8-daf1b5776a2e" providerId="ADAL" clId="{DA4176E6-4A74-4541-B8FC-EC14009AAF7D}" dt="2026-09-14T03:14:25.393" v="1194" actId="164"/>
+          <ac:chgData name="Tomi Lind" userId="8de46aee-b41d-491b-a3c8-daf1b5776a2e" providerId="ADAL" clId="{DA4176E6-4A74-4541-B8FC-EC14009AAF7D}" dt="2026-09-22T11:34:44.593" v="1884" actId="1076"/>
           <ac:picMkLst>
             <pc:docMk/>
             <pc:sldMk cId="2519818258" sldId="260"/>
-            <ac:picMk id="24" creationId="{BEC95917-5880-048F-76F3-376B7A903BB9}"/>
+            <ac:picMk id="31" creationId="{7C32A727-CD0B-CDF0-4DF0-7894B169FF5F}"/>
           </ac:picMkLst>
         </pc:picChg>
-        <pc:picChg chg="mod">
-          <ac:chgData name="Tomi Lind" userId="8de46aee-b41d-491b-a3c8-daf1b5776a2e" providerId="ADAL" clId="{DA4176E6-4A74-4541-B8FC-EC14009AAF7D}" dt="2026-09-14T05:43:03.305" v="1585" actId="1076"/>
-          <ac:picMkLst>
-            <pc:docMk/>
-            <pc:sldMk cId="2519818258" sldId="260"/>
-            <ac:picMk id="32" creationId="{773A8B91-892E-A430-BABB-DD8D0DF57779}"/>
-          </ac:picMkLst>
-        </pc:picChg>
-        <pc:picChg chg="mod">
-          <ac:chgData name="Tomi Lind" userId="8de46aee-b41d-491b-a3c8-daf1b5776a2e" providerId="ADAL" clId="{DA4176E6-4A74-4541-B8FC-EC14009AAF7D}" dt="2026-09-14T05:43:01.215" v="1584" actId="1076"/>
-          <ac:picMkLst>
-            <pc:docMk/>
-            <pc:sldMk cId="2519818258" sldId="260"/>
-            <ac:picMk id="34" creationId="{7C32A727-CD0B-CDF0-4DF0-7894B169FF5F}"/>
-          </ac:picMkLst>
-        </pc:picChg>
+      </pc:sldChg>
+      <pc:sldChg chg="add">
+        <pc:chgData name="Tomi Lind" userId="8de46aee-b41d-491b-a3c8-daf1b5776a2e" providerId="ADAL" clId="{DA4176E6-4A74-4541-B8FC-EC14009AAF7D}" dt="2026-09-22T11:33:09.656" v="1823" actId="2890"/>
+        <pc:sldMkLst>
+          <pc:docMk/>
+          <pc:sldMk cId="3012814094" sldId="261"/>
+        </pc:sldMkLst>
       </pc:sldChg>
     </pc:docChg>
   </pc:docChgLst>
@@ -1044,7 +1146,7 @@
           <a:p>
             <a:fld id="{E0079C93-06BA-4335-A3D1-B6B7CD2840E1}" type="datetimeFigureOut">
               <a:rPr lang="LID4096" smtClean="0"/>
-              <a:t>09/14/2026</a:t>
+              <a:t>09/22/2026</a:t>
             </a:fld>
             <a:endParaRPr lang="LID4096"/>
           </a:p>
@@ -1244,7 +1346,7 @@
           <a:p>
             <a:fld id="{E0079C93-06BA-4335-A3D1-B6B7CD2840E1}" type="datetimeFigureOut">
               <a:rPr lang="LID4096" smtClean="0"/>
-              <a:t>09/14/2026</a:t>
+              <a:t>09/22/2026</a:t>
             </a:fld>
             <a:endParaRPr lang="LID4096"/>
           </a:p>
@@ -1454,7 +1556,7 @@
           <a:p>
             <a:fld id="{E0079C93-06BA-4335-A3D1-B6B7CD2840E1}" type="datetimeFigureOut">
               <a:rPr lang="LID4096" smtClean="0"/>
-              <a:t>09/14/2026</a:t>
+              <a:t>09/22/2026</a:t>
             </a:fld>
             <a:endParaRPr lang="LID4096"/>
           </a:p>
@@ -1654,7 +1756,7 @@
           <a:p>
             <a:fld id="{E0079C93-06BA-4335-A3D1-B6B7CD2840E1}" type="datetimeFigureOut">
               <a:rPr lang="LID4096" smtClean="0"/>
-              <a:t>09/14/2026</a:t>
+              <a:t>09/22/2026</a:t>
             </a:fld>
             <a:endParaRPr lang="LID4096"/>
           </a:p>
@@ -1930,7 +2032,7 @@
           <a:p>
             <a:fld id="{E0079C93-06BA-4335-A3D1-B6B7CD2840E1}" type="datetimeFigureOut">
               <a:rPr lang="LID4096" smtClean="0"/>
-              <a:t>09/14/2026</a:t>
+              <a:t>09/22/2026</a:t>
             </a:fld>
             <a:endParaRPr lang="LID4096"/>
           </a:p>
@@ -2198,7 +2300,7 @@
           <a:p>
             <a:fld id="{E0079C93-06BA-4335-A3D1-B6B7CD2840E1}" type="datetimeFigureOut">
               <a:rPr lang="LID4096" smtClean="0"/>
-              <a:t>09/14/2026</a:t>
+              <a:t>09/22/2026</a:t>
             </a:fld>
             <a:endParaRPr lang="LID4096"/>
           </a:p>
@@ -2613,7 +2715,7 @@
           <a:p>
             <a:fld id="{E0079C93-06BA-4335-A3D1-B6B7CD2840E1}" type="datetimeFigureOut">
               <a:rPr lang="LID4096" smtClean="0"/>
-              <a:t>09/14/2026</a:t>
+              <a:t>09/22/2026</a:t>
             </a:fld>
             <a:endParaRPr lang="LID4096"/>
           </a:p>
@@ -2755,7 +2857,7 @@
           <a:p>
             <a:fld id="{E0079C93-06BA-4335-A3D1-B6B7CD2840E1}" type="datetimeFigureOut">
               <a:rPr lang="LID4096" smtClean="0"/>
-              <a:t>09/14/2026</a:t>
+              <a:t>09/22/2026</a:t>
             </a:fld>
             <a:endParaRPr lang="LID4096"/>
           </a:p>
@@ -2868,7 +2970,7 @@
           <a:p>
             <a:fld id="{E0079C93-06BA-4335-A3D1-B6B7CD2840E1}" type="datetimeFigureOut">
               <a:rPr lang="LID4096" smtClean="0"/>
-              <a:t>09/14/2026</a:t>
+              <a:t>09/22/2026</a:t>
             </a:fld>
             <a:endParaRPr lang="LID4096"/>
           </a:p>
@@ -3181,7 +3283,7 @@
           <a:p>
             <a:fld id="{E0079C93-06BA-4335-A3D1-B6B7CD2840E1}" type="datetimeFigureOut">
               <a:rPr lang="LID4096" smtClean="0"/>
-              <a:t>09/14/2026</a:t>
+              <a:t>09/22/2026</a:t>
             </a:fld>
             <a:endParaRPr lang="LID4096"/>
           </a:p>
@@ -3470,7 +3572,7 @@
           <a:p>
             <a:fld id="{E0079C93-06BA-4335-A3D1-B6B7CD2840E1}" type="datetimeFigureOut">
               <a:rPr lang="LID4096" smtClean="0"/>
-              <a:t>09/14/2026</a:t>
+              <a:t>09/22/2026</a:t>
             </a:fld>
             <a:endParaRPr lang="LID4096"/>
           </a:p>
@@ -3713,7 +3815,7 @@
           <a:p>
             <a:fld id="{E0079C93-06BA-4335-A3D1-B6B7CD2840E1}" type="datetimeFigureOut">
               <a:rPr lang="LID4096" smtClean="0"/>
-              <a:t>09/14/2026</a:t>
+              <a:t>09/22/2026</a:t>
             </a:fld>
             <a:endParaRPr lang="LID4096"/>
           </a:p>
@@ -4138,10 +4240,3239 @@
       </p:grpSpPr>
       <p:pic>
         <p:nvPicPr>
+          <p:cNvPr id="18" name="Picture 17">
+            <a:extLst>
+              <a:ext uri="{FF2B5EF4-FFF2-40B4-BE49-F238E27FC236}">
+                <a16:creationId xmlns:a16="http://schemas.microsoft.com/office/drawing/2014/main" id="{5BD08AAE-30D6-610D-E12A-53A41039600D}"/>
+              </a:ext>
+            </a:extLst>
+          </p:cNvPr>
+          <p:cNvPicPr>
+            <a:picLocks noChangeAspect="1"/>
+          </p:cNvPicPr>
+          <p:nvPr/>
+        </p:nvPicPr>
+        <p:blipFill>
+          <a:blip r:embed="rId2"/>
+          <a:stretch>
+            <a:fillRect/>
+          </a:stretch>
+        </p:blipFill>
+        <p:spPr>
+          <a:xfrm>
+            <a:off x="10651054" y="3938703"/>
+            <a:ext cx="2072456" cy="2962293"/>
+          </a:xfrm>
+          <a:prstGeom prst="rect">
+            <a:avLst/>
+          </a:prstGeom>
+        </p:spPr>
+      </p:pic>
+      <p:pic>
+        <p:nvPicPr>
+          <p:cNvPr id="27" name="Picture 26">
+            <a:extLst>
+              <a:ext uri="{FF2B5EF4-FFF2-40B4-BE49-F238E27FC236}">
+                <a16:creationId xmlns:a16="http://schemas.microsoft.com/office/drawing/2014/main" id="{17AFC1A1-A608-E2E2-DD3B-D7984048C588}"/>
+              </a:ext>
+            </a:extLst>
+          </p:cNvPr>
+          <p:cNvPicPr>
+            <a:picLocks noChangeAspect="1"/>
+          </p:cNvPicPr>
+          <p:nvPr/>
+        </p:nvPicPr>
+        <p:blipFill>
+          <a:blip r:embed="rId3"/>
+          <a:srcRect t="11758" b="3184"/>
+          <a:stretch>
+            <a:fillRect/>
+          </a:stretch>
+        </p:blipFill>
+        <p:spPr>
+          <a:xfrm>
+            <a:off x="7187445" y="3250647"/>
+            <a:ext cx="1527982" cy="1662516"/>
+          </a:xfrm>
+          <a:prstGeom prst="rect">
+            <a:avLst/>
+          </a:prstGeom>
+        </p:spPr>
+      </p:pic>
+      <p:sp>
+        <p:nvSpPr>
+          <p:cNvPr id="28" name="TextBox 20">
+            <a:extLst>
+              <a:ext uri="{FF2B5EF4-FFF2-40B4-BE49-F238E27FC236}">
+                <a16:creationId xmlns:a16="http://schemas.microsoft.com/office/drawing/2014/main" id="{DCB9FF69-1B38-F336-5D1E-4AB4D36599E3}"/>
+              </a:ext>
+            </a:extLst>
+          </p:cNvPr>
+          <p:cNvSpPr txBox="1"/>
+          <p:nvPr/>
+        </p:nvSpPr>
+        <p:spPr>
+          <a:xfrm>
+            <a:off x="10259880" y="967287"/>
+            <a:ext cx="2719988" cy="692497"/>
+          </a:xfrm>
+          <a:prstGeom prst="rect">
+            <a:avLst/>
+          </a:prstGeom>
+          <a:noFill/>
+        </p:spPr>
+        <p:txBody>
+          <a:bodyPr wrap="square">
+            <a:spAutoFit/>
+          </a:bodyPr>
+          <a:lstStyle>
+            <a:defPPr>
+              <a:defRPr lang="LID4096"/>
+            </a:defPPr>
+            <a:lvl1pPr marL="0" algn="l" defTabSz="914400" rtl="0" eaLnBrk="1" latinLnBrk="0" hangingPunct="1">
+              <a:defRPr sz="1800" kern="1200">
+                <a:solidFill>
+                  <a:schemeClr val="tx1"/>
+                </a:solidFill>
+                <a:latin typeface="+mn-lt"/>
+                <a:ea typeface="+mn-ea"/>
+                <a:cs typeface="+mn-cs"/>
+              </a:defRPr>
+            </a:lvl1pPr>
+            <a:lvl2pPr marL="457200" algn="l" defTabSz="914400" rtl="0" eaLnBrk="1" latinLnBrk="0" hangingPunct="1">
+              <a:defRPr sz="1800" kern="1200">
+                <a:solidFill>
+                  <a:schemeClr val="tx1"/>
+                </a:solidFill>
+                <a:latin typeface="+mn-lt"/>
+                <a:ea typeface="+mn-ea"/>
+                <a:cs typeface="+mn-cs"/>
+              </a:defRPr>
+            </a:lvl2pPr>
+            <a:lvl3pPr marL="914400" algn="l" defTabSz="914400" rtl="0" eaLnBrk="1" latinLnBrk="0" hangingPunct="1">
+              <a:defRPr sz="1800" kern="1200">
+                <a:solidFill>
+                  <a:schemeClr val="tx1"/>
+                </a:solidFill>
+                <a:latin typeface="+mn-lt"/>
+                <a:ea typeface="+mn-ea"/>
+                <a:cs typeface="+mn-cs"/>
+              </a:defRPr>
+            </a:lvl3pPr>
+            <a:lvl4pPr marL="1371600" algn="l" defTabSz="914400" rtl="0" eaLnBrk="1" latinLnBrk="0" hangingPunct="1">
+              <a:defRPr sz="1800" kern="1200">
+                <a:solidFill>
+                  <a:schemeClr val="tx1"/>
+                </a:solidFill>
+                <a:latin typeface="+mn-lt"/>
+                <a:ea typeface="+mn-ea"/>
+                <a:cs typeface="+mn-cs"/>
+              </a:defRPr>
+            </a:lvl4pPr>
+            <a:lvl5pPr marL="1828800" algn="l" defTabSz="914400" rtl="0" eaLnBrk="1" latinLnBrk="0" hangingPunct="1">
+              <a:defRPr sz="1800" kern="1200">
+                <a:solidFill>
+                  <a:schemeClr val="tx1"/>
+                </a:solidFill>
+                <a:latin typeface="+mn-lt"/>
+                <a:ea typeface="+mn-ea"/>
+                <a:cs typeface="+mn-cs"/>
+              </a:defRPr>
+            </a:lvl5pPr>
+            <a:lvl6pPr marL="2286000" algn="l" defTabSz="914400" rtl="0" eaLnBrk="1" latinLnBrk="0" hangingPunct="1">
+              <a:defRPr sz="1800" kern="1200">
+                <a:solidFill>
+                  <a:schemeClr val="tx1"/>
+                </a:solidFill>
+                <a:latin typeface="+mn-lt"/>
+                <a:ea typeface="+mn-ea"/>
+                <a:cs typeface="+mn-cs"/>
+              </a:defRPr>
+            </a:lvl6pPr>
+            <a:lvl7pPr marL="2743200" algn="l" defTabSz="914400" rtl="0" eaLnBrk="1" latinLnBrk="0" hangingPunct="1">
+              <a:defRPr sz="1800" kern="1200">
+                <a:solidFill>
+                  <a:schemeClr val="tx1"/>
+                </a:solidFill>
+                <a:latin typeface="+mn-lt"/>
+                <a:ea typeface="+mn-ea"/>
+                <a:cs typeface="+mn-cs"/>
+              </a:defRPr>
+            </a:lvl7pPr>
+            <a:lvl8pPr marL="3200400" algn="l" defTabSz="914400" rtl="0" eaLnBrk="1" latinLnBrk="0" hangingPunct="1">
+              <a:defRPr sz="1800" kern="1200">
+                <a:solidFill>
+                  <a:schemeClr val="tx1"/>
+                </a:solidFill>
+                <a:latin typeface="+mn-lt"/>
+                <a:ea typeface="+mn-ea"/>
+                <a:cs typeface="+mn-cs"/>
+              </a:defRPr>
+            </a:lvl8pPr>
+            <a:lvl9pPr marL="3657600" algn="l" defTabSz="914400" rtl="0" eaLnBrk="1" latinLnBrk="0" hangingPunct="1">
+              <a:defRPr sz="1800" kern="1200">
+                <a:solidFill>
+                  <a:schemeClr val="tx1"/>
+                </a:solidFill>
+                <a:latin typeface="+mn-lt"/>
+                <a:ea typeface="+mn-ea"/>
+                <a:cs typeface="+mn-cs"/>
+              </a:defRPr>
+            </a:lvl9pPr>
+          </a:lstStyle>
+          <a:p>
+            <a:pPr algn="ctr"/>
+            <a:r>
+              <a:rPr lang="en-US" sz="1200" dirty="0">
+                <a:solidFill>
+                  <a:schemeClr val="tx2">
+                    <a:lumMod val="50000"/>
+                    <a:lumOff val="50000"/>
+                  </a:schemeClr>
+                </a:solidFill>
+              </a:rPr>
+              <a:t>Search: [</a:t>
+            </a:r>
+            <a:r>
+              <a:rPr lang="" sz="1200" dirty="0">
+                <a:solidFill>
+                  <a:schemeClr val="tx2">
+                    <a:lumMod val="50000"/>
+                    <a:lumOff val="50000"/>
+                  </a:schemeClr>
+                </a:solidFill>
+              </a:rPr>
+              <a:t>MJB7703AA-sample]</a:t>
+            </a:r>
+            <a:endParaRPr lang="en-US" sz="1200" dirty="0">
+              <a:solidFill>
+                <a:schemeClr val="tx2">
+                  <a:lumMod val="50000"/>
+                  <a:lumOff val="50000"/>
+                </a:schemeClr>
+              </a:solidFill>
+            </a:endParaRPr>
+          </a:p>
+          <a:p>
+            <a:pPr algn="ctr"/>
+            <a:r>
+              <a:rPr lang="en-US" sz="900" dirty="0"/>
+              <a:t>[when empty update Model Ranges and part tree</a:t>
+            </a:r>
+          </a:p>
+          <a:p>
+            <a:pPr algn="ctr"/>
+            <a:r>
+              <a:rPr lang="en-US" sz="900" dirty="0"/>
+              <a:t>suitability list to show all models and </a:t>
+            </a:r>
+          </a:p>
+          <a:p>
+            <a:pPr algn="ctr"/>
+            <a:r>
+              <a:rPr lang="en-US" sz="900" dirty="0"/>
+              <a:t>main levels which parts stock has]</a:t>
+            </a:r>
+            <a:endParaRPr lang="LID4096" sz="900" dirty="0"/>
+          </a:p>
+        </p:txBody>
+      </p:sp>
+      <p:pic>
+        <p:nvPicPr>
+          <p:cNvPr id="29" name="Picture 28">
+            <a:extLst>
+              <a:ext uri="{FF2B5EF4-FFF2-40B4-BE49-F238E27FC236}">
+                <a16:creationId xmlns:a16="http://schemas.microsoft.com/office/drawing/2014/main" id="{773A8B91-892E-A430-BABB-DD8D0DF57779}"/>
+              </a:ext>
+            </a:extLst>
+          </p:cNvPr>
+          <p:cNvPicPr>
+            <a:picLocks noChangeAspect="1"/>
+          </p:cNvPicPr>
+          <p:nvPr/>
+        </p:nvPicPr>
+        <p:blipFill>
+          <a:blip r:embed="rId4"/>
+          <a:stretch>
+            <a:fillRect/>
+          </a:stretch>
+        </p:blipFill>
+        <p:spPr>
+          <a:xfrm>
+            <a:off x="2549636" y="2884609"/>
+            <a:ext cx="2698044" cy="745067"/>
+          </a:xfrm>
+          <a:prstGeom prst="rect">
+            <a:avLst/>
+          </a:prstGeom>
+        </p:spPr>
+      </p:pic>
+      <p:pic>
+        <p:nvPicPr>
+          <p:cNvPr id="31" name="Graphic 33">
+            <a:extLst>
+              <a:ext uri="{FF2B5EF4-FFF2-40B4-BE49-F238E27FC236}">
+                <a16:creationId xmlns:a16="http://schemas.microsoft.com/office/drawing/2014/main" id="{7C32A727-CD0B-CDF0-4DF0-7894B169FF5F}"/>
+              </a:ext>
+            </a:extLst>
+          </p:cNvPr>
+          <p:cNvPicPr>
+            <a:picLocks noChangeAspect="1"/>
+          </p:cNvPicPr>
+          <p:nvPr/>
+        </p:nvPicPr>
+        <p:blipFill>
+          <a:blip>
+            <a:extLst>
+              <a:ext uri="{96DAC541-7B7A-43D3-8B79-37D633B846F1}">
+                <asvg:svgBlip xmlns:asvg="http://schemas.microsoft.com/office/drawing/2016/SVG/main" r:embed="rId5"/>
+              </a:ext>
+            </a:extLst>
+          </a:blip>
+          <a:stretch>
+            <a:fillRect/>
+          </a:stretch>
+        </p:blipFill>
+        <p:spPr>
+          <a:xfrm>
+            <a:off x="2556091" y="3701666"/>
+            <a:ext cx="2705100" cy="1057275"/>
+          </a:xfrm>
+          <a:prstGeom prst="rect">
+            <a:avLst/>
+          </a:prstGeom>
+        </p:spPr>
+      </p:pic>
+      <p:sp>
+        <p:nvSpPr>
+          <p:cNvPr id="36" name="TextBox 7">
+            <a:extLst>
+              <a:ext uri="{FF2B5EF4-FFF2-40B4-BE49-F238E27FC236}">
+                <a16:creationId xmlns:a16="http://schemas.microsoft.com/office/drawing/2014/main" id="{00A5C7C5-F5D5-8176-4BBB-EEC3E36D2A7F}"/>
+              </a:ext>
+            </a:extLst>
+          </p:cNvPr>
+          <p:cNvSpPr txBox="1"/>
+          <p:nvPr/>
+        </p:nvSpPr>
+        <p:spPr>
+          <a:xfrm>
+            <a:off x="-699621" y="1642587"/>
+            <a:ext cx="2845302" cy="584775"/>
+          </a:xfrm>
+          <a:prstGeom prst="rect">
+            <a:avLst/>
+          </a:prstGeom>
+          <a:noFill/>
+        </p:spPr>
+        <p:txBody>
+          <a:bodyPr wrap="square" rtlCol="0">
+            <a:spAutoFit/>
+          </a:bodyPr>
+          <a:lstStyle>
+            <a:defPPr>
+              <a:defRPr lang="LID4096"/>
+            </a:defPPr>
+            <a:lvl1pPr marL="0" algn="l" defTabSz="914400" rtl="0" eaLnBrk="1" latinLnBrk="0" hangingPunct="1">
+              <a:defRPr sz="1800" kern="1200">
+                <a:solidFill>
+                  <a:schemeClr val="tx1"/>
+                </a:solidFill>
+                <a:latin typeface="+mn-lt"/>
+                <a:ea typeface="+mn-ea"/>
+                <a:cs typeface="+mn-cs"/>
+              </a:defRPr>
+            </a:lvl1pPr>
+            <a:lvl2pPr marL="457200" algn="l" defTabSz="914400" rtl="0" eaLnBrk="1" latinLnBrk="0" hangingPunct="1">
+              <a:defRPr sz="1800" kern="1200">
+                <a:solidFill>
+                  <a:schemeClr val="tx1"/>
+                </a:solidFill>
+                <a:latin typeface="+mn-lt"/>
+                <a:ea typeface="+mn-ea"/>
+                <a:cs typeface="+mn-cs"/>
+              </a:defRPr>
+            </a:lvl2pPr>
+            <a:lvl3pPr marL="914400" algn="l" defTabSz="914400" rtl="0" eaLnBrk="1" latinLnBrk="0" hangingPunct="1">
+              <a:defRPr sz="1800" kern="1200">
+                <a:solidFill>
+                  <a:schemeClr val="tx1"/>
+                </a:solidFill>
+                <a:latin typeface="+mn-lt"/>
+                <a:ea typeface="+mn-ea"/>
+                <a:cs typeface="+mn-cs"/>
+              </a:defRPr>
+            </a:lvl3pPr>
+            <a:lvl4pPr marL="1371600" algn="l" defTabSz="914400" rtl="0" eaLnBrk="1" latinLnBrk="0" hangingPunct="1">
+              <a:defRPr sz="1800" kern="1200">
+                <a:solidFill>
+                  <a:schemeClr val="tx1"/>
+                </a:solidFill>
+                <a:latin typeface="+mn-lt"/>
+                <a:ea typeface="+mn-ea"/>
+                <a:cs typeface="+mn-cs"/>
+              </a:defRPr>
+            </a:lvl4pPr>
+            <a:lvl5pPr marL="1828800" algn="l" defTabSz="914400" rtl="0" eaLnBrk="1" latinLnBrk="0" hangingPunct="1">
+              <a:defRPr sz="1800" kern="1200">
+                <a:solidFill>
+                  <a:schemeClr val="tx1"/>
+                </a:solidFill>
+                <a:latin typeface="+mn-lt"/>
+                <a:ea typeface="+mn-ea"/>
+                <a:cs typeface="+mn-cs"/>
+              </a:defRPr>
+            </a:lvl5pPr>
+            <a:lvl6pPr marL="2286000" algn="l" defTabSz="914400" rtl="0" eaLnBrk="1" latinLnBrk="0" hangingPunct="1">
+              <a:defRPr sz="1800" kern="1200">
+                <a:solidFill>
+                  <a:schemeClr val="tx1"/>
+                </a:solidFill>
+                <a:latin typeface="+mn-lt"/>
+                <a:ea typeface="+mn-ea"/>
+                <a:cs typeface="+mn-cs"/>
+              </a:defRPr>
+            </a:lvl6pPr>
+            <a:lvl7pPr marL="2743200" algn="l" defTabSz="914400" rtl="0" eaLnBrk="1" latinLnBrk="0" hangingPunct="1">
+              <a:defRPr sz="1800" kern="1200">
+                <a:solidFill>
+                  <a:schemeClr val="tx1"/>
+                </a:solidFill>
+                <a:latin typeface="+mn-lt"/>
+                <a:ea typeface="+mn-ea"/>
+                <a:cs typeface="+mn-cs"/>
+              </a:defRPr>
+            </a:lvl7pPr>
+            <a:lvl8pPr marL="3200400" algn="l" defTabSz="914400" rtl="0" eaLnBrk="1" latinLnBrk="0" hangingPunct="1">
+              <a:defRPr sz="1800" kern="1200">
+                <a:solidFill>
+                  <a:schemeClr val="tx1"/>
+                </a:solidFill>
+                <a:latin typeface="+mn-lt"/>
+                <a:ea typeface="+mn-ea"/>
+                <a:cs typeface="+mn-cs"/>
+              </a:defRPr>
+            </a:lvl8pPr>
+            <a:lvl9pPr marL="3657600" algn="l" defTabSz="914400" rtl="0" eaLnBrk="1" latinLnBrk="0" hangingPunct="1">
+              <a:defRPr sz="1800" kern="1200">
+                <a:solidFill>
+                  <a:schemeClr val="tx1"/>
+                </a:solidFill>
+                <a:latin typeface="+mn-lt"/>
+                <a:ea typeface="+mn-ea"/>
+                <a:cs typeface="+mn-cs"/>
+              </a:defRPr>
+            </a:lvl9pPr>
+          </a:lstStyle>
+          <a:p>
+            <a:pPr algn="ctr"/>
+            <a:r>
+              <a:rPr lang="en-US" sz="1600" dirty="0">
+                <a:solidFill>
+                  <a:schemeClr val="tx2">
+                    <a:lumMod val="50000"/>
+                    <a:lumOff val="50000"/>
+                  </a:schemeClr>
+                </a:solidFill>
+              </a:rPr>
+              <a:t>Parts tree (scrolling list</a:t>
+            </a:r>
+          </a:p>
+          <a:p>
+            <a:pPr algn="ctr"/>
+            <a:r>
+              <a:rPr lang="en-US" sz="1600" dirty="0">
+                <a:solidFill>
+                  <a:schemeClr val="tx2">
+                    <a:lumMod val="50000"/>
+                    <a:lumOff val="50000"/>
+                  </a:schemeClr>
+                </a:solidFill>
+              </a:rPr>
+              <a:t>[show only relevant path(s)]</a:t>
+            </a:r>
+            <a:endParaRPr lang="LID4096" sz="1600" dirty="0">
+              <a:solidFill>
+                <a:schemeClr val="tx2">
+                  <a:lumMod val="50000"/>
+                  <a:lumOff val="50000"/>
+                </a:schemeClr>
+              </a:solidFill>
+            </a:endParaRPr>
+          </a:p>
+        </p:txBody>
+      </p:sp>
+      <p:sp>
+        <p:nvSpPr>
+          <p:cNvPr id="37" name="TextBox 11">
+            <a:extLst>
+              <a:ext uri="{FF2B5EF4-FFF2-40B4-BE49-F238E27FC236}">
+                <a16:creationId xmlns:a16="http://schemas.microsoft.com/office/drawing/2014/main" id="{B69C9B89-0985-A9F4-077E-FAE8D74F4E59}"/>
+              </a:ext>
+            </a:extLst>
+          </p:cNvPr>
+          <p:cNvSpPr txBox="1"/>
+          <p:nvPr/>
+        </p:nvSpPr>
+        <p:spPr>
+          <a:xfrm>
+            <a:off x="3074668" y="2553336"/>
+            <a:ext cx="1728550" cy="369332"/>
+          </a:xfrm>
+          <a:prstGeom prst="rect">
+            <a:avLst/>
+          </a:prstGeom>
+          <a:noFill/>
+        </p:spPr>
+        <p:txBody>
+          <a:bodyPr wrap="square" rtlCol="0">
+            <a:spAutoFit/>
+          </a:bodyPr>
+          <a:lstStyle>
+            <a:defPPr>
+              <a:defRPr lang="LID4096"/>
+            </a:defPPr>
+            <a:lvl1pPr marL="0" algn="l" defTabSz="914400" rtl="0" eaLnBrk="1" latinLnBrk="0" hangingPunct="1">
+              <a:defRPr sz="1800" kern="1200">
+                <a:solidFill>
+                  <a:schemeClr val="tx1"/>
+                </a:solidFill>
+                <a:latin typeface="+mn-lt"/>
+                <a:ea typeface="+mn-ea"/>
+                <a:cs typeface="+mn-cs"/>
+              </a:defRPr>
+            </a:lvl1pPr>
+            <a:lvl2pPr marL="457200" algn="l" defTabSz="914400" rtl="0" eaLnBrk="1" latinLnBrk="0" hangingPunct="1">
+              <a:defRPr sz="1800" kern="1200">
+                <a:solidFill>
+                  <a:schemeClr val="tx1"/>
+                </a:solidFill>
+                <a:latin typeface="+mn-lt"/>
+                <a:ea typeface="+mn-ea"/>
+                <a:cs typeface="+mn-cs"/>
+              </a:defRPr>
+            </a:lvl2pPr>
+            <a:lvl3pPr marL="914400" algn="l" defTabSz="914400" rtl="0" eaLnBrk="1" latinLnBrk="0" hangingPunct="1">
+              <a:defRPr sz="1800" kern="1200">
+                <a:solidFill>
+                  <a:schemeClr val="tx1"/>
+                </a:solidFill>
+                <a:latin typeface="+mn-lt"/>
+                <a:ea typeface="+mn-ea"/>
+                <a:cs typeface="+mn-cs"/>
+              </a:defRPr>
+            </a:lvl3pPr>
+            <a:lvl4pPr marL="1371600" algn="l" defTabSz="914400" rtl="0" eaLnBrk="1" latinLnBrk="0" hangingPunct="1">
+              <a:defRPr sz="1800" kern="1200">
+                <a:solidFill>
+                  <a:schemeClr val="tx1"/>
+                </a:solidFill>
+                <a:latin typeface="+mn-lt"/>
+                <a:ea typeface="+mn-ea"/>
+                <a:cs typeface="+mn-cs"/>
+              </a:defRPr>
+            </a:lvl4pPr>
+            <a:lvl5pPr marL="1828800" algn="l" defTabSz="914400" rtl="0" eaLnBrk="1" latinLnBrk="0" hangingPunct="1">
+              <a:defRPr sz="1800" kern="1200">
+                <a:solidFill>
+                  <a:schemeClr val="tx1"/>
+                </a:solidFill>
+                <a:latin typeface="+mn-lt"/>
+                <a:ea typeface="+mn-ea"/>
+                <a:cs typeface="+mn-cs"/>
+              </a:defRPr>
+            </a:lvl5pPr>
+            <a:lvl6pPr marL="2286000" algn="l" defTabSz="914400" rtl="0" eaLnBrk="1" latinLnBrk="0" hangingPunct="1">
+              <a:defRPr sz="1800" kern="1200">
+                <a:solidFill>
+                  <a:schemeClr val="tx1"/>
+                </a:solidFill>
+                <a:latin typeface="+mn-lt"/>
+                <a:ea typeface="+mn-ea"/>
+                <a:cs typeface="+mn-cs"/>
+              </a:defRPr>
+            </a:lvl6pPr>
+            <a:lvl7pPr marL="2743200" algn="l" defTabSz="914400" rtl="0" eaLnBrk="1" latinLnBrk="0" hangingPunct="1">
+              <a:defRPr sz="1800" kern="1200">
+                <a:solidFill>
+                  <a:schemeClr val="tx1"/>
+                </a:solidFill>
+                <a:latin typeface="+mn-lt"/>
+                <a:ea typeface="+mn-ea"/>
+                <a:cs typeface="+mn-cs"/>
+              </a:defRPr>
+            </a:lvl7pPr>
+            <a:lvl8pPr marL="3200400" algn="l" defTabSz="914400" rtl="0" eaLnBrk="1" latinLnBrk="0" hangingPunct="1">
+              <a:defRPr sz="1800" kern="1200">
+                <a:solidFill>
+                  <a:schemeClr val="tx1"/>
+                </a:solidFill>
+                <a:latin typeface="+mn-lt"/>
+                <a:ea typeface="+mn-ea"/>
+                <a:cs typeface="+mn-cs"/>
+              </a:defRPr>
+            </a:lvl8pPr>
+            <a:lvl9pPr marL="3657600" algn="l" defTabSz="914400" rtl="0" eaLnBrk="1" latinLnBrk="0" hangingPunct="1">
+              <a:defRPr sz="1800" kern="1200">
+                <a:solidFill>
+                  <a:schemeClr val="tx1"/>
+                </a:solidFill>
+                <a:latin typeface="+mn-lt"/>
+                <a:ea typeface="+mn-ea"/>
+                <a:cs typeface="+mn-cs"/>
+              </a:defRPr>
+            </a:lvl9pPr>
+          </a:lstStyle>
+          <a:p>
+            <a:r>
+              <a:rPr lang="en-US" dirty="0">
+                <a:solidFill>
+                  <a:schemeClr val="tx2">
+                    <a:lumMod val="50000"/>
+                    <a:lumOff val="50000"/>
+                  </a:schemeClr>
+                </a:solidFill>
+              </a:rPr>
+              <a:t>Location at car:</a:t>
+            </a:r>
+          </a:p>
+        </p:txBody>
+      </p:sp>
+      <p:sp>
+        <p:nvSpPr>
+          <p:cNvPr id="38" name="TextBox 15">
+            <a:extLst>
+              <a:ext uri="{FF2B5EF4-FFF2-40B4-BE49-F238E27FC236}">
+                <a16:creationId xmlns:a16="http://schemas.microsoft.com/office/drawing/2014/main" id="{B2AB43A0-62CE-B5F3-C44B-63923AC7EF51}"/>
+              </a:ext>
+            </a:extLst>
+          </p:cNvPr>
+          <p:cNvSpPr txBox="1"/>
+          <p:nvPr/>
+        </p:nvSpPr>
+        <p:spPr>
+          <a:xfrm>
+            <a:off x="10366933" y="3296896"/>
+            <a:ext cx="2527872" cy="523220"/>
+          </a:xfrm>
+          <a:prstGeom prst="rect">
+            <a:avLst/>
+          </a:prstGeom>
+          <a:noFill/>
+        </p:spPr>
+        <p:txBody>
+          <a:bodyPr wrap="square" rtlCol="0">
+            <a:spAutoFit/>
+          </a:bodyPr>
+          <a:lstStyle>
+            <a:defPPr>
+              <a:defRPr lang="LID4096"/>
+            </a:defPPr>
+            <a:lvl1pPr marL="0" algn="l" defTabSz="914400" rtl="0" eaLnBrk="1" latinLnBrk="0" hangingPunct="1">
+              <a:defRPr sz="1800" kern="1200">
+                <a:solidFill>
+                  <a:schemeClr val="tx1"/>
+                </a:solidFill>
+                <a:latin typeface="+mn-lt"/>
+                <a:ea typeface="+mn-ea"/>
+                <a:cs typeface="+mn-cs"/>
+              </a:defRPr>
+            </a:lvl1pPr>
+            <a:lvl2pPr marL="457200" algn="l" defTabSz="914400" rtl="0" eaLnBrk="1" latinLnBrk="0" hangingPunct="1">
+              <a:defRPr sz="1800" kern="1200">
+                <a:solidFill>
+                  <a:schemeClr val="tx1"/>
+                </a:solidFill>
+                <a:latin typeface="+mn-lt"/>
+                <a:ea typeface="+mn-ea"/>
+                <a:cs typeface="+mn-cs"/>
+              </a:defRPr>
+            </a:lvl2pPr>
+            <a:lvl3pPr marL="914400" algn="l" defTabSz="914400" rtl="0" eaLnBrk="1" latinLnBrk="0" hangingPunct="1">
+              <a:defRPr sz="1800" kern="1200">
+                <a:solidFill>
+                  <a:schemeClr val="tx1"/>
+                </a:solidFill>
+                <a:latin typeface="+mn-lt"/>
+                <a:ea typeface="+mn-ea"/>
+                <a:cs typeface="+mn-cs"/>
+              </a:defRPr>
+            </a:lvl3pPr>
+            <a:lvl4pPr marL="1371600" algn="l" defTabSz="914400" rtl="0" eaLnBrk="1" latinLnBrk="0" hangingPunct="1">
+              <a:defRPr sz="1800" kern="1200">
+                <a:solidFill>
+                  <a:schemeClr val="tx1"/>
+                </a:solidFill>
+                <a:latin typeface="+mn-lt"/>
+                <a:ea typeface="+mn-ea"/>
+                <a:cs typeface="+mn-cs"/>
+              </a:defRPr>
+            </a:lvl4pPr>
+            <a:lvl5pPr marL="1828800" algn="l" defTabSz="914400" rtl="0" eaLnBrk="1" latinLnBrk="0" hangingPunct="1">
+              <a:defRPr sz="1800" kern="1200">
+                <a:solidFill>
+                  <a:schemeClr val="tx1"/>
+                </a:solidFill>
+                <a:latin typeface="+mn-lt"/>
+                <a:ea typeface="+mn-ea"/>
+                <a:cs typeface="+mn-cs"/>
+              </a:defRPr>
+            </a:lvl5pPr>
+            <a:lvl6pPr marL="2286000" algn="l" defTabSz="914400" rtl="0" eaLnBrk="1" latinLnBrk="0" hangingPunct="1">
+              <a:defRPr sz="1800" kern="1200">
+                <a:solidFill>
+                  <a:schemeClr val="tx1"/>
+                </a:solidFill>
+                <a:latin typeface="+mn-lt"/>
+                <a:ea typeface="+mn-ea"/>
+                <a:cs typeface="+mn-cs"/>
+              </a:defRPr>
+            </a:lvl6pPr>
+            <a:lvl7pPr marL="2743200" algn="l" defTabSz="914400" rtl="0" eaLnBrk="1" latinLnBrk="0" hangingPunct="1">
+              <a:defRPr sz="1800" kern="1200">
+                <a:solidFill>
+                  <a:schemeClr val="tx1"/>
+                </a:solidFill>
+                <a:latin typeface="+mn-lt"/>
+                <a:ea typeface="+mn-ea"/>
+                <a:cs typeface="+mn-cs"/>
+              </a:defRPr>
+            </a:lvl7pPr>
+            <a:lvl8pPr marL="3200400" algn="l" defTabSz="914400" rtl="0" eaLnBrk="1" latinLnBrk="0" hangingPunct="1">
+              <a:defRPr sz="1800" kern="1200">
+                <a:solidFill>
+                  <a:schemeClr val="tx1"/>
+                </a:solidFill>
+                <a:latin typeface="+mn-lt"/>
+                <a:ea typeface="+mn-ea"/>
+                <a:cs typeface="+mn-cs"/>
+              </a:defRPr>
+            </a:lvl8pPr>
+            <a:lvl9pPr marL="3657600" algn="l" defTabSz="914400" rtl="0" eaLnBrk="1" latinLnBrk="0" hangingPunct="1">
+              <a:defRPr sz="1800" kern="1200">
+                <a:solidFill>
+                  <a:schemeClr val="tx1"/>
+                </a:solidFill>
+                <a:latin typeface="+mn-lt"/>
+                <a:ea typeface="+mn-ea"/>
+                <a:cs typeface="+mn-cs"/>
+              </a:defRPr>
+            </a:lvl9pPr>
+          </a:lstStyle>
+          <a:p>
+            <a:pPr algn="ctr"/>
+            <a:r>
+              <a:rPr lang="en-US" sz="1400" dirty="0">
+                <a:solidFill>
+                  <a:schemeClr val="tx2">
+                    <a:lumMod val="50000"/>
+                    <a:lumOff val="50000"/>
+                  </a:schemeClr>
+                </a:solidFill>
+              </a:rPr>
+              <a:t>Suitability Model Ranges [Filter &amp; Check Boxes show fit]</a:t>
+            </a:r>
+            <a:endParaRPr lang="LID4096" sz="1400" dirty="0">
+              <a:solidFill>
+                <a:schemeClr val="tx2">
+                  <a:lumMod val="50000"/>
+                  <a:lumOff val="50000"/>
+                </a:schemeClr>
+              </a:solidFill>
+            </a:endParaRPr>
+          </a:p>
+        </p:txBody>
+      </p:sp>
+      <p:pic>
+        <p:nvPicPr>
+          <p:cNvPr id="39" name="table">
+            <a:extLst>
+              <a:ext uri="{FF2B5EF4-FFF2-40B4-BE49-F238E27FC236}">
+                <a16:creationId xmlns:a16="http://schemas.microsoft.com/office/drawing/2014/main" id="{D3BAC139-02C2-2526-BDB2-C091FD3E34CE}"/>
+              </a:ext>
+            </a:extLst>
+          </p:cNvPr>
+          <p:cNvPicPr>
+            <a:picLocks noChangeAspect="1"/>
+          </p:cNvPicPr>
+          <p:nvPr/>
+        </p:nvPicPr>
+        <p:blipFill>
+          <a:blip r:embed="rId6"/>
+          <a:stretch>
+            <a:fillRect/>
+          </a:stretch>
+        </p:blipFill>
+        <p:spPr>
+          <a:xfrm>
+            <a:off x="-339994" y="2379220"/>
+            <a:ext cx="2102610" cy="5608683"/>
+          </a:xfrm>
+          <a:prstGeom prst="rect">
+            <a:avLst/>
+          </a:prstGeom>
+        </p:spPr>
+      </p:pic>
+      <p:sp>
+        <p:nvSpPr>
+          <p:cNvPr id="40" name="TextBox 13">
+            <a:extLst>
+              <a:ext uri="{FF2B5EF4-FFF2-40B4-BE49-F238E27FC236}">
+                <a16:creationId xmlns:a16="http://schemas.microsoft.com/office/drawing/2014/main" id="{02E3853E-A774-FA28-DB61-B413E7048685}"/>
+              </a:ext>
+            </a:extLst>
+          </p:cNvPr>
+          <p:cNvSpPr txBox="1"/>
+          <p:nvPr/>
+        </p:nvSpPr>
+        <p:spPr>
+          <a:xfrm>
+            <a:off x="3074668" y="1696906"/>
+            <a:ext cx="6288802" cy="553998"/>
+          </a:xfrm>
+          <a:prstGeom prst="rect">
+            <a:avLst/>
+          </a:prstGeom>
+          <a:noFill/>
+        </p:spPr>
+        <p:txBody>
+          <a:bodyPr wrap="square">
+            <a:spAutoFit/>
+          </a:bodyPr>
+          <a:lstStyle>
+            <a:defPPr>
+              <a:defRPr lang="LID4096"/>
+            </a:defPPr>
+            <a:lvl1pPr marL="0" algn="l" defTabSz="914400" rtl="0" eaLnBrk="1" latinLnBrk="0" hangingPunct="1">
+              <a:defRPr sz="1800" kern="1200">
+                <a:solidFill>
+                  <a:schemeClr val="tx1"/>
+                </a:solidFill>
+                <a:latin typeface="+mn-lt"/>
+                <a:ea typeface="+mn-ea"/>
+                <a:cs typeface="+mn-cs"/>
+              </a:defRPr>
+            </a:lvl1pPr>
+            <a:lvl2pPr marL="457200" algn="l" defTabSz="914400" rtl="0" eaLnBrk="1" latinLnBrk="0" hangingPunct="1">
+              <a:defRPr sz="1800" kern="1200">
+                <a:solidFill>
+                  <a:schemeClr val="tx1"/>
+                </a:solidFill>
+                <a:latin typeface="+mn-lt"/>
+                <a:ea typeface="+mn-ea"/>
+                <a:cs typeface="+mn-cs"/>
+              </a:defRPr>
+            </a:lvl2pPr>
+            <a:lvl3pPr marL="914400" algn="l" defTabSz="914400" rtl="0" eaLnBrk="1" latinLnBrk="0" hangingPunct="1">
+              <a:defRPr sz="1800" kern="1200">
+                <a:solidFill>
+                  <a:schemeClr val="tx1"/>
+                </a:solidFill>
+                <a:latin typeface="+mn-lt"/>
+                <a:ea typeface="+mn-ea"/>
+                <a:cs typeface="+mn-cs"/>
+              </a:defRPr>
+            </a:lvl3pPr>
+            <a:lvl4pPr marL="1371600" algn="l" defTabSz="914400" rtl="0" eaLnBrk="1" latinLnBrk="0" hangingPunct="1">
+              <a:defRPr sz="1800" kern="1200">
+                <a:solidFill>
+                  <a:schemeClr val="tx1"/>
+                </a:solidFill>
+                <a:latin typeface="+mn-lt"/>
+                <a:ea typeface="+mn-ea"/>
+                <a:cs typeface="+mn-cs"/>
+              </a:defRPr>
+            </a:lvl4pPr>
+            <a:lvl5pPr marL="1828800" algn="l" defTabSz="914400" rtl="0" eaLnBrk="1" latinLnBrk="0" hangingPunct="1">
+              <a:defRPr sz="1800" kern="1200">
+                <a:solidFill>
+                  <a:schemeClr val="tx1"/>
+                </a:solidFill>
+                <a:latin typeface="+mn-lt"/>
+                <a:ea typeface="+mn-ea"/>
+                <a:cs typeface="+mn-cs"/>
+              </a:defRPr>
+            </a:lvl5pPr>
+            <a:lvl6pPr marL="2286000" algn="l" defTabSz="914400" rtl="0" eaLnBrk="1" latinLnBrk="0" hangingPunct="1">
+              <a:defRPr sz="1800" kern="1200">
+                <a:solidFill>
+                  <a:schemeClr val="tx1"/>
+                </a:solidFill>
+                <a:latin typeface="+mn-lt"/>
+                <a:ea typeface="+mn-ea"/>
+                <a:cs typeface="+mn-cs"/>
+              </a:defRPr>
+            </a:lvl6pPr>
+            <a:lvl7pPr marL="2743200" algn="l" defTabSz="914400" rtl="0" eaLnBrk="1" latinLnBrk="0" hangingPunct="1">
+              <a:defRPr sz="1800" kern="1200">
+                <a:solidFill>
+                  <a:schemeClr val="tx1"/>
+                </a:solidFill>
+                <a:latin typeface="+mn-lt"/>
+                <a:ea typeface="+mn-ea"/>
+                <a:cs typeface="+mn-cs"/>
+              </a:defRPr>
+            </a:lvl7pPr>
+            <a:lvl8pPr marL="3200400" algn="l" defTabSz="914400" rtl="0" eaLnBrk="1" latinLnBrk="0" hangingPunct="1">
+              <a:defRPr sz="1800" kern="1200">
+                <a:solidFill>
+                  <a:schemeClr val="tx1"/>
+                </a:solidFill>
+                <a:latin typeface="+mn-lt"/>
+                <a:ea typeface="+mn-ea"/>
+                <a:cs typeface="+mn-cs"/>
+              </a:defRPr>
+            </a:lvl8pPr>
+            <a:lvl9pPr marL="3657600" algn="l" defTabSz="914400" rtl="0" eaLnBrk="1" latinLnBrk="0" hangingPunct="1">
+              <a:defRPr sz="1800" kern="1200">
+                <a:solidFill>
+                  <a:schemeClr val="tx1"/>
+                </a:solidFill>
+                <a:latin typeface="+mn-lt"/>
+                <a:ea typeface="+mn-ea"/>
+                <a:cs typeface="+mn-cs"/>
+              </a:defRPr>
+            </a:lvl9pPr>
+          </a:lstStyle>
+          <a:p>
+            <a:pPr algn="ctr"/>
+            <a:r>
+              <a:rPr lang="en-GB" sz="1000" dirty="0">
+                <a:solidFill>
+                  <a:schemeClr val="tx2">
+                    <a:lumMod val="50000"/>
+                    <a:lumOff val="50000"/>
+                  </a:schemeClr>
+                </a:solidFill>
+              </a:rPr>
+              <a:t>Filter: [Insert here]</a:t>
+            </a:r>
+            <a:endParaRPr lang="en-US" sz="1000" dirty="0">
+              <a:solidFill>
+                <a:schemeClr val="tx2">
+                  <a:lumMod val="50000"/>
+                  <a:lumOff val="50000"/>
+                </a:schemeClr>
+              </a:solidFill>
+            </a:endParaRPr>
+          </a:p>
+          <a:p>
+            <a:pPr algn="ctr"/>
+            <a:r>
+              <a:rPr lang="en-US" sz="1000" dirty="0"/>
+              <a:t>[when empty show scrollable list of descriptions and select activates on filtering]</a:t>
+            </a:r>
+            <a:endParaRPr lang="" sz="1000" dirty="0"/>
+          </a:p>
+          <a:p>
+            <a:pPr algn="ctr"/>
+            <a:r>
+              <a:rPr lang="" sz="1000" dirty="0"/>
+              <a:t>Coupe - Convertible - 4.0 Litre - supercharged  - </a:t>
+            </a:r>
+            <a:r>
+              <a:rPr lang="" sz="1000" dirty="0">
+                <a:effectLst/>
+              </a:rPr>
+              <a:t>20” – </a:t>
+            </a:r>
+            <a:r>
+              <a:rPr lang="" sz="1000" dirty="0"/>
+              <a:t>Silverstone – </a:t>
+            </a:r>
+            <a:r>
+              <a:rPr lang="" sz="1000" dirty="0">
+                <a:effectLst/>
+              </a:rPr>
+              <a:t>Japan - </a:t>
+            </a:r>
+            <a:r>
+              <a:rPr lang="" sz="1000" dirty="0"/>
+              <a:t>RHD</a:t>
+            </a:r>
+            <a:endParaRPr lang="" sz="1000" dirty="0">
+              <a:effectLst/>
+            </a:endParaRPr>
+          </a:p>
+        </p:txBody>
+      </p:sp>
+      <p:grpSp>
+        <p:nvGrpSpPr>
+          <p:cNvPr id="41" name="Group 40">
+            <a:extLst>
+              <a:ext uri="{FF2B5EF4-FFF2-40B4-BE49-F238E27FC236}">
+                <a16:creationId xmlns:a16="http://schemas.microsoft.com/office/drawing/2014/main" id="{FD5105C0-15E5-FC5D-F1EA-D3EBE5F38825}"/>
+              </a:ext>
+            </a:extLst>
+          </p:cNvPr>
+          <p:cNvGrpSpPr/>
+          <p:nvPr/>
+        </p:nvGrpSpPr>
+        <p:grpSpPr>
+          <a:xfrm>
+            <a:off x="6518168" y="2619705"/>
+            <a:ext cx="2845302" cy="630942"/>
+            <a:chOff x="5357339" y="4233439"/>
+            <a:chExt cx="2845302" cy="630942"/>
+          </a:xfrm>
+        </p:grpSpPr>
+        <p:sp>
+          <p:nvSpPr>
+            <p:cNvPr id="60" name="TextBox 9">
+              <a:extLst>
+                <a:ext uri="{FF2B5EF4-FFF2-40B4-BE49-F238E27FC236}">
+                  <a16:creationId xmlns:a16="http://schemas.microsoft.com/office/drawing/2014/main" id="{2DFB7E50-80BB-753B-4893-390C1E282814}"/>
+                </a:ext>
+              </a:extLst>
+            </p:cNvPr>
+            <p:cNvSpPr txBox="1"/>
+            <p:nvPr/>
+          </p:nvSpPr>
+          <p:spPr>
+            <a:xfrm>
+              <a:off x="5357339" y="4233439"/>
+              <a:ext cx="2845302" cy="630942"/>
+            </a:xfrm>
+            <a:prstGeom prst="rect">
+              <a:avLst/>
+            </a:prstGeom>
+            <a:noFill/>
+          </p:spPr>
+          <p:txBody>
+            <a:bodyPr wrap="square" rtlCol="0">
+              <a:spAutoFit/>
+            </a:bodyPr>
+            <a:lstStyle>
+              <a:defPPr>
+                <a:defRPr lang="LID4096"/>
+              </a:defPPr>
+              <a:lvl1pPr marL="0" algn="l" defTabSz="914400" rtl="0" eaLnBrk="1" latinLnBrk="0" hangingPunct="1">
+                <a:defRPr sz="1800" kern="1200">
+                  <a:solidFill>
+                    <a:schemeClr val="tx1"/>
+                  </a:solidFill>
+                  <a:latin typeface="+mn-lt"/>
+                  <a:ea typeface="+mn-ea"/>
+                  <a:cs typeface="+mn-cs"/>
+                </a:defRPr>
+              </a:lvl1pPr>
+              <a:lvl2pPr marL="457200" algn="l" defTabSz="914400" rtl="0" eaLnBrk="1" latinLnBrk="0" hangingPunct="1">
+                <a:defRPr sz="1800" kern="1200">
+                  <a:solidFill>
+                    <a:schemeClr val="tx1"/>
+                  </a:solidFill>
+                  <a:latin typeface="+mn-lt"/>
+                  <a:ea typeface="+mn-ea"/>
+                  <a:cs typeface="+mn-cs"/>
+                </a:defRPr>
+              </a:lvl2pPr>
+              <a:lvl3pPr marL="914400" algn="l" defTabSz="914400" rtl="0" eaLnBrk="1" latinLnBrk="0" hangingPunct="1">
+                <a:defRPr sz="1800" kern="1200">
+                  <a:solidFill>
+                    <a:schemeClr val="tx1"/>
+                  </a:solidFill>
+                  <a:latin typeface="+mn-lt"/>
+                  <a:ea typeface="+mn-ea"/>
+                  <a:cs typeface="+mn-cs"/>
+                </a:defRPr>
+              </a:lvl3pPr>
+              <a:lvl4pPr marL="1371600" algn="l" defTabSz="914400" rtl="0" eaLnBrk="1" latinLnBrk="0" hangingPunct="1">
+                <a:defRPr sz="1800" kern="1200">
+                  <a:solidFill>
+                    <a:schemeClr val="tx1"/>
+                  </a:solidFill>
+                  <a:latin typeface="+mn-lt"/>
+                  <a:ea typeface="+mn-ea"/>
+                  <a:cs typeface="+mn-cs"/>
+                </a:defRPr>
+              </a:lvl4pPr>
+              <a:lvl5pPr marL="1828800" algn="l" defTabSz="914400" rtl="0" eaLnBrk="1" latinLnBrk="0" hangingPunct="1">
+                <a:defRPr sz="1800" kern="1200">
+                  <a:solidFill>
+                    <a:schemeClr val="tx1"/>
+                  </a:solidFill>
+                  <a:latin typeface="+mn-lt"/>
+                  <a:ea typeface="+mn-ea"/>
+                  <a:cs typeface="+mn-cs"/>
+                </a:defRPr>
+              </a:lvl5pPr>
+              <a:lvl6pPr marL="2286000" algn="l" defTabSz="914400" rtl="0" eaLnBrk="1" latinLnBrk="0" hangingPunct="1">
+                <a:defRPr sz="1800" kern="1200">
+                  <a:solidFill>
+                    <a:schemeClr val="tx1"/>
+                  </a:solidFill>
+                  <a:latin typeface="+mn-lt"/>
+                  <a:ea typeface="+mn-ea"/>
+                  <a:cs typeface="+mn-cs"/>
+                </a:defRPr>
+              </a:lvl6pPr>
+              <a:lvl7pPr marL="2743200" algn="l" defTabSz="914400" rtl="0" eaLnBrk="1" latinLnBrk="0" hangingPunct="1">
+                <a:defRPr sz="1800" kern="1200">
+                  <a:solidFill>
+                    <a:schemeClr val="tx1"/>
+                  </a:solidFill>
+                  <a:latin typeface="+mn-lt"/>
+                  <a:ea typeface="+mn-ea"/>
+                  <a:cs typeface="+mn-cs"/>
+                </a:defRPr>
+              </a:lvl7pPr>
+              <a:lvl8pPr marL="3200400" algn="l" defTabSz="914400" rtl="0" eaLnBrk="1" latinLnBrk="0" hangingPunct="1">
+                <a:defRPr sz="1800" kern="1200">
+                  <a:solidFill>
+                    <a:schemeClr val="tx1"/>
+                  </a:solidFill>
+                  <a:latin typeface="+mn-lt"/>
+                  <a:ea typeface="+mn-ea"/>
+                  <a:cs typeface="+mn-cs"/>
+                </a:defRPr>
+              </a:lvl8pPr>
+              <a:lvl9pPr marL="3657600" algn="l" defTabSz="914400" rtl="0" eaLnBrk="1" latinLnBrk="0" hangingPunct="1">
+                <a:defRPr sz="1800" kern="1200">
+                  <a:solidFill>
+                    <a:schemeClr val="tx1"/>
+                  </a:solidFill>
+                  <a:latin typeface="+mn-lt"/>
+                  <a:ea typeface="+mn-ea"/>
+                  <a:cs typeface="+mn-cs"/>
+                </a:defRPr>
+              </a:lvl9pPr>
+            </a:lstStyle>
+            <a:p>
+              <a:pPr algn="ctr"/>
+              <a:r>
+                <a:rPr lang="" sz="1200" dirty="0">
+                  <a:solidFill>
+                    <a:srgbClr val="FF0000"/>
+                  </a:solidFill>
+                </a:rPr>
+                <a:t>.Fan warning label [MJB7703AA] Item 1</a:t>
+              </a:r>
+            </a:p>
+            <a:p>
+              <a:pPr algn="ctr"/>
+              <a:r>
+                <a:rPr lang="" sz="1200" dirty="0">
+                  <a:solidFill>
+                    <a:srgbClr val="FF0000"/>
+                  </a:solidFill>
+                </a:rPr>
+                <a:t>Classic Part - Superceded</a:t>
+              </a:r>
+            </a:p>
+            <a:p>
+              <a:pPr algn="ctr"/>
+              <a:r>
+                <a:rPr lang="en-US" sz="1100" dirty="0">
+                  <a:solidFill>
+                    <a:srgbClr val="FF0000"/>
+                  </a:solidFill>
+                </a:rPr>
+                <a:t>[Part name and Part exploding image]</a:t>
+              </a:r>
+              <a:endParaRPr lang="LID4096" sz="1100" dirty="0">
+                <a:solidFill>
+                  <a:srgbClr val="FF0000"/>
+                </a:solidFill>
+              </a:endParaRPr>
+            </a:p>
+          </p:txBody>
+        </p:sp>
+        <p:pic>
+          <p:nvPicPr>
+            <p:cNvPr id="61" name="Picture 60" descr="Jaguar Classic Part">
+              <a:extLst>
+                <a:ext uri="{FF2B5EF4-FFF2-40B4-BE49-F238E27FC236}">
+                  <a16:creationId xmlns:a16="http://schemas.microsoft.com/office/drawing/2014/main" id="{93224B44-5E2F-7738-6D28-68DF7DF00D1A}"/>
+                </a:ext>
+              </a:extLst>
+            </p:cNvPr>
+            <p:cNvPicPr>
+              <a:picLocks noChangeAspect="1"/>
+            </p:cNvPicPr>
+            <p:nvPr/>
+          </p:nvPicPr>
+          <p:blipFill>
+            <a:blip r:embed="rId7"/>
+            <a:stretch>
+              <a:fillRect/>
+            </a:stretch>
+          </p:blipFill>
+          <p:spPr>
+            <a:xfrm>
+              <a:off x="5509909" y="4443228"/>
+              <a:ext cx="219075" cy="219075"/>
+            </a:xfrm>
+            <a:prstGeom prst="rect">
+              <a:avLst/>
+            </a:prstGeom>
+          </p:spPr>
+        </p:pic>
+        <p:pic>
+          <p:nvPicPr>
+            <p:cNvPr id="62" name="Picture 61" descr="Supersession">
+              <a:extLst>
+                <a:ext uri="{FF2B5EF4-FFF2-40B4-BE49-F238E27FC236}">
+                  <a16:creationId xmlns:a16="http://schemas.microsoft.com/office/drawing/2014/main" id="{BEC95917-5880-048F-76F3-376B7A903BB9}"/>
+                </a:ext>
+              </a:extLst>
+            </p:cNvPr>
+            <p:cNvPicPr>
+              <a:picLocks noChangeAspect="1"/>
+            </p:cNvPicPr>
+            <p:nvPr/>
+          </p:nvPicPr>
+          <p:blipFill>
+            <a:blip r:embed="rId8"/>
+            <a:stretch>
+              <a:fillRect/>
+            </a:stretch>
+          </p:blipFill>
+          <p:spPr>
+            <a:xfrm>
+              <a:off x="7775351" y="4481328"/>
+              <a:ext cx="190500" cy="180975"/>
+            </a:xfrm>
+            <a:prstGeom prst="rect">
+              <a:avLst/>
+            </a:prstGeom>
+          </p:spPr>
+        </p:pic>
+      </p:grpSp>
+      <p:sp>
+        <p:nvSpPr>
+          <p:cNvPr id="42" name="Rectangle: Rounded Corners 41">
+            <a:extLst>
+              <a:ext uri="{FF2B5EF4-FFF2-40B4-BE49-F238E27FC236}">
+                <a16:creationId xmlns:a16="http://schemas.microsoft.com/office/drawing/2014/main" id="{0EC45FF4-EEFB-B446-D7C4-C9226B97D96A}"/>
+              </a:ext>
+            </a:extLst>
+          </p:cNvPr>
+          <p:cNvSpPr/>
+          <p:nvPr/>
+        </p:nvSpPr>
+        <p:spPr>
+          <a:xfrm>
+            <a:off x="-713968" y="1016362"/>
+            <a:ext cx="2976315" cy="7139977"/>
+          </a:xfrm>
+          <a:prstGeom prst="roundRect">
+            <a:avLst/>
+          </a:prstGeom>
+          <a:noFill/>
+        </p:spPr>
+        <p:style>
+          <a:lnRef idx="2">
+            <a:schemeClr val="accent1">
+              <a:shade val="15000"/>
+            </a:schemeClr>
+          </a:lnRef>
+          <a:fillRef idx="1">
+            <a:schemeClr val="accent1"/>
+          </a:fillRef>
+          <a:effectRef idx="0">
+            <a:schemeClr val="accent1"/>
+          </a:effectRef>
+          <a:fontRef idx="minor">
+            <a:schemeClr val="lt1"/>
+          </a:fontRef>
+        </p:style>
+        <p:txBody>
+          <a:bodyPr rtlCol="0" anchor="ctr"/>
+          <a:lstStyle>
+            <a:defPPr>
+              <a:defRPr lang="LID4096"/>
+            </a:defPPr>
+            <a:lvl1pPr marL="0" algn="l" defTabSz="914400" rtl="0" eaLnBrk="1" latinLnBrk="0" hangingPunct="1">
+              <a:defRPr sz="1800" kern="1200">
+                <a:solidFill>
+                  <a:schemeClr val="lt1"/>
+                </a:solidFill>
+                <a:latin typeface="+mn-lt"/>
+                <a:ea typeface="+mn-ea"/>
+                <a:cs typeface="+mn-cs"/>
+              </a:defRPr>
+            </a:lvl1pPr>
+            <a:lvl2pPr marL="457200" algn="l" defTabSz="914400" rtl="0" eaLnBrk="1" latinLnBrk="0" hangingPunct="1">
+              <a:defRPr sz="1800" kern="1200">
+                <a:solidFill>
+                  <a:schemeClr val="lt1"/>
+                </a:solidFill>
+                <a:latin typeface="+mn-lt"/>
+                <a:ea typeface="+mn-ea"/>
+                <a:cs typeface="+mn-cs"/>
+              </a:defRPr>
+            </a:lvl2pPr>
+            <a:lvl3pPr marL="914400" algn="l" defTabSz="914400" rtl="0" eaLnBrk="1" latinLnBrk="0" hangingPunct="1">
+              <a:defRPr sz="1800" kern="1200">
+                <a:solidFill>
+                  <a:schemeClr val="lt1"/>
+                </a:solidFill>
+                <a:latin typeface="+mn-lt"/>
+                <a:ea typeface="+mn-ea"/>
+                <a:cs typeface="+mn-cs"/>
+              </a:defRPr>
+            </a:lvl3pPr>
+            <a:lvl4pPr marL="1371600" algn="l" defTabSz="914400" rtl="0" eaLnBrk="1" latinLnBrk="0" hangingPunct="1">
+              <a:defRPr sz="1800" kern="1200">
+                <a:solidFill>
+                  <a:schemeClr val="lt1"/>
+                </a:solidFill>
+                <a:latin typeface="+mn-lt"/>
+                <a:ea typeface="+mn-ea"/>
+                <a:cs typeface="+mn-cs"/>
+              </a:defRPr>
+            </a:lvl4pPr>
+            <a:lvl5pPr marL="1828800" algn="l" defTabSz="914400" rtl="0" eaLnBrk="1" latinLnBrk="0" hangingPunct="1">
+              <a:defRPr sz="1800" kern="1200">
+                <a:solidFill>
+                  <a:schemeClr val="lt1"/>
+                </a:solidFill>
+                <a:latin typeface="+mn-lt"/>
+                <a:ea typeface="+mn-ea"/>
+                <a:cs typeface="+mn-cs"/>
+              </a:defRPr>
+            </a:lvl5pPr>
+            <a:lvl6pPr marL="2286000" algn="l" defTabSz="914400" rtl="0" eaLnBrk="1" latinLnBrk="0" hangingPunct="1">
+              <a:defRPr sz="1800" kern="1200">
+                <a:solidFill>
+                  <a:schemeClr val="lt1"/>
+                </a:solidFill>
+                <a:latin typeface="+mn-lt"/>
+                <a:ea typeface="+mn-ea"/>
+                <a:cs typeface="+mn-cs"/>
+              </a:defRPr>
+            </a:lvl6pPr>
+            <a:lvl7pPr marL="2743200" algn="l" defTabSz="914400" rtl="0" eaLnBrk="1" latinLnBrk="0" hangingPunct="1">
+              <a:defRPr sz="1800" kern="1200">
+                <a:solidFill>
+                  <a:schemeClr val="lt1"/>
+                </a:solidFill>
+                <a:latin typeface="+mn-lt"/>
+                <a:ea typeface="+mn-ea"/>
+                <a:cs typeface="+mn-cs"/>
+              </a:defRPr>
+            </a:lvl7pPr>
+            <a:lvl8pPr marL="3200400" algn="l" defTabSz="914400" rtl="0" eaLnBrk="1" latinLnBrk="0" hangingPunct="1">
+              <a:defRPr sz="1800" kern="1200">
+                <a:solidFill>
+                  <a:schemeClr val="lt1"/>
+                </a:solidFill>
+                <a:latin typeface="+mn-lt"/>
+                <a:ea typeface="+mn-ea"/>
+                <a:cs typeface="+mn-cs"/>
+              </a:defRPr>
+            </a:lvl8pPr>
+            <a:lvl9pPr marL="3657600" algn="l" defTabSz="914400" rtl="0" eaLnBrk="1" latinLnBrk="0" hangingPunct="1">
+              <a:defRPr sz="1800" kern="1200">
+                <a:solidFill>
+                  <a:schemeClr val="lt1"/>
+                </a:solidFill>
+                <a:latin typeface="+mn-lt"/>
+                <a:ea typeface="+mn-ea"/>
+                <a:cs typeface="+mn-cs"/>
+              </a:defRPr>
+            </a:lvl9pPr>
+          </a:lstStyle>
+          <a:p>
+            <a:pPr algn="ctr"/>
+            <a:endParaRPr lang="LID4096"/>
+          </a:p>
+        </p:txBody>
+      </p:sp>
+      <p:sp>
+        <p:nvSpPr>
+          <p:cNvPr id="44" name="TextBox 14">
+            <a:extLst>
+              <a:ext uri="{FF2B5EF4-FFF2-40B4-BE49-F238E27FC236}">
+                <a16:creationId xmlns:a16="http://schemas.microsoft.com/office/drawing/2014/main" id="{6C4DDCFF-6D93-F85F-85FA-0E1418A85086}"/>
+              </a:ext>
+            </a:extLst>
+          </p:cNvPr>
+          <p:cNvSpPr txBox="1"/>
+          <p:nvPr/>
+        </p:nvSpPr>
+        <p:spPr>
+          <a:xfrm>
+            <a:off x="-770571" y="1021677"/>
+            <a:ext cx="2719988" cy="584775"/>
+          </a:xfrm>
+          <a:prstGeom prst="rect">
+            <a:avLst/>
+          </a:prstGeom>
+          <a:noFill/>
+        </p:spPr>
+        <p:txBody>
+          <a:bodyPr wrap="square">
+            <a:spAutoFit/>
+          </a:bodyPr>
+          <a:lstStyle>
+            <a:defPPr>
+              <a:defRPr lang="LID4096"/>
+            </a:defPPr>
+            <a:lvl1pPr marL="0" algn="l" defTabSz="914400" rtl="0" eaLnBrk="1" latinLnBrk="0" hangingPunct="1">
+              <a:defRPr sz="1800" kern="1200">
+                <a:solidFill>
+                  <a:schemeClr val="tx1"/>
+                </a:solidFill>
+                <a:latin typeface="+mn-lt"/>
+                <a:ea typeface="+mn-ea"/>
+                <a:cs typeface="+mn-cs"/>
+              </a:defRPr>
+            </a:lvl1pPr>
+            <a:lvl2pPr marL="457200" algn="l" defTabSz="914400" rtl="0" eaLnBrk="1" latinLnBrk="0" hangingPunct="1">
+              <a:defRPr sz="1800" kern="1200">
+                <a:solidFill>
+                  <a:schemeClr val="tx1"/>
+                </a:solidFill>
+                <a:latin typeface="+mn-lt"/>
+                <a:ea typeface="+mn-ea"/>
+                <a:cs typeface="+mn-cs"/>
+              </a:defRPr>
+            </a:lvl2pPr>
+            <a:lvl3pPr marL="914400" algn="l" defTabSz="914400" rtl="0" eaLnBrk="1" latinLnBrk="0" hangingPunct="1">
+              <a:defRPr sz="1800" kern="1200">
+                <a:solidFill>
+                  <a:schemeClr val="tx1"/>
+                </a:solidFill>
+                <a:latin typeface="+mn-lt"/>
+                <a:ea typeface="+mn-ea"/>
+                <a:cs typeface="+mn-cs"/>
+              </a:defRPr>
+            </a:lvl3pPr>
+            <a:lvl4pPr marL="1371600" algn="l" defTabSz="914400" rtl="0" eaLnBrk="1" latinLnBrk="0" hangingPunct="1">
+              <a:defRPr sz="1800" kern="1200">
+                <a:solidFill>
+                  <a:schemeClr val="tx1"/>
+                </a:solidFill>
+                <a:latin typeface="+mn-lt"/>
+                <a:ea typeface="+mn-ea"/>
+                <a:cs typeface="+mn-cs"/>
+              </a:defRPr>
+            </a:lvl4pPr>
+            <a:lvl5pPr marL="1828800" algn="l" defTabSz="914400" rtl="0" eaLnBrk="1" latinLnBrk="0" hangingPunct="1">
+              <a:defRPr sz="1800" kern="1200">
+                <a:solidFill>
+                  <a:schemeClr val="tx1"/>
+                </a:solidFill>
+                <a:latin typeface="+mn-lt"/>
+                <a:ea typeface="+mn-ea"/>
+                <a:cs typeface="+mn-cs"/>
+              </a:defRPr>
+            </a:lvl5pPr>
+            <a:lvl6pPr marL="2286000" algn="l" defTabSz="914400" rtl="0" eaLnBrk="1" latinLnBrk="0" hangingPunct="1">
+              <a:defRPr sz="1800" kern="1200">
+                <a:solidFill>
+                  <a:schemeClr val="tx1"/>
+                </a:solidFill>
+                <a:latin typeface="+mn-lt"/>
+                <a:ea typeface="+mn-ea"/>
+                <a:cs typeface="+mn-cs"/>
+              </a:defRPr>
+            </a:lvl6pPr>
+            <a:lvl7pPr marL="2743200" algn="l" defTabSz="914400" rtl="0" eaLnBrk="1" latinLnBrk="0" hangingPunct="1">
+              <a:defRPr sz="1800" kern="1200">
+                <a:solidFill>
+                  <a:schemeClr val="tx1"/>
+                </a:solidFill>
+                <a:latin typeface="+mn-lt"/>
+                <a:ea typeface="+mn-ea"/>
+                <a:cs typeface="+mn-cs"/>
+              </a:defRPr>
+            </a:lvl7pPr>
+            <a:lvl8pPr marL="3200400" algn="l" defTabSz="914400" rtl="0" eaLnBrk="1" latinLnBrk="0" hangingPunct="1">
+              <a:defRPr sz="1800" kern="1200">
+                <a:solidFill>
+                  <a:schemeClr val="tx1"/>
+                </a:solidFill>
+                <a:latin typeface="+mn-lt"/>
+                <a:ea typeface="+mn-ea"/>
+                <a:cs typeface="+mn-cs"/>
+              </a:defRPr>
+            </a:lvl8pPr>
+            <a:lvl9pPr marL="3657600" algn="l" defTabSz="914400" rtl="0" eaLnBrk="1" latinLnBrk="0" hangingPunct="1">
+              <a:defRPr sz="1800" kern="1200">
+                <a:solidFill>
+                  <a:schemeClr val="tx1"/>
+                </a:solidFill>
+                <a:latin typeface="+mn-lt"/>
+                <a:ea typeface="+mn-ea"/>
+                <a:cs typeface="+mn-cs"/>
+              </a:defRPr>
+            </a:lvl9pPr>
+          </a:lstStyle>
+          <a:p>
+            <a:pPr algn="ctr"/>
+            <a:r>
+              <a:rPr lang="en-US" sz="1400" dirty="0">
+                <a:solidFill>
+                  <a:schemeClr val="tx2">
+                    <a:lumMod val="50000"/>
+                    <a:lumOff val="50000"/>
+                  </a:schemeClr>
+                </a:solidFill>
+              </a:rPr>
+              <a:t>Availability:</a:t>
+            </a:r>
+          </a:p>
+          <a:p>
+            <a:pPr algn="ctr"/>
+            <a:r>
+              <a:rPr lang="en-US" sz="900" dirty="0"/>
+              <a:t>[Selection List of Stock available part qualities</a:t>
+            </a:r>
+          </a:p>
+          <a:p>
+            <a:pPr algn="ctr"/>
+            <a:r>
+              <a:rPr lang="en-US" sz="900" dirty="0"/>
+              <a:t>A…E with descriptions]</a:t>
+            </a:r>
+            <a:endParaRPr lang="LID4096" sz="900" dirty="0"/>
+          </a:p>
+        </p:txBody>
+      </p:sp>
+      <p:sp>
+        <p:nvSpPr>
+          <p:cNvPr id="45" name="Rectangle: Rounded Corners 44">
+            <a:extLst>
+              <a:ext uri="{FF2B5EF4-FFF2-40B4-BE49-F238E27FC236}">
+                <a16:creationId xmlns:a16="http://schemas.microsoft.com/office/drawing/2014/main" id="{5C20AF56-422F-376B-079B-56CAE9AEA370}"/>
+              </a:ext>
+            </a:extLst>
+          </p:cNvPr>
+          <p:cNvSpPr/>
+          <p:nvPr/>
+        </p:nvSpPr>
+        <p:spPr>
+          <a:xfrm>
+            <a:off x="2341947" y="2553336"/>
+            <a:ext cx="3193992" cy="2333922"/>
+          </a:xfrm>
+          <a:prstGeom prst="roundRect">
+            <a:avLst/>
+          </a:prstGeom>
+          <a:noFill/>
+        </p:spPr>
+        <p:style>
+          <a:lnRef idx="2">
+            <a:schemeClr val="accent1">
+              <a:shade val="15000"/>
+            </a:schemeClr>
+          </a:lnRef>
+          <a:fillRef idx="1">
+            <a:schemeClr val="accent1"/>
+          </a:fillRef>
+          <a:effectRef idx="0">
+            <a:schemeClr val="accent1"/>
+          </a:effectRef>
+          <a:fontRef idx="minor">
+            <a:schemeClr val="lt1"/>
+          </a:fontRef>
+        </p:style>
+        <p:txBody>
+          <a:bodyPr rtlCol="0" anchor="ctr"/>
+          <a:lstStyle>
+            <a:defPPr>
+              <a:defRPr lang="LID4096"/>
+            </a:defPPr>
+            <a:lvl1pPr marL="0" algn="l" defTabSz="914400" rtl="0" eaLnBrk="1" latinLnBrk="0" hangingPunct="1">
+              <a:defRPr sz="1800" kern="1200">
+                <a:solidFill>
+                  <a:schemeClr val="lt1"/>
+                </a:solidFill>
+                <a:latin typeface="+mn-lt"/>
+                <a:ea typeface="+mn-ea"/>
+                <a:cs typeface="+mn-cs"/>
+              </a:defRPr>
+            </a:lvl1pPr>
+            <a:lvl2pPr marL="457200" algn="l" defTabSz="914400" rtl="0" eaLnBrk="1" latinLnBrk="0" hangingPunct="1">
+              <a:defRPr sz="1800" kern="1200">
+                <a:solidFill>
+                  <a:schemeClr val="lt1"/>
+                </a:solidFill>
+                <a:latin typeface="+mn-lt"/>
+                <a:ea typeface="+mn-ea"/>
+                <a:cs typeface="+mn-cs"/>
+              </a:defRPr>
+            </a:lvl2pPr>
+            <a:lvl3pPr marL="914400" algn="l" defTabSz="914400" rtl="0" eaLnBrk="1" latinLnBrk="0" hangingPunct="1">
+              <a:defRPr sz="1800" kern="1200">
+                <a:solidFill>
+                  <a:schemeClr val="lt1"/>
+                </a:solidFill>
+                <a:latin typeface="+mn-lt"/>
+                <a:ea typeface="+mn-ea"/>
+                <a:cs typeface="+mn-cs"/>
+              </a:defRPr>
+            </a:lvl3pPr>
+            <a:lvl4pPr marL="1371600" algn="l" defTabSz="914400" rtl="0" eaLnBrk="1" latinLnBrk="0" hangingPunct="1">
+              <a:defRPr sz="1800" kern="1200">
+                <a:solidFill>
+                  <a:schemeClr val="lt1"/>
+                </a:solidFill>
+                <a:latin typeface="+mn-lt"/>
+                <a:ea typeface="+mn-ea"/>
+                <a:cs typeface="+mn-cs"/>
+              </a:defRPr>
+            </a:lvl4pPr>
+            <a:lvl5pPr marL="1828800" algn="l" defTabSz="914400" rtl="0" eaLnBrk="1" latinLnBrk="0" hangingPunct="1">
+              <a:defRPr sz="1800" kern="1200">
+                <a:solidFill>
+                  <a:schemeClr val="lt1"/>
+                </a:solidFill>
+                <a:latin typeface="+mn-lt"/>
+                <a:ea typeface="+mn-ea"/>
+                <a:cs typeface="+mn-cs"/>
+              </a:defRPr>
+            </a:lvl5pPr>
+            <a:lvl6pPr marL="2286000" algn="l" defTabSz="914400" rtl="0" eaLnBrk="1" latinLnBrk="0" hangingPunct="1">
+              <a:defRPr sz="1800" kern="1200">
+                <a:solidFill>
+                  <a:schemeClr val="lt1"/>
+                </a:solidFill>
+                <a:latin typeface="+mn-lt"/>
+                <a:ea typeface="+mn-ea"/>
+                <a:cs typeface="+mn-cs"/>
+              </a:defRPr>
+            </a:lvl6pPr>
+            <a:lvl7pPr marL="2743200" algn="l" defTabSz="914400" rtl="0" eaLnBrk="1" latinLnBrk="0" hangingPunct="1">
+              <a:defRPr sz="1800" kern="1200">
+                <a:solidFill>
+                  <a:schemeClr val="lt1"/>
+                </a:solidFill>
+                <a:latin typeface="+mn-lt"/>
+                <a:ea typeface="+mn-ea"/>
+                <a:cs typeface="+mn-cs"/>
+              </a:defRPr>
+            </a:lvl7pPr>
+            <a:lvl8pPr marL="3200400" algn="l" defTabSz="914400" rtl="0" eaLnBrk="1" latinLnBrk="0" hangingPunct="1">
+              <a:defRPr sz="1800" kern="1200">
+                <a:solidFill>
+                  <a:schemeClr val="lt1"/>
+                </a:solidFill>
+                <a:latin typeface="+mn-lt"/>
+                <a:ea typeface="+mn-ea"/>
+                <a:cs typeface="+mn-cs"/>
+              </a:defRPr>
+            </a:lvl8pPr>
+            <a:lvl9pPr marL="3657600" algn="l" defTabSz="914400" rtl="0" eaLnBrk="1" latinLnBrk="0" hangingPunct="1">
+              <a:defRPr sz="1800" kern="1200">
+                <a:solidFill>
+                  <a:schemeClr val="lt1"/>
+                </a:solidFill>
+                <a:latin typeface="+mn-lt"/>
+                <a:ea typeface="+mn-ea"/>
+                <a:cs typeface="+mn-cs"/>
+              </a:defRPr>
+            </a:lvl9pPr>
+          </a:lstStyle>
+          <a:p>
+            <a:pPr algn="ctr"/>
+            <a:endParaRPr lang="LID4096"/>
+          </a:p>
+        </p:txBody>
+      </p:sp>
+      <p:sp>
+        <p:nvSpPr>
+          <p:cNvPr id="46" name="Rectangle: Rounded Corners 45">
+            <a:extLst>
+              <a:ext uri="{FF2B5EF4-FFF2-40B4-BE49-F238E27FC236}">
+                <a16:creationId xmlns:a16="http://schemas.microsoft.com/office/drawing/2014/main" id="{3C184AB4-3A5A-CB4E-DD2D-64EA265478AB}"/>
+              </a:ext>
+            </a:extLst>
+          </p:cNvPr>
+          <p:cNvSpPr/>
+          <p:nvPr/>
+        </p:nvSpPr>
+        <p:spPr>
+          <a:xfrm>
+            <a:off x="5634758" y="2553059"/>
+            <a:ext cx="4662639" cy="2333922"/>
+          </a:xfrm>
+          <a:prstGeom prst="roundRect">
+            <a:avLst/>
+          </a:prstGeom>
+          <a:noFill/>
+        </p:spPr>
+        <p:style>
+          <a:lnRef idx="2">
+            <a:schemeClr val="accent1">
+              <a:shade val="15000"/>
+            </a:schemeClr>
+          </a:lnRef>
+          <a:fillRef idx="1">
+            <a:schemeClr val="accent1"/>
+          </a:fillRef>
+          <a:effectRef idx="0">
+            <a:schemeClr val="accent1"/>
+          </a:effectRef>
+          <a:fontRef idx="minor">
+            <a:schemeClr val="lt1"/>
+          </a:fontRef>
+        </p:style>
+        <p:txBody>
+          <a:bodyPr rtlCol="0" anchor="ctr"/>
+          <a:lstStyle>
+            <a:defPPr>
+              <a:defRPr lang="LID4096"/>
+            </a:defPPr>
+            <a:lvl1pPr marL="0" algn="l" defTabSz="914400" rtl="0" eaLnBrk="1" latinLnBrk="0" hangingPunct="1">
+              <a:defRPr sz="1800" kern="1200">
+                <a:solidFill>
+                  <a:schemeClr val="lt1"/>
+                </a:solidFill>
+                <a:latin typeface="+mn-lt"/>
+                <a:ea typeface="+mn-ea"/>
+                <a:cs typeface="+mn-cs"/>
+              </a:defRPr>
+            </a:lvl1pPr>
+            <a:lvl2pPr marL="457200" algn="l" defTabSz="914400" rtl="0" eaLnBrk="1" latinLnBrk="0" hangingPunct="1">
+              <a:defRPr sz="1800" kern="1200">
+                <a:solidFill>
+                  <a:schemeClr val="lt1"/>
+                </a:solidFill>
+                <a:latin typeface="+mn-lt"/>
+                <a:ea typeface="+mn-ea"/>
+                <a:cs typeface="+mn-cs"/>
+              </a:defRPr>
+            </a:lvl2pPr>
+            <a:lvl3pPr marL="914400" algn="l" defTabSz="914400" rtl="0" eaLnBrk="1" latinLnBrk="0" hangingPunct="1">
+              <a:defRPr sz="1800" kern="1200">
+                <a:solidFill>
+                  <a:schemeClr val="lt1"/>
+                </a:solidFill>
+                <a:latin typeface="+mn-lt"/>
+                <a:ea typeface="+mn-ea"/>
+                <a:cs typeface="+mn-cs"/>
+              </a:defRPr>
+            </a:lvl3pPr>
+            <a:lvl4pPr marL="1371600" algn="l" defTabSz="914400" rtl="0" eaLnBrk="1" latinLnBrk="0" hangingPunct="1">
+              <a:defRPr sz="1800" kern="1200">
+                <a:solidFill>
+                  <a:schemeClr val="lt1"/>
+                </a:solidFill>
+                <a:latin typeface="+mn-lt"/>
+                <a:ea typeface="+mn-ea"/>
+                <a:cs typeface="+mn-cs"/>
+              </a:defRPr>
+            </a:lvl4pPr>
+            <a:lvl5pPr marL="1828800" algn="l" defTabSz="914400" rtl="0" eaLnBrk="1" latinLnBrk="0" hangingPunct="1">
+              <a:defRPr sz="1800" kern="1200">
+                <a:solidFill>
+                  <a:schemeClr val="lt1"/>
+                </a:solidFill>
+                <a:latin typeface="+mn-lt"/>
+                <a:ea typeface="+mn-ea"/>
+                <a:cs typeface="+mn-cs"/>
+              </a:defRPr>
+            </a:lvl5pPr>
+            <a:lvl6pPr marL="2286000" algn="l" defTabSz="914400" rtl="0" eaLnBrk="1" latinLnBrk="0" hangingPunct="1">
+              <a:defRPr sz="1800" kern="1200">
+                <a:solidFill>
+                  <a:schemeClr val="lt1"/>
+                </a:solidFill>
+                <a:latin typeface="+mn-lt"/>
+                <a:ea typeface="+mn-ea"/>
+                <a:cs typeface="+mn-cs"/>
+              </a:defRPr>
+            </a:lvl6pPr>
+            <a:lvl7pPr marL="2743200" algn="l" defTabSz="914400" rtl="0" eaLnBrk="1" latinLnBrk="0" hangingPunct="1">
+              <a:defRPr sz="1800" kern="1200">
+                <a:solidFill>
+                  <a:schemeClr val="lt1"/>
+                </a:solidFill>
+                <a:latin typeface="+mn-lt"/>
+                <a:ea typeface="+mn-ea"/>
+                <a:cs typeface="+mn-cs"/>
+              </a:defRPr>
+            </a:lvl7pPr>
+            <a:lvl8pPr marL="3200400" algn="l" defTabSz="914400" rtl="0" eaLnBrk="1" latinLnBrk="0" hangingPunct="1">
+              <a:defRPr sz="1800" kern="1200">
+                <a:solidFill>
+                  <a:schemeClr val="lt1"/>
+                </a:solidFill>
+                <a:latin typeface="+mn-lt"/>
+                <a:ea typeface="+mn-ea"/>
+                <a:cs typeface="+mn-cs"/>
+              </a:defRPr>
+            </a:lvl8pPr>
+            <a:lvl9pPr marL="3657600" algn="l" defTabSz="914400" rtl="0" eaLnBrk="1" latinLnBrk="0" hangingPunct="1">
+              <a:defRPr sz="1800" kern="1200">
+                <a:solidFill>
+                  <a:schemeClr val="lt1"/>
+                </a:solidFill>
+                <a:latin typeface="+mn-lt"/>
+                <a:ea typeface="+mn-ea"/>
+                <a:cs typeface="+mn-cs"/>
+              </a:defRPr>
+            </a:lvl9pPr>
+          </a:lstStyle>
+          <a:p>
+            <a:pPr algn="ctr"/>
+            <a:endParaRPr lang="LID4096"/>
+          </a:p>
+        </p:txBody>
+      </p:sp>
+      <p:sp>
+        <p:nvSpPr>
+          <p:cNvPr id="47" name="Rectangle: Rounded Corners 46">
+            <a:extLst>
+              <a:ext uri="{FF2B5EF4-FFF2-40B4-BE49-F238E27FC236}">
+                <a16:creationId xmlns:a16="http://schemas.microsoft.com/office/drawing/2014/main" id="{E0CB1401-A237-018D-E021-6379FC0F57B3}"/>
+              </a:ext>
+            </a:extLst>
+          </p:cNvPr>
+          <p:cNvSpPr/>
+          <p:nvPr/>
+        </p:nvSpPr>
+        <p:spPr>
+          <a:xfrm>
+            <a:off x="10377550" y="960121"/>
+            <a:ext cx="2527872" cy="6952190"/>
+          </a:xfrm>
+          <a:prstGeom prst="roundRect">
+            <a:avLst/>
+          </a:prstGeom>
+          <a:noFill/>
+        </p:spPr>
+        <p:style>
+          <a:lnRef idx="2">
+            <a:schemeClr val="accent1">
+              <a:shade val="15000"/>
+            </a:schemeClr>
+          </a:lnRef>
+          <a:fillRef idx="1">
+            <a:schemeClr val="accent1"/>
+          </a:fillRef>
+          <a:effectRef idx="0">
+            <a:schemeClr val="accent1"/>
+          </a:effectRef>
+          <a:fontRef idx="minor">
+            <a:schemeClr val="lt1"/>
+          </a:fontRef>
+        </p:style>
+        <p:txBody>
+          <a:bodyPr rtlCol="0" anchor="ctr"/>
+          <a:lstStyle>
+            <a:defPPr>
+              <a:defRPr lang="LID4096"/>
+            </a:defPPr>
+            <a:lvl1pPr marL="0" algn="l" defTabSz="914400" rtl="0" eaLnBrk="1" latinLnBrk="0" hangingPunct="1">
+              <a:defRPr sz="1800" kern="1200">
+                <a:solidFill>
+                  <a:schemeClr val="lt1"/>
+                </a:solidFill>
+                <a:latin typeface="+mn-lt"/>
+                <a:ea typeface="+mn-ea"/>
+                <a:cs typeface="+mn-cs"/>
+              </a:defRPr>
+            </a:lvl1pPr>
+            <a:lvl2pPr marL="457200" algn="l" defTabSz="914400" rtl="0" eaLnBrk="1" latinLnBrk="0" hangingPunct="1">
+              <a:defRPr sz="1800" kern="1200">
+                <a:solidFill>
+                  <a:schemeClr val="lt1"/>
+                </a:solidFill>
+                <a:latin typeface="+mn-lt"/>
+                <a:ea typeface="+mn-ea"/>
+                <a:cs typeface="+mn-cs"/>
+              </a:defRPr>
+            </a:lvl2pPr>
+            <a:lvl3pPr marL="914400" algn="l" defTabSz="914400" rtl="0" eaLnBrk="1" latinLnBrk="0" hangingPunct="1">
+              <a:defRPr sz="1800" kern="1200">
+                <a:solidFill>
+                  <a:schemeClr val="lt1"/>
+                </a:solidFill>
+                <a:latin typeface="+mn-lt"/>
+                <a:ea typeface="+mn-ea"/>
+                <a:cs typeface="+mn-cs"/>
+              </a:defRPr>
+            </a:lvl3pPr>
+            <a:lvl4pPr marL="1371600" algn="l" defTabSz="914400" rtl="0" eaLnBrk="1" latinLnBrk="0" hangingPunct="1">
+              <a:defRPr sz="1800" kern="1200">
+                <a:solidFill>
+                  <a:schemeClr val="lt1"/>
+                </a:solidFill>
+                <a:latin typeface="+mn-lt"/>
+                <a:ea typeface="+mn-ea"/>
+                <a:cs typeface="+mn-cs"/>
+              </a:defRPr>
+            </a:lvl4pPr>
+            <a:lvl5pPr marL="1828800" algn="l" defTabSz="914400" rtl="0" eaLnBrk="1" latinLnBrk="0" hangingPunct="1">
+              <a:defRPr sz="1800" kern="1200">
+                <a:solidFill>
+                  <a:schemeClr val="lt1"/>
+                </a:solidFill>
+                <a:latin typeface="+mn-lt"/>
+                <a:ea typeface="+mn-ea"/>
+                <a:cs typeface="+mn-cs"/>
+              </a:defRPr>
+            </a:lvl5pPr>
+            <a:lvl6pPr marL="2286000" algn="l" defTabSz="914400" rtl="0" eaLnBrk="1" latinLnBrk="0" hangingPunct="1">
+              <a:defRPr sz="1800" kern="1200">
+                <a:solidFill>
+                  <a:schemeClr val="lt1"/>
+                </a:solidFill>
+                <a:latin typeface="+mn-lt"/>
+                <a:ea typeface="+mn-ea"/>
+                <a:cs typeface="+mn-cs"/>
+              </a:defRPr>
+            </a:lvl6pPr>
+            <a:lvl7pPr marL="2743200" algn="l" defTabSz="914400" rtl="0" eaLnBrk="1" latinLnBrk="0" hangingPunct="1">
+              <a:defRPr sz="1800" kern="1200">
+                <a:solidFill>
+                  <a:schemeClr val="lt1"/>
+                </a:solidFill>
+                <a:latin typeface="+mn-lt"/>
+                <a:ea typeface="+mn-ea"/>
+                <a:cs typeface="+mn-cs"/>
+              </a:defRPr>
+            </a:lvl7pPr>
+            <a:lvl8pPr marL="3200400" algn="l" defTabSz="914400" rtl="0" eaLnBrk="1" latinLnBrk="0" hangingPunct="1">
+              <a:defRPr sz="1800" kern="1200">
+                <a:solidFill>
+                  <a:schemeClr val="lt1"/>
+                </a:solidFill>
+                <a:latin typeface="+mn-lt"/>
+                <a:ea typeface="+mn-ea"/>
+                <a:cs typeface="+mn-cs"/>
+              </a:defRPr>
+            </a:lvl8pPr>
+            <a:lvl9pPr marL="3657600" algn="l" defTabSz="914400" rtl="0" eaLnBrk="1" latinLnBrk="0" hangingPunct="1">
+              <a:defRPr sz="1800" kern="1200">
+                <a:solidFill>
+                  <a:schemeClr val="lt1"/>
+                </a:solidFill>
+                <a:latin typeface="+mn-lt"/>
+                <a:ea typeface="+mn-ea"/>
+                <a:cs typeface="+mn-cs"/>
+              </a:defRPr>
+            </a:lvl9pPr>
+          </a:lstStyle>
+          <a:p>
+            <a:pPr algn="ctr"/>
+            <a:endParaRPr lang="LID4096"/>
+          </a:p>
+        </p:txBody>
+      </p:sp>
+      <p:grpSp>
+        <p:nvGrpSpPr>
+          <p:cNvPr id="48" name="Group 47">
+            <a:extLst>
+              <a:ext uri="{FF2B5EF4-FFF2-40B4-BE49-F238E27FC236}">
+                <a16:creationId xmlns:a16="http://schemas.microsoft.com/office/drawing/2014/main" id="{6CD2A034-4E76-CFD3-6537-DB021DC36714}"/>
+              </a:ext>
+            </a:extLst>
+          </p:cNvPr>
+          <p:cNvGrpSpPr/>
+          <p:nvPr/>
+        </p:nvGrpSpPr>
+        <p:grpSpPr>
+          <a:xfrm>
+            <a:off x="10604470" y="6961362"/>
+            <a:ext cx="1527908" cy="445291"/>
+            <a:chOff x="11626560" y="4891658"/>
+            <a:chExt cx="1527908" cy="445291"/>
+          </a:xfrm>
+        </p:grpSpPr>
+        <p:pic>
+          <p:nvPicPr>
+            <p:cNvPr id="58" name="Picture 57">
+              <a:extLst>
+                <a:ext uri="{FF2B5EF4-FFF2-40B4-BE49-F238E27FC236}">
+                  <a16:creationId xmlns:a16="http://schemas.microsoft.com/office/drawing/2014/main" id="{1D25B9A8-3B9B-5153-D2A9-6BC407A702B0}"/>
+                </a:ext>
+              </a:extLst>
+            </p:cNvPr>
+            <p:cNvPicPr>
+              <a:picLocks noChangeAspect="1"/>
+            </p:cNvPicPr>
+            <p:nvPr/>
+          </p:nvPicPr>
+          <p:blipFill>
+            <a:blip r:embed="rId9"/>
+            <a:stretch>
+              <a:fillRect/>
+            </a:stretch>
+          </p:blipFill>
+          <p:spPr>
+            <a:xfrm>
+              <a:off x="11626560" y="4891658"/>
+              <a:ext cx="190500" cy="190500"/>
+            </a:xfrm>
+            <a:prstGeom prst="rect">
+              <a:avLst/>
+            </a:prstGeom>
+          </p:spPr>
+        </p:pic>
+        <p:sp>
+          <p:nvSpPr>
+            <p:cNvPr id="59" name="TextBox 29">
+              <a:extLst>
+                <a:ext uri="{FF2B5EF4-FFF2-40B4-BE49-F238E27FC236}">
+                  <a16:creationId xmlns:a16="http://schemas.microsoft.com/office/drawing/2014/main" id="{C010A92E-A68D-664F-4DA6-9516D354DE86}"/>
+                </a:ext>
+              </a:extLst>
+            </p:cNvPr>
+            <p:cNvSpPr txBox="1"/>
+            <p:nvPr/>
+          </p:nvSpPr>
+          <p:spPr>
+            <a:xfrm>
+              <a:off x="11817060" y="4936839"/>
+              <a:ext cx="1337408" cy="400110"/>
+            </a:xfrm>
+            <a:prstGeom prst="rect">
+              <a:avLst/>
+            </a:prstGeom>
+            <a:noFill/>
+          </p:spPr>
+          <p:txBody>
+            <a:bodyPr wrap="square">
+              <a:spAutoFit/>
+            </a:bodyPr>
+            <a:lstStyle>
+              <a:defPPr>
+                <a:defRPr lang="LID4096"/>
+              </a:defPPr>
+              <a:lvl1pPr marL="0" algn="l" defTabSz="914400" rtl="0" eaLnBrk="1" latinLnBrk="0" hangingPunct="1">
+                <a:defRPr sz="1800" kern="1200">
+                  <a:solidFill>
+                    <a:schemeClr val="tx1"/>
+                  </a:solidFill>
+                  <a:latin typeface="+mn-lt"/>
+                  <a:ea typeface="+mn-ea"/>
+                  <a:cs typeface="+mn-cs"/>
+                </a:defRPr>
+              </a:lvl1pPr>
+              <a:lvl2pPr marL="457200" algn="l" defTabSz="914400" rtl="0" eaLnBrk="1" latinLnBrk="0" hangingPunct="1">
+                <a:defRPr sz="1800" kern="1200">
+                  <a:solidFill>
+                    <a:schemeClr val="tx1"/>
+                  </a:solidFill>
+                  <a:latin typeface="+mn-lt"/>
+                  <a:ea typeface="+mn-ea"/>
+                  <a:cs typeface="+mn-cs"/>
+                </a:defRPr>
+              </a:lvl2pPr>
+              <a:lvl3pPr marL="914400" algn="l" defTabSz="914400" rtl="0" eaLnBrk="1" latinLnBrk="0" hangingPunct="1">
+                <a:defRPr sz="1800" kern="1200">
+                  <a:solidFill>
+                    <a:schemeClr val="tx1"/>
+                  </a:solidFill>
+                  <a:latin typeface="+mn-lt"/>
+                  <a:ea typeface="+mn-ea"/>
+                  <a:cs typeface="+mn-cs"/>
+                </a:defRPr>
+              </a:lvl3pPr>
+              <a:lvl4pPr marL="1371600" algn="l" defTabSz="914400" rtl="0" eaLnBrk="1" latinLnBrk="0" hangingPunct="1">
+                <a:defRPr sz="1800" kern="1200">
+                  <a:solidFill>
+                    <a:schemeClr val="tx1"/>
+                  </a:solidFill>
+                  <a:latin typeface="+mn-lt"/>
+                  <a:ea typeface="+mn-ea"/>
+                  <a:cs typeface="+mn-cs"/>
+                </a:defRPr>
+              </a:lvl4pPr>
+              <a:lvl5pPr marL="1828800" algn="l" defTabSz="914400" rtl="0" eaLnBrk="1" latinLnBrk="0" hangingPunct="1">
+                <a:defRPr sz="1800" kern="1200">
+                  <a:solidFill>
+                    <a:schemeClr val="tx1"/>
+                  </a:solidFill>
+                  <a:latin typeface="+mn-lt"/>
+                  <a:ea typeface="+mn-ea"/>
+                  <a:cs typeface="+mn-cs"/>
+                </a:defRPr>
+              </a:lvl5pPr>
+              <a:lvl6pPr marL="2286000" algn="l" defTabSz="914400" rtl="0" eaLnBrk="1" latinLnBrk="0" hangingPunct="1">
+                <a:defRPr sz="1800" kern="1200">
+                  <a:solidFill>
+                    <a:schemeClr val="tx1"/>
+                  </a:solidFill>
+                  <a:latin typeface="+mn-lt"/>
+                  <a:ea typeface="+mn-ea"/>
+                  <a:cs typeface="+mn-cs"/>
+                </a:defRPr>
+              </a:lvl6pPr>
+              <a:lvl7pPr marL="2743200" algn="l" defTabSz="914400" rtl="0" eaLnBrk="1" latinLnBrk="0" hangingPunct="1">
+                <a:defRPr sz="1800" kern="1200">
+                  <a:solidFill>
+                    <a:schemeClr val="tx1"/>
+                  </a:solidFill>
+                  <a:latin typeface="+mn-lt"/>
+                  <a:ea typeface="+mn-ea"/>
+                  <a:cs typeface="+mn-cs"/>
+                </a:defRPr>
+              </a:lvl7pPr>
+              <a:lvl8pPr marL="3200400" algn="l" defTabSz="914400" rtl="0" eaLnBrk="1" latinLnBrk="0" hangingPunct="1">
+                <a:defRPr sz="1800" kern="1200">
+                  <a:solidFill>
+                    <a:schemeClr val="tx1"/>
+                  </a:solidFill>
+                  <a:latin typeface="+mn-lt"/>
+                  <a:ea typeface="+mn-ea"/>
+                  <a:cs typeface="+mn-cs"/>
+                </a:defRPr>
+              </a:lvl8pPr>
+              <a:lvl9pPr marL="3657600" algn="l" defTabSz="914400" rtl="0" eaLnBrk="1" latinLnBrk="0" hangingPunct="1">
+                <a:defRPr sz="1800" kern="1200">
+                  <a:solidFill>
+                    <a:schemeClr val="tx1"/>
+                  </a:solidFill>
+                  <a:latin typeface="+mn-lt"/>
+                  <a:ea typeface="+mn-ea"/>
+                  <a:cs typeface="+mn-cs"/>
+                </a:defRPr>
+              </a:lvl9pPr>
+            </a:lstStyle>
+            <a:p>
+              <a:pPr algn="ctr"/>
+              <a:r>
+                <a:rPr lang="en-US" sz="1000" dirty="0"/>
+                <a:t>(</a:t>
+              </a:r>
+              <a:r>
+                <a:rPr lang="en-US" sz="1000" dirty="0" err="1"/>
+                <a:t>i</a:t>
+              </a:r>
+              <a:r>
+                <a:rPr lang="en-US" sz="1000" dirty="0"/>
+                <a:t>) Icon is link to open</a:t>
+              </a:r>
+            </a:p>
+            <a:p>
+              <a:pPr algn="ctr"/>
+              <a:r>
+                <a:rPr lang="en-US" sz="500" dirty="0"/>
+                <a:t>[Model Family &amp; Year Introduction </a:t>
+              </a:r>
+              <a:br>
+                <a:rPr lang="en-US" sz="500" dirty="0"/>
+              </a:br>
+              <a:r>
+                <a:rPr lang="en-US" sz="500" dirty="0"/>
+                <a:t>PDF Document]</a:t>
+              </a:r>
+              <a:endParaRPr lang="LID4096" sz="500" dirty="0"/>
+            </a:p>
+          </p:txBody>
+        </p:sp>
+      </p:grpSp>
+      <p:sp>
+        <p:nvSpPr>
+          <p:cNvPr id="50" name="Rectangle: Rounded Corners 49">
+            <a:extLst>
+              <a:ext uri="{FF2B5EF4-FFF2-40B4-BE49-F238E27FC236}">
+                <a16:creationId xmlns:a16="http://schemas.microsoft.com/office/drawing/2014/main" id="{1CCA70B1-F593-96DA-9E2B-6A4CF1D0B2B2}"/>
+              </a:ext>
+            </a:extLst>
+          </p:cNvPr>
+          <p:cNvSpPr/>
+          <p:nvPr/>
+        </p:nvSpPr>
+        <p:spPr>
+          <a:xfrm>
+            <a:off x="-698734" y="179337"/>
+            <a:ext cx="2976315" cy="780784"/>
+          </a:xfrm>
+          <a:prstGeom prst="roundRect">
+            <a:avLst/>
+          </a:prstGeom>
+          <a:noFill/>
+        </p:spPr>
+        <p:style>
+          <a:lnRef idx="2">
+            <a:schemeClr val="accent1">
+              <a:shade val="15000"/>
+            </a:schemeClr>
+          </a:lnRef>
+          <a:fillRef idx="1">
+            <a:schemeClr val="accent1"/>
+          </a:fillRef>
+          <a:effectRef idx="0">
+            <a:schemeClr val="accent1"/>
+          </a:effectRef>
+          <a:fontRef idx="minor">
+            <a:schemeClr val="lt1"/>
+          </a:fontRef>
+        </p:style>
+        <p:txBody>
+          <a:bodyPr rtlCol="0" anchor="ctr"/>
+          <a:lstStyle>
+            <a:defPPr>
+              <a:defRPr lang="LID4096"/>
+            </a:defPPr>
+            <a:lvl1pPr marL="0" algn="l" defTabSz="914400" rtl="0" eaLnBrk="1" latinLnBrk="0" hangingPunct="1">
+              <a:defRPr sz="1800" kern="1200">
+                <a:solidFill>
+                  <a:schemeClr val="lt1"/>
+                </a:solidFill>
+                <a:latin typeface="+mn-lt"/>
+                <a:ea typeface="+mn-ea"/>
+                <a:cs typeface="+mn-cs"/>
+              </a:defRPr>
+            </a:lvl1pPr>
+            <a:lvl2pPr marL="457200" algn="l" defTabSz="914400" rtl="0" eaLnBrk="1" latinLnBrk="0" hangingPunct="1">
+              <a:defRPr sz="1800" kern="1200">
+                <a:solidFill>
+                  <a:schemeClr val="lt1"/>
+                </a:solidFill>
+                <a:latin typeface="+mn-lt"/>
+                <a:ea typeface="+mn-ea"/>
+                <a:cs typeface="+mn-cs"/>
+              </a:defRPr>
+            </a:lvl2pPr>
+            <a:lvl3pPr marL="914400" algn="l" defTabSz="914400" rtl="0" eaLnBrk="1" latinLnBrk="0" hangingPunct="1">
+              <a:defRPr sz="1800" kern="1200">
+                <a:solidFill>
+                  <a:schemeClr val="lt1"/>
+                </a:solidFill>
+                <a:latin typeface="+mn-lt"/>
+                <a:ea typeface="+mn-ea"/>
+                <a:cs typeface="+mn-cs"/>
+              </a:defRPr>
+            </a:lvl3pPr>
+            <a:lvl4pPr marL="1371600" algn="l" defTabSz="914400" rtl="0" eaLnBrk="1" latinLnBrk="0" hangingPunct="1">
+              <a:defRPr sz="1800" kern="1200">
+                <a:solidFill>
+                  <a:schemeClr val="lt1"/>
+                </a:solidFill>
+                <a:latin typeface="+mn-lt"/>
+                <a:ea typeface="+mn-ea"/>
+                <a:cs typeface="+mn-cs"/>
+              </a:defRPr>
+            </a:lvl4pPr>
+            <a:lvl5pPr marL="1828800" algn="l" defTabSz="914400" rtl="0" eaLnBrk="1" latinLnBrk="0" hangingPunct="1">
+              <a:defRPr sz="1800" kern="1200">
+                <a:solidFill>
+                  <a:schemeClr val="lt1"/>
+                </a:solidFill>
+                <a:latin typeface="+mn-lt"/>
+                <a:ea typeface="+mn-ea"/>
+                <a:cs typeface="+mn-cs"/>
+              </a:defRPr>
+            </a:lvl5pPr>
+            <a:lvl6pPr marL="2286000" algn="l" defTabSz="914400" rtl="0" eaLnBrk="1" latinLnBrk="0" hangingPunct="1">
+              <a:defRPr sz="1800" kern="1200">
+                <a:solidFill>
+                  <a:schemeClr val="lt1"/>
+                </a:solidFill>
+                <a:latin typeface="+mn-lt"/>
+                <a:ea typeface="+mn-ea"/>
+                <a:cs typeface="+mn-cs"/>
+              </a:defRPr>
+            </a:lvl6pPr>
+            <a:lvl7pPr marL="2743200" algn="l" defTabSz="914400" rtl="0" eaLnBrk="1" latinLnBrk="0" hangingPunct="1">
+              <a:defRPr sz="1800" kern="1200">
+                <a:solidFill>
+                  <a:schemeClr val="lt1"/>
+                </a:solidFill>
+                <a:latin typeface="+mn-lt"/>
+                <a:ea typeface="+mn-ea"/>
+                <a:cs typeface="+mn-cs"/>
+              </a:defRPr>
+            </a:lvl7pPr>
+            <a:lvl8pPr marL="3200400" algn="l" defTabSz="914400" rtl="0" eaLnBrk="1" latinLnBrk="0" hangingPunct="1">
+              <a:defRPr sz="1800" kern="1200">
+                <a:solidFill>
+                  <a:schemeClr val="lt1"/>
+                </a:solidFill>
+                <a:latin typeface="+mn-lt"/>
+                <a:ea typeface="+mn-ea"/>
+                <a:cs typeface="+mn-cs"/>
+              </a:defRPr>
+            </a:lvl8pPr>
+            <a:lvl9pPr marL="3657600" algn="l" defTabSz="914400" rtl="0" eaLnBrk="1" latinLnBrk="0" hangingPunct="1">
+              <a:defRPr sz="1800" kern="1200">
+                <a:solidFill>
+                  <a:schemeClr val="lt1"/>
+                </a:solidFill>
+                <a:latin typeface="+mn-lt"/>
+                <a:ea typeface="+mn-ea"/>
+                <a:cs typeface="+mn-cs"/>
+              </a:defRPr>
+            </a:lvl9pPr>
+          </a:lstStyle>
+          <a:p>
+            <a:pPr algn="ctr"/>
+            <a:endParaRPr lang="LID4096"/>
+          </a:p>
+        </p:txBody>
+      </p:sp>
+      <p:sp>
+        <p:nvSpPr>
+          <p:cNvPr id="51" name="TextBox 24">
+            <a:extLst>
+              <a:ext uri="{FF2B5EF4-FFF2-40B4-BE49-F238E27FC236}">
+                <a16:creationId xmlns:a16="http://schemas.microsoft.com/office/drawing/2014/main" id="{6E4D0859-D71B-9F6E-1178-5695507839BB}"/>
+              </a:ext>
+            </a:extLst>
+          </p:cNvPr>
+          <p:cNvSpPr txBox="1"/>
+          <p:nvPr/>
+        </p:nvSpPr>
+        <p:spPr>
+          <a:xfrm>
+            <a:off x="-582954" y="627274"/>
+            <a:ext cx="2803588" cy="276999"/>
+          </a:xfrm>
+          <a:prstGeom prst="rect">
+            <a:avLst/>
+          </a:prstGeom>
+          <a:noFill/>
+        </p:spPr>
+        <p:txBody>
+          <a:bodyPr wrap="square" rtlCol="0">
+            <a:spAutoFit/>
+          </a:bodyPr>
+          <a:lstStyle>
+            <a:defPPr>
+              <a:defRPr lang="LID4096"/>
+            </a:defPPr>
+            <a:lvl1pPr marL="0" algn="l" defTabSz="914400" rtl="0" eaLnBrk="1" latinLnBrk="0" hangingPunct="1">
+              <a:defRPr sz="1800" kern="1200">
+                <a:solidFill>
+                  <a:schemeClr val="tx1"/>
+                </a:solidFill>
+                <a:latin typeface="+mn-lt"/>
+                <a:ea typeface="+mn-ea"/>
+                <a:cs typeface="+mn-cs"/>
+              </a:defRPr>
+            </a:lvl1pPr>
+            <a:lvl2pPr marL="457200" algn="l" defTabSz="914400" rtl="0" eaLnBrk="1" latinLnBrk="0" hangingPunct="1">
+              <a:defRPr sz="1800" kern="1200">
+                <a:solidFill>
+                  <a:schemeClr val="tx1"/>
+                </a:solidFill>
+                <a:latin typeface="+mn-lt"/>
+                <a:ea typeface="+mn-ea"/>
+                <a:cs typeface="+mn-cs"/>
+              </a:defRPr>
+            </a:lvl2pPr>
+            <a:lvl3pPr marL="914400" algn="l" defTabSz="914400" rtl="0" eaLnBrk="1" latinLnBrk="0" hangingPunct="1">
+              <a:defRPr sz="1800" kern="1200">
+                <a:solidFill>
+                  <a:schemeClr val="tx1"/>
+                </a:solidFill>
+                <a:latin typeface="+mn-lt"/>
+                <a:ea typeface="+mn-ea"/>
+                <a:cs typeface="+mn-cs"/>
+              </a:defRPr>
+            </a:lvl3pPr>
+            <a:lvl4pPr marL="1371600" algn="l" defTabSz="914400" rtl="0" eaLnBrk="1" latinLnBrk="0" hangingPunct="1">
+              <a:defRPr sz="1800" kern="1200">
+                <a:solidFill>
+                  <a:schemeClr val="tx1"/>
+                </a:solidFill>
+                <a:latin typeface="+mn-lt"/>
+                <a:ea typeface="+mn-ea"/>
+                <a:cs typeface="+mn-cs"/>
+              </a:defRPr>
+            </a:lvl4pPr>
+            <a:lvl5pPr marL="1828800" algn="l" defTabSz="914400" rtl="0" eaLnBrk="1" latinLnBrk="0" hangingPunct="1">
+              <a:defRPr sz="1800" kern="1200">
+                <a:solidFill>
+                  <a:schemeClr val="tx1"/>
+                </a:solidFill>
+                <a:latin typeface="+mn-lt"/>
+                <a:ea typeface="+mn-ea"/>
+                <a:cs typeface="+mn-cs"/>
+              </a:defRPr>
+            </a:lvl5pPr>
+            <a:lvl6pPr marL="2286000" algn="l" defTabSz="914400" rtl="0" eaLnBrk="1" latinLnBrk="0" hangingPunct="1">
+              <a:defRPr sz="1800" kern="1200">
+                <a:solidFill>
+                  <a:schemeClr val="tx1"/>
+                </a:solidFill>
+                <a:latin typeface="+mn-lt"/>
+                <a:ea typeface="+mn-ea"/>
+                <a:cs typeface="+mn-cs"/>
+              </a:defRPr>
+            </a:lvl6pPr>
+            <a:lvl7pPr marL="2743200" algn="l" defTabSz="914400" rtl="0" eaLnBrk="1" latinLnBrk="0" hangingPunct="1">
+              <a:defRPr sz="1800" kern="1200">
+                <a:solidFill>
+                  <a:schemeClr val="tx1"/>
+                </a:solidFill>
+                <a:latin typeface="+mn-lt"/>
+                <a:ea typeface="+mn-ea"/>
+                <a:cs typeface="+mn-cs"/>
+              </a:defRPr>
+            </a:lvl7pPr>
+            <a:lvl8pPr marL="3200400" algn="l" defTabSz="914400" rtl="0" eaLnBrk="1" latinLnBrk="0" hangingPunct="1">
+              <a:defRPr sz="1800" kern="1200">
+                <a:solidFill>
+                  <a:schemeClr val="tx1"/>
+                </a:solidFill>
+                <a:latin typeface="+mn-lt"/>
+                <a:ea typeface="+mn-ea"/>
+                <a:cs typeface="+mn-cs"/>
+              </a:defRPr>
+            </a:lvl8pPr>
+            <a:lvl9pPr marL="3657600" algn="l" defTabSz="914400" rtl="0" eaLnBrk="1" latinLnBrk="0" hangingPunct="1">
+              <a:defRPr sz="1800" kern="1200">
+                <a:solidFill>
+                  <a:schemeClr val="tx1"/>
+                </a:solidFill>
+                <a:latin typeface="+mn-lt"/>
+                <a:ea typeface="+mn-ea"/>
+                <a:cs typeface="+mn-cs"/>
+              </a:defRPr>
+            </a:lvl9pPr>
+          </a:lstStyle>
+          <a:p>
+            <a:r>
+              <a:rPr lang="en-GB" sz="1200" dirty="0"/>
+              <a:t>Logos and instructions etc</a:t>
+            </a:r>
+            <a:endParaRPr lang="LID4096" sz="1200" dirty="0"/>
+          </a:p>
+        </p:txBody>
+      </p:sp>
+      <p:sp>
+        <p:nvSpPr>
+          <p:cNvPr id="52" name="TextBox 6">
+            <a:extLst>
+              <a:ext uri="{FF2B5EF4-FFF2-40B4-BE49-F238E27FC236}">
+                <a16:creationId xmlns:a16="http://schemas.microsoft.com/office/drawing/2014/main" id="{272B1F46-BC3D-86B5-4969-535AB0FEA2A6}"/>
+              </a:ext>
+            </a:extLst>
+          </p:cNvPr>
+          <p:cNvSpPr txBox="1"/>
+          <p:nvPr/>
+        </p:nvSpPr>
+        <p:spPr>
+          <a:xfrm>
+            <a:off x="-582954" y="203239"/>
+            <a:ext cx="2549703" cy="461665"/>
+          </a:xfrm>
+          <a:prstGeom prst="rect">
+            <a:avLst/>
+          </a:prstGeom>
+          <a:noFill/>
+        </p:spPr>
+        <p:txBody>
+          <a:bodyPr wrap="square" rtlCol="0">
+            <a:spAutoFit/>
+          </a:bodyPr>
+          <a:lstStyle>
+            <a:defPPr>
+              <a:defRPr lang="LID4096"/>
+            </a:defPPr>
+            <a:lvl1pPr marL="0" algn="l" defTabSz="914400" rtl="0" eaLnBrk="1" latinLnBrk="0" hangingPunct="1">
+              <a:defRPr sz="1800" kern="1200">
+                <a:solidFill>
+                  <a:schemeClr val="tx1"/>
+                </a:solidFill>
+                <a:latin typeface="+mn-lt"/>
+                <a:ea typeface="+mn-ea"/>
+                <a:cs typeface="+mn-cs"/>
+              </a:defRPr>
+            </a:lvl1pPr>
+            <a:lvl2pPr marL="457200" algn="l" defTabSz="914400" rtl="0" eaLnBrk="1" latinLnBrk="0" hangingPunct="1">
+              <a:defRPr sz="1800" kern="1200">
+                <a:solidFill>
+                  <a:schemeClr val="tx1"/>
+                </a:solidFill>
+                <a:latin typeface="+mn-lt"/>
+                <a:ea typeface="+mn-ea"/>
+                <a:cs typeface="+mn-cs"/>
+              </a:defRPr>
+            </a:lvl2pPr>
+            <a:lvl3pPr marL="914400" algn="l" defTabSz="914400" rtl="0" eaLnBrk="1" latinLnBrk="0" hangingPunct="1">
+              <a:defRPr sz="1800" kern="1200">
+                <a:solidFill>
+                  <a:schemeClr val="tx1"/>
+                </a:solidFill>
+                <a:latin typeface="+mn-lt"/>
+                <a:ea typeface="+mn-ea"/>
+                <a:cs typeface="+mn-cs"/>
+              </a:defRPr>
+            </a:lvl3pPr>
+            <a:lvl4pPr marL="1371600" algn="l" defTabSz="914400" rtl="0" eaLnBrk="1" latinLnBrk="0" hangingPunct="1">
+              <a:defRPr sz="1800" kern="1200">
+                <a:solidFill>
+                  <a:schemeClr val="tx1"/>
+                </a:solidFill>
+                <a:latin typeface="+mn-lt"/>
+                <a:ea typeface="+mn-ea"/>
+                <a:cs typeface="+mn-cs"/>
+              </a:defRPr>
+            </a:lvl4pPr>
+            <a:lvl5pPr marL="1828800" algn="l" defTabSz="914400" rtl="0" eaLnBrk="1" latinLnBrk="0" hangingPunct="1">
+              <a:defRPr sz="1800" kern="1200">
+                <a:solidFill>
+                  <a:schemeClr val="tx1"/>
+                </a:solidFill>
+                <a:latin typeface="+mn-lt"/>
+                <a:ea typeface="+mn-ea"/>
+                <a:cs typeface="+mn-cs"/>
+              </a:defRPr>
+            </a:lvl5pPr>
+            <a:lvl6pPr marL="2286000" algn="l" defTabSz="914400" rtl="0" eaLnBrk="1" latinLnBrk="0" hangingPunct="1">
+              <a:defRPr sz="1800" kern="1200">
+                <a:solidFill>
+                  <a:schemeClr val="tx1"/>
+                </a:solidFill>
+                <a:latin typeface="+mn-lt"/>
+                <a:ea typeface="+mn-ea"/>
+                <a:cs typeface="+mn-cs"/>
+              </a:defRPr>
+            </a:lvl6pPr>
+            <a:lvl7pPr marL="2743200" algn="l" defTabSz="914400" rtl="0" eaLnBrk="1" latinLnBrk="0" hangingPunct="1">
+              <a:defRPr sz="1800" kern="1200">
+                <a:solidFill>
+                  <a:schemeClr val="tx1"/>
+                </a:solidFill>
+                <a:latin typeface="+mn-lt"/>
+                <a:ea typeface="+mn-ea"/>
+                <a:cs typeface="+mn-cs"/>
+              </a:defRPr>
+            </a:lvl7pPr>
+            <a:lvl8pPr marL="3200400" algn="l" defTabSz="914400" rtl="0" eaLnBrk="1" latinLnBrk="0" hangingPunct="1">
+              <a:defRPr sz="1800" kern="1200">
+                <a:solidFill>
+                  <a:schemeClr val="tx1"/>
+                </a:solidFill>
+                <a:latin typeface="+mn-lt"/>
+                <a:ea typeface="+mn-ea"/>
+                <a:cs typeface="+mn-cs"/>
+              </a:defRPr>
+            </a:lvl8pPr>
+            <a:lvl9pPr marL="3657600" algn="l" defTabSz="914400" rtl="0" eaLnBrk="1" latinLnBrk="0" hangingPunct="1">
+              <a:defRPr sz="1800" kern="1200">
+                <a:solidFill>
+                  <a:schemeClr val="tx1"/>
+                </a:solidFill>
+                <a:latin typeface="+mn-lt"/>
+                <a:ea typeface="+mn-ea"/>
+                <a:cs typeface="+mn-cs"/>
+              </a:defRPr>
+            </a:lvl9pPr>
+          </a:lstStyle>
+          <a:p>
+            <a:r>
+              <a:rPr lang="en-GB" sz="1200" dirty="0"/>
+              <a:t>Flags Languages </a:t>
+            </a:r>
+            <a:br>
+              <a:rPr lang="en-GB" sz="1200" dirty="0"/>
+            </a:br>
+            <a:r>
+              <a:rPr lang="en-GB" sz="1200" dirty="0"/>
+              <a:t>[UI]  [Parts]</a:t>
+            </a:r>
+            <a:endParaRPr lang="LID4096" sz="1200" dirty="0"/>
+          </a:p>
+        </p:txBody>
+      </p:sp>
+      <p:sp>
+        <p:nvSpPr>
+          <p:cNvPr id="54" name="TextBox 34">
+            <a:extLst>
+              <a:ext uri="{FF2B5EF4-FFF2-40B4-BE49-F238E27FC236}">
+                <a16:creationId xmlns:a16="http://schemas.microsoft.com/office/drawing/2014/main" id="{A7E3E50E-43C2-13C2-A9A7-2B8A6309E1A2}"/>
+              </a:ext>
+            </a:extLst>
+          </p:cNvPr>
+          <p:cNvSpPr txBox="1"/>
+          <p:nvPr/>
+        </p:nvSpPr>
+        <p:spPr>
+          <a:xfrm>
+            <a:off x="10449967" y="1857127"/>
+            <a:ext cx="2527872" cy="1277273"/>
+          </a:xfrm>
+          <a:prstGeom prst="rect">
+            <a:avLst/>
+          </a:prstGeom>
+          <a:noFill/>
+        </p:spPr>
+        <p:txBody>
+          <a:bodyPr wrap="square" rtlCol="0">
+            <a:spAutoFit/>
+          </a:bodyPr>
+          <a:lstStyle>
+            <a:defPPr>
+              <a:defRPr lang="LID4096"/>
+            </a:defPPr>
+            <a:lvl1pPr marL="0" algn="l" defTabSz="914400" rtl="0" eaLnBrk="1" latinLnBrk="0" hangingPunct="1">
+              <a:defRPr sz="1800" kern="1200">
+                <a:solidFill>
+                  <a:schemeClr val="tx1"/>
+                </a:solidFill>
+                <a:latin typeface="+mn-lt"/>
+                <a:ea typeface="+mn-ea"/>
+                <a:cs typeface="+mn-cs"/>
+              </a:defRPr>
+            </a:lvl1pPr>
+            <a:lvl2pPr marL="457200" algn="l" defTabSz="914400" rtl="0" eaLnBrk="1" latinLnBrk="0" hangingPunct="1">
+              <a:defRPr sz="1800" kern="1200">
+                <a:solidFill>
+                  <a:schemeClr val="tx1"/>
+                </a:solidFill>
+                <a:latin typeface="+mn-lt"/>
+                <a:ea typeface="+mn-ea"/>
+                <a:cs typeface="+mn-cs"/>
+              </a:defRPr>
+            </a:lvl2pPr>
+            <a:lvl3pPr marL="914400" algn="l" defTabSz="914400" rtl="0" eaLnBrk="1" latinLnBrk="0" hangingPunct="1">
+              <a:defRPr sz="1800" kern="1200">
+                <a:solidFill>
+                  <a:schemeClr val="tx1"/>
+                </a:solidFill>
+                <a:latin typeface="+mn-lt"/>
+                <a:ea typeface="+mn-ea"/>
+                <a:cs typeface="+mn-cs"/>
+              </a:defRPr>
+            </a:lvl3pPr>
+            <a:lvl4pPr marL="1371600" algn="l" defTabSz="914400" rtl="0" eaLnBrk="1" latinLnBrk="0" hangingPunct="1">
+              <a:defRPr sz="1800" kern="1200">
+                <a:solidFill>
+                  <a:schemeClr val="tx1"/>
+                </a:solidFill>
+                <a:latin typeface="+mn-lt"/>
+                <a:ea typeface="+mn-ea"/>
+                <a:cs typeface="+mn-cs"/>
+              </a:defRPr>
+            </a:lvl4pPr>
+            <a:lvl5pPr marL="1828800" algn="l" defTabSz="914400" rtl="0" eaLnBrk="1" latinLnBrk="0" hangingPunct="1">
+              <a:defRPr sz="1800" kern="1200">
+                <a:solidFill>
+                  <a:schemeClr val="tx1"/>
+                </a:solidFill>
+                <a:latin typeface="+mn-lt"/>
+                <a:ea typeface="+mn-ea"/>
+                <a:cs typeface="+mn-cs"/>
+              </a:defRPr>
+            </a:lvl5pPr>
+            <a:lvl6pPr marL="2286000" algn="l" defTabSz="914400" rtl="0" eaLnBrk="1" latinLnBrk="0" hangingPunct="1">
+              <a:defRPr sz="1800" kern="1200">
+                <a:solidFill>
+                  <a:schemeClr val="tx1"/>
+                </a:solidFill>
+                <a:latin typeface="+mn-lt"/>
+                <a:ea typeface="+mn-ea"/>
+                <a:cs typeface="+mn-cs"/>
+              </a:defRPr>
+            </a:lvl6pPr>
+            <a:lvl7pPr marL="2743200" algn="l" defTabSz="914400" rtl="0" eaLnBrk="1" latinLnBrk="0" hangingPunct="1">
+              <a:defRPr sz="1800" kern="1200">
+                <a:solidFill>
+                  <a:schemeClr val="tx1"/>
+                </a:solidFill>
+                <a:latin typeface="+mn-lt"/>
+                <a:ea typeface="+mn-ea"/>
+                <a:cs typeface="+mn-cs"/>
+              </a:defRPr>
+            </a:lvl7pPr>
+            <a:lvl8pPr marL="3200400" algn="l" defTabSz="914400" rtl="0" eaLnBrk="1" latinLnBrk="0" hangingPunct="1">
+              <a:defRPr sz="1800" kern="1200">
+                <a:solidFill>
+                  <a:schemeClr val="tx1"/>
+                </a:solidFill>
+                <a:latin typeface="+mn-lt"/>
+                <a:ea typeface="+mn-ea"/>
+                <a:cs typeface="+mn-cs"/>
+              </a:defRPr>
+            </a:lvl8pPr>
+            <a:lvl9pPr marL="3657600" algn="l" defTabSz="914400" rtl="0" eaLnBrk="1" latinLnBrk="0" hangingPunct="1">
+              <a:defRPr sz="1800" kern="1200">
+                <a:solidFill>
+                  <a:schemeClr val="tx1"/>
+                </a:solidFill>
+                <a:latin typeface="+mn-lt"/>
+                <a:ea typeface="+mn-ea"/>
+                <a:cs typeface="+mn-cs"/>
+              </a:defRPr>
+            </a:lvl9pPr>
+          </a:lstStyle>
+          <a:p>
+            <a:pPr algn="ctr"/>
+            <a:r>
+              <a:rPr lang="en-US" sz="1100" dirty="0">
+                <a:solidFill>
+                  <a:schemeClr val="tx2">
+                    <a:lumMod val="50000"/>
+                    <a:lumOff val="50000"/>
+                  </a:schemeClr>
+                </a:solidFill>
+              </a:rPr>
+              <a:t>Search Results Parts List</a:t>
+            </a:r>
+          </a:p>
+          <a:p>
+            <a:pPr algn="ctr"/>
+            <a:r>
+              <a:rPr lang="en-US" sz="1100" dirty="0">
+                <a:solidFill>
+                  <a:schemeClr val="tx2">
+                    <a:lumMod val="50000"/>
+                    <a:lumOff val="50000"/>
+                  </a:schemeClr>
+                </a:solidFill>
+              </a:rPr>
+              <a:t>[Scrollable and </a:t>
+            </a:r>
+          </a:p>
+          <a:p>
+            <a:pPr algn="ctr"/>
+            <a:r>
+              <a:rPr lang="en-US" sz="1100" dirty="0">
+                <a:solidFill>
+                  <a:schemeClr val="tx2">
+                    <a:lumMod val="50000"/>
+                    <a:lumOff val="50000"/>
+                  </a:schemeClr>
+                </a:solidFill>
+              </a:rPr>
+              <a:t>check boxes to bookmark] </a:t>
+            </a:r>
+          </a:p>
+          <a:p>
+            <a:r>
+              <a:rPr lang="" sz="1100" dirty="0"/>
+              <a:t>[ ] PN1 – Part Name1</a:t>
+            </a:r>
+          </a:p>
+          <a:p>
+            <a:r>
+              <a:rPr lang="" sz="1100" dirty="0"/>
+              <a:t>[ ] PN2 – Part Name2</a:t>
+            </a:r>
+          </a:p>
+          <a:p>
+            <a:r>
+              <a:rPr lang="" sz="1100" dirty="0"/>
+              <a:t>…</a:t>
+            </a:r>
+          </a:p>
+          <a:p>
+            <a:pPr algn="ctr"/>
+            <a:endParaRPr lang="en-US" sz="1100" dirty="0">
+              <a:solidFill>
+                <a:schemeClr val="tx2">
+                  <a:lumMod val="50000"/>
+                  <a:lumOff val="50000"/>
+                </a:schemeClr>
+              </a:solidFill>
+            </a:endParaRPr>
+          </a:p>
+        </p:txBody>
+      </p:sp>
+      <p:sp>
+        <p:nvSpPr>
+          <p:cNvPr id="56" name="Rectangle: Rounded Corners 55">
+            <a:extLst>
+              <a:ext uri="{FF2B5EF4-FFF2-40B4-BE49-F238E27FC236}">
+                <a16:creationId xmlns:a16="http://schemas.microsoft.com/office/drawing/2014/main" id="{C9B063D2-6497-D4C9-2140-167E6EDDA68E}"/>
+              </a:ext>
+            </a:extLst>
+          </p:cNvPr>
+          <p:cNvSpPr/>
+          <p:nvPr/>
+        </p:nvSpPr>
+        <p:spPr>
+          <a:xfrm>
+            <a:off x="2341945" y="996178"/>
+            <a:ext cx="7860462" cy="1518634"/>
+          </a:xfrm>
+          <a:prstGeom prst="roundRect">
+            <a:avLst/>
+          </a:prstGeom>
+          <a:noFill/>
+        </p:spPr>
+        <p:style>
+          <a:lnRef idx="2">
+            <a:schemeClr val="accent1">
+              <a:shade val="15000"/>
+            </a:schemeClr>
+          </a:lnRef>
+          <a:fillRef idx="1">
+            <a:schemeClr val="accent1"/>
+          </a:fillRef>
+          <a:effectRef idx="0">
+            <a:schemeClr val="accent1"/>
+          </a:effectRef>
+          <a:fontRef idx="minor">
+            <a:schemeClr val="lt1"/>
+          </a:fontRef>
+        </p:style>
+        <p:txBody>
+          <a:bodyPr rtlCol="0" anchor="ctr"/>
+          <a:lstStyle>
+            <a:defPPr>
+              <a:defRPr lang="LID4096"/>
+            </a:defPPr>
+            <a:lvl1pPr marL="0" algn="l" defTabSz="914400" rtl="0" eaLnBrk="1" latinLnBrk="0" hangingPunct="1">
+              <a:defRPr sz="1800" kern="1200">
+                <a:solidFill>
+                  <a:schemeClr val="lt1"/>
+                </a:solidFill>
+                <a:latin typeface="+mn-lt"/>
+                <a:ea typeface="+mn-ea"/>
+                <a:cs typeface="+mn-cs"/>
+              </a:defRPr>
+            </a:lvl1pPr>
+            <a:lvl2pPr marL="457200" algn="l" defTabSz="914400" rtl="0" eaLnBrk="1" latinLnBrk="0" hangingPunct="1">
+              <a:defRPr sz="1800" kern="1200">
+                <a:solidFill>
+                  <a:schemeClr val="lt1"/>
+                </a:solidFill>
+                <a:latin typeface="+mn-lt"/>
+                <a:ea typeface="+mn-ea"/>
+                <a:cs typeface="+mn-cs"/>
+              </a:defRPr>
+            </a:lvl2pPr>
+            <a:lvl3pPr marL="914400" algn="l" defTabSz="914400" rtl="0" eaLnBrk="1" latinLnBrk="0" hangingPunct="1">
+              <a:defRPr sz="1800" kern="1200">
+                <a:solidFill>
+                  <a:schemeClr val="lt1"/>
+                </a:solidFill>
+                <a:latin typeface="+mn-lt"/>
+                <a:ea typeface="+mn-ea"/>
+                <a:cs typeface="+mn-cs"/>
+              </a:defRPr>
+            </a:lvl3pPr>
+            <a:lvl4pPr marL="1371600" algn="l" defTabSz="914400" rtl="0" eaLnBrk="1" latinLnBrk="0" hangingPunct="1">
+              <a:defRPr sz="1800" kern="1200">
+                <a:solidFill>
+                  <a:schemeClr val="lt1"/>
+                </a:solidFill>
+                <a:latin typeface="+mn-lt"/>
+                <a:ea typeface="+mn-ea"/>
+                <a:cs typeface="+mn-cs"/>
+              </a:defRPr>
+            </a:lvl4pPr>
+            <a:lvl5pPr marL="1828800" algn="l" defTabSz="914400" rtl="0" eaLnBrk="1" latinLnBrk="0" hangingPunct="1">
+              <a:defRPr sz="1800" kern="1200">
+                <a:solidFill>
+                  <a:schemeClr val="lt1"/>
+                </a:solidFill>
+                <a:latin typeface="+mn-lt"/>
+                <a:ea typeface="+mn-ea"/>
+                <a:cs typeface="+mn-cs"/>
+              </a:defRPr>
+            </a:lvl5pPr>
+            <a:lvl6pPr marL="2286000" algn="l" defTabSz="914400" rtl="0" eaLnBrk="1" latinLnBrk="0" hangingPunct="1">
+              <a:defRPr sz="1800" kern="1200">
+                <a:solidFill>
+                  <a:schemeClr val="lt1"/>
+                </a:solidFill>
+                <a:latin typeface="+mn-lt"/>
+                <a:ea typeface="+mn-ea"/>
+                <a:cs typeface="+mn-cs"/>
+              </a:defRPr>
+            </a:lvl6pPr>
+            <a:lvl7pPr marL="2743200" algn="l" defTabSz="914400" rtl="0" eaLnBrk="1" latinLnBrk="0" hangingPunct="1">
+              <a:defRPr sz="1800" kern="1200">
+                <a:solidFill>
+                  <a:schemeClr val="lt1"/>
+                </a:solidFill>
+                <a:latin typeface="+mn-lt"/>
+                <a:ea typeface="+mn-ea"/>
+                <a:cs typeface="+mn-cs"/>
+              </a:defRPr>
+            </a:lvl7pPr>
+            <a:lvl8pPr marL="3200400" algn="l" defTabSz="914400" rtl="0" eaLnBrk="1" latinLnBrk="0" hangingPunct="1">
+              <a:defRPr sz="1800" kern="1200">
+                <a:solidFill>
+                  <a:schemeClr val="lt1"/>
+                </a:solidFill>
+                <a:latin typeface="+mn-lt"/>
+                <a:ea typeface="+mn-ea"/>
+                <a:cs typeface="+mn-cs"/>
+              </a:defRPr>
+            </a:lvl8pPr>
+            <a:lvl9pPr marL="3657600" algn="l" defTabSz="914400" rtl="0" eaLnBrk="1" latinLnBrk="0" hangingPunct="1">
+              <a:defRPr sz="1800" kern="1200">
+                <a:solidFill>
+                  <a:schemeClr val="lt1"/>
+                </a:solidFill>
+                <a:latin typeface="+mn-lt"/>
+                <a:ea typeface="+mn-ea"/>
+                <a:cs typeface="+mn-cs"/>
+              </a:defRPr>
+            </a:lvl9pPr>
+          </a:lstStyle>
+          <a:p>
+            <a:pPr algn="ctr"/>
+            <a:endParaRPr lang="LID4096"/>
+          </a:p>
+        </p:txBody>
+      </p:sp>
+      <p:sp>
+        <p:nvSpPr>
+          <p:cNvPr id="57" name="TextBox 40">
+            <a:extLst>
+              <a:ext uri="{FF2B5EF4-FFF2-40B4-BE49-F238E27FC236}">
+                <a16:creationId xmlns:a16="http://schemas.microsoft.com/office/drawing/2014/main" id="{7955AB9C-47FF-E30F-2B91-352A457C95A7}"/>
+              </a:ext>
+            </a:extLst>
+          </p:cNvPr>
+          <p:cNvSpPr txBox="1"/>
+          <p:nvPr/>
+        </p:nvSpPr>
+        <p:spPr>
+          <a:xfrm>
+            <a:off x="3859619" y="1093335"/>
+            <a:ext cx="4633093" cy="446276"/>
+          </a:xfrm>
+          <a:prstGeom prst="rect">
+            <a:avLst/>
+          </a:prstGeom>
+          <a:noFill/>
+        </p:spPr>
+        <p:txBody>
+          <a:bodyPr wrap="square">
+            <a:spAutoFit/>
+          </a:bodyPr>
+          <a:lstStyle>
+            <a:defPPr>
+              <a:defRPr lang="LID4096"/>
+            </a:defPPr>
+            <a:lvl1pPr marL="0" algn="l" defTabSz="914400" rtl="0" eaLnBrk="1" latinLnBrk="0" hangingPunct="1">
+              <a:defRPr sz="1800" kern="1200">
+                <a:solidFill>
+                  <a:schemeClr val="tx1"/>
+                </a:solidFill>
+                <a:latin typeface="+mn-lt"/>
+                <a:ea typeface="+mn-ea"/>
+                <a:cs typeface="+mn-cs"/>
+              </a:defRPr>
+            </a:lvl1pPr>
+            <a:lvl2pPr marL="457200" algn="l" defTabSz="914400" rtl="0" eaLnBrk="1" latinLnBrk="0" hangingPunct="1">
+              <a:defRPr sz="1800" kern="1200">
+                <a:solidFill>
+                  <a:schemeClr val="tx1"/>
+                </a:solidFill>
+                <a:latin typeface="+mn-lt"/>
+                <a:ea typeface="+mn-ea"/>
+                <a:cs typeface="+mn-cs"/>
+              </a:defRPr>
+            </a:lvl2pPr>
+            <a:lvl3pPr marL="914400" algn="l" defTabSz="914400" rtl="0" eaLnBrk="1" latinLnBrk="0" hangingPunct="1">
+              <a:defRPr sz="1800" kern="1200">
+                <a:solidFill>
+                  <a:schemeClr val="tx1"/>
+                </a:solidFill>
+                <a:latin typeface="+mn-lt"/>
+                <a:ea typeface="+mn-ea"/>
+                <a:cs typeface="+mn-cs"/>
+              </a:defRPr>
+            </a:lvl3pPr>
+            <a:lvl4pPr marL="1371600" algn="l" defTabSz="914400" rtl="0" eaLnBrk="1" latinLnBrk="0" hangingPunct="1">
+              <a:defRPr sz="1800" kern="1200">
+                <a:solidFill>
+                  <a:schemeClr val="tx1"/>
+                </a:solidFill>
+                <a:latin typeface="+mn-lt"/>
+                <a:ea typeface="+mn-ea"/>
+                <a:cs typeface="+mn-cs"/>
+              </a:defRPr>
+            </a:lvl4pPr>
+            <a:lvl5pPr marL="1828800" algn="l" defTabSz="914400" rtl="0" eaLnBrk="1" latinLnBrk="0" hangingPunct="1">
+              <a:defRPr sz="1800" kern="1200">
+                <a:solidFill>
+                  <a:schemeClr val="tx1"/>
+                </a:solidFill>
+                <a:latin typeface="+mn-lt"/>
+                <a:ea typeface="+mn-ea"/>
+                <a:cs typeface="+mn-cs"/>
+              </a:defRPr>
+            </a:lvl5pPr>
+            <a:lvl6pPr marL="2286000" algn="l" defTabSz="914400" rtl="0" eaLnBrk="1" latinLnBrk="0" hangingPunct="1">
+              <a:defRPr sz="1800" kern="1200">
+                <a:solidFill>
+                  <a:schemeClr val="tx1"/>
+                </a:solidFill>
+                <a:latin typeface="+mn-lt"/>
+                <a:ea typeface="+mn-ea"/>
+                <a:cs typeface="+mn-cs"/>
+              </a:defRPr>
+            </a:lvl6pPr>
+            <a:lvl7pPr marL="2743200" algn="l" defTabSz="914400" rtl="0" eaLnBrk="1" latinLnBrk="0" hangingPunct="1">
+              <a:defRPr sz="1800" kern="1200">
+                <a:solidFill>
+                  <a:schemeClr val="tx1"/>
+                </a:solidFill>
+                <a:latin typeface="+mn-lt"/>
+                <a:ea typeface="+mn-ea"/>
+                <a:cs typeface="+mn-cs"/>
+              </a:defRPr>
+            </a:lvl7pPr>
+            <a:lvl8pPr marL="3200400" algn="l" defTabSz="914400" rtl="0" eaLnBrk="1" latinLnBrk="0" hangingPunct="1">
+              <a:defRPr sz="1800" kern="1200">
+                <a:solidFill>
+                  <a:schemeClr val="tx1"/>
+                </a:solidFill>
+                <a:latin typeface="+mn-lt"/>
+                <a:ea typeface="+mn-ea"/>
+                <a:cs typeface="+mn-cs"/>
+              </a:defRPr>
+            </a:lvl8pPr>
+            <a:lvl9pPr marL="3657600" algn="l" defTabSz="914400" rtl="0" eaLnBrk="1" latinLnBrk="0" hangingPunct="1">
+              <a:defRPr sz="1800" kern="1200">
+                <a:solidFill>
+                  <a:schemeClr val="tx1"/>
+                </a:solidFill>
+                <a:latin typeface="+mn-lt"/>
+                <a:ea typeface="+mn-ea"/>
+                <a:cs typeface="+mn-cs"/>
+              </a:defRPr>
+            </a:lvl9pPr>
+          </a:lstStyle>
+          <a:p>
+            <a:pPr algn="ctr"/>
+            <a:r>
+              <a:rPr lang="en-GB" sz="1400" dirty="0">
+                <a:solidFill>
+                  <a:schemeClr val="tx2">
+                    <a:lumMod val="50000"/>
+                    <a:lumOff val="50000"/>
+                  </a:schemeClr>
+                </a:solidFill>
+              </a:rPr>
+              <a:t>VIN: [Insert here]</a:t>
+            </a:r>
+            <a:endParaRPr lang="en-US" sz="1400" dirty="0">
+              <a:solidFill>
+                <a:schemeClr val="tx2">
+                  <a:lumMod val="50000"/>
+                  <a:lumOff val="50000"/>
+                </a:schemeClr>
+              </a:solidFill>
+            </a:endParaRPr>
+          </a:p>
+          <a:p>
+            <a:pPr algn="ctr"/>
+            <a:r>
+              <a:rPr lang="en-US" sz="900" dirty="0"/>
+              <a:t>[when empty show scrollable list of VIN Ranges and select activates on filtering]</a:t>
+            </a:r>
+            <a:endParaRPr lang="LID4096" sz="900" dirty="0"/>
+          </a:p>
+        </p:txBody>
+      </p:sp>
+      <p:sp>
+        <p:nvSpPr>
+          <p:cNvPr id="64" name="Rectangle: Rounded Corners 63">
+            <a:extLst>
+              <a:ext uri="{FF2B5EF4-FFF2-40B4-BE49-F238E27FC236}">
+                <a16:creationId xmlns:a16="http://schemas.microsoft.com/office/drawing/2014/main" id="{34A68682-FD36-C58C-D8BC-CE7155A43C6B}"/>
+              </a:ext>
+            </a:extLst>
+          </p:cNvPr>
+          <p:cNvSpPr/>
+          <p:nvPr/>
+        </p:nvSpPr>
+        <p:spPr>
+          <a:xfrm>
+            <a:off x="2325698" y="154515"/>
+            <a:ext cx="7860462" cy="743861"/>
+          </a:xfrm>
+          <a:prstGeom prst="roundRect">
+            <a:avLst/>
+          </a:prstGeom>
+          <a:noFill/>
+        </p:spPr>
+        <p:style>
+          <a:lnRef idx="2">
+            <a:schemeClr val="accent1">
+              <a:shade val="15000"/>
+            </a:schemeClr>
+          </a:lnRef>
+          <a:fillRef idx="1">
+            <a:schemeClr val="accent1"/>
+          </a:fillRef>
+          <a:effectRef idx="0">
+            <a:schemeClr val="accent1"/>
+          </a:effectRef>
+          <a:fontRef idx="minor">
+            <a:schemeClr val="lt1"/>
+          </a:fontRef>
+        </p:style>
+        <p:txBody>
+          <a:bodyPr rtlCol="0" anchor="ctr"/>
+          <a:lstStyle>
+            <a:defPPr>
+              <a:defRPr lang="LID4096"/>
+            </a:defPPr>
+            <a:lvl1pPr marL="0" algn="l" defTabSz="914400" rtl="0" eaLnBrk="1" latinLnBrk="0" hangingPunct="1">
+              <a:defRPr sz="1800" kern="1200">
+                <a:solidFill>
+                  <a:schemeClr val="lt1"/>
+                </a:solidFill>
+                <a:latin typeface="+mn-lt"/>
+                <a:ea typeface="+mn-ea"/>
+                <a:cs typeface="+mn-cs"/>
+              </a:defRPr>
+            </a:lvl1pPr>
+            <a:lvl2pPr marL="457200" algn="l" defTabSz="914400" rtl="0" eaLnBrk="1" latinLnBrk="0" hangingPunct="1">
+              <a:defRPr sz="1800" kern="1200">
+                <a:solidFill>
+                  <a:schemeClr val="lt1"/>
+                </a:solidFill>
+                <a:latin typeface="+mn-lt"/>
+                <a:ea typeface="+mn-ea"/>
+                <a:cs typeface="+mn-cs"/>
+              </a:defRPr>
+            </a:lvl2pPr>
+            <a:lvl3pPr marL="914400" algn="l" defTabSz="914400" rtl="0" eaLnBrk="1" latinLnBrk="0" hangingPunct="1">
+              <a:defRPr sz="1800" kern="1200">
+                <a:solidFill>
+                  <a:schemeClr val="lt1"/>
+                </a:solidFill>
+                <a:latin typeface="+mn-lt"/>
+                <a:ea typeface="+mn-ea"/>
+                <a:cs typeface="+mn-cs"/>
+              </a:defRPr>
+            </a:lvl3pPr>
+            <a:lvl4pPr marL="1371600" algn="l" defTabSz="914400" rtl="0" eaLnBrk="1" latinLnBrk="0" hangingPunct="1">
+              <a:defRPr sz="1800" kern="1200">
+                <a:solidFill>
+                  <a:schemeClr val="lt1"/>
+                </a:solidFill>
+                <a:latin typeface="+mn-lt"/>
+                <a:ea typeface="+mn-ea"/>
+                <a:cs typeface="+mn-cs"/>
+              </a:defRPr>
+            </a:lvl4pPr>
+            <a:lvl5pPr marL="1828800" algn="l" defTabSz="914400" rtl="0" eaLnBrk="1" latinLnBrk="0" hangingPunct="1">
+              <a:defRPr sz="1800" kern="1200">
+                <a:solidFill>
+                  <a:schemeClr val="lt1"/>
+                </a:solidFill>
+                <a:latin typeface="+mn-lt"/>
+                <a:ea typeface="+mn-ea"/>
+                <a:cs typeface="+mn-cs"/>
+              </a:defRPr>
+            </a:lvl5pPr>
+            <a:lvl6pPr marL="2286000" algn="l" defTabSz="914400" rtl="0" eaLnBrk="1" latinLnBrk="0" hangingPunct="1">
+              <a:defRPr sz="1800" kern="1200">
+                <a:solidFill>
+                  <a:schemeClr val="lt1"/>
+                </a:solidFill>
+                <a:latin typeface="+mn-lt"/>
+                <a:ea typeface="+mn-ea"/>
+                <a:cs typeface="+mn-cs"/>
+              </a:defRPr>
+            </a:lvl6pPr>
+            <a:lvl7pPr marL="2743200" algn="l" defTabSz="914400" rtl="0" eaLnBrk="1" latinLnBrk="0" hangingPunct="1">
+              <a:defRPr sz="1800" kern="1200">
+                <a:solidFill>
+                  <a:schemeClr val="lt1"/>
+                </a:solidFill>
+                <a:latin typeface="+mn-lt"/>
+                <a:ea typeface="+mn-ea"/>
+                <a:cs typeface="+mn-cs"/>
+              </a:defRPr>
+            </a:lvl7pPr>
+            <a:lvl8pPr marL="3200400" algn="l" defTabSz="914400" rtl="0" eaLnBrk="1" latinLnBrk="0" hangingPunct="1">
+              <a:defRPr sz="1800" kern="1200">
+                <a:solidFill>
+                  <a:schemeClr val="lt1"/>
+                </a:solidFill>
+                <a:latin typeface="+mn-lt"/>
+                <a:ea typeface="+mn-ea"/>
+                <a:cs typeface="+mn-cs"/>
+              </a:defRPr>
+            </a:lvl8pPr>
+            <a:lvl9pPr marL="3657600" algn="l" defTabSz="914400" rtl="0" eaLnBrk="1" latinLnBrk="0" hangingPunct="1">
+              <a:defRPr sz="1800" kern="1200">
+                <a:solidFill>
+                  <a:schemeClr val="lt1"/>
+                </a:solidFill>
+                <a:latin typeface="+mn-lt"/>
+                <a:ea typeface="+mn-ea"/>
+                <a:cs typeface="+mn-cs"/>
+              </a:defRPr>
+            </a:lvl9pPr>
+          </a:lstStyle>
+          <a:p>
+            <a:pPr algn="ctr"/>
+            <a:endParaRPr lang="LID4096"/>
+          </a:p>
+        </p:txBody>
+      </p:sp>
+      <p:sp>
+        <p:nvSpPr>
+          <p:cNvPr id="65" name="TextBox 64">
+            <a:extLst>
+              <a:ext uri="{FF2B5EF4-FFF2-40B4-BE49-F238E27FC236}">
+                <a16:creationId xmlns:a16="http://schemas.microsoft.com/office/drawing/2014/main" id="{7063681E-71FC-2A79-4094-0FD746882052}"/>
+              </a:ext>
+            </a:extLst>
+          </p:cNvPr>
+          <p:cNvSpPr txBox="1"/>
+          <p:nvPr/>
+        </p:nvSpPr>
+        <p:spPr>
+          <a:xfrm>
+            <a:off x="5729663" y="295572"/>
+            <a:ext cx="1052532" cy="369332"/>
+          </a:xfrm>
+          <a:prstGeom prst="rect">
+            <a:avLst/>
+          </a:prstGeom>
+          <a:noFill/>
+        </p:spPr>
+        <p:txBody>
+          <a:bodyPr wrap="none" rtlCol="0">
+            <a:spAutoFit/>
+          </a:bodyPr>
+          <a:lstStyle/>
+          <a:p>
+            <a:r>
+              <a:rPr lang="en-GB" dirty="0"/>
+              <a:t>BANNER</a:t>
+            </a:r>
+            <a:endParaRPr lang="LID4096" dirty="0"/>
+          </a:p>
+        </p:txBody>
+      </p:sp>
+    </p:spTree>
+    <p:extLst>
+      <p:ext uri="{BB962C8B-B14F-4D97-AF65-F5344CB8AC3E}">
+        <p14:creationId xmlns:p14="http://schemas.microsoft.com/office/powerpoint/2010/main" val="2519818258"/>
+      </p:ext>
+    </p:extLst>
+  </p:cSld>
+  <p:clrMapOvr>
+    <a:masterClrMapping/>
+  </p:clrMapOvr>
+</p:sld>
+</file>
+
+<file path=ppt/slides/slide2.xml><?xml version="1.0" encoding="utf-8"?>
+<p:sld xmlns:a="http://schemas.openxmlformats.org/drawingml/2006/main" xmlns:r="http://schemas.openxmlformats.org/officeDocument/2006/relationships" xmlns:p="http://schemas.openxmlformats.org/presentationml/2006/main">
+  <p:cSld>
+    <p:spTree>
+      <p:nvGrpSpPr>
+        <p:cNvPr id="1" name="">
+          <a:extLst>
+            <a:ext uri="{FF2B5EF4-FFF2-40B4-BE49-F238E27FC236}">
+              <a16:creationId xmlns:a16="http://schemas.microsoft.com/office/drawing/2014/main" id="{A00ECA17-5240-F7CD-6C34-906AB77B5010}"/>
+            </a:ext>
+          </a:extLst>
+        </p:cNvPr>
+        <p:cNvGrpSpPr/>
+        <p:nvPr/>
+      </p:nvGrpSpPr>
+      <p:grpSpPr>
+        <a:xfrm>
+          <a:off x="0" y="0"/>
+          <a:ext cx="0" cy="0"/>
+          <a:chOff x="0" y="0"/>
+          <a:chExt cx="0" cy="0"/>
+        </a:xfrm>
+      </p:grpSpPr>
+      <p:pic>
+        <p:nvPicPr>
           <p:cNvPr id="13" name="Picture 12">
             <a:extLst>
               <a:ext uri="{FF2B5EF4-FFF2-40B4-BE49-F238E27FC236}">
-                <a16:creationId xmlns:a16="http://schemas.microsoft.com/office/drawing/2014/main" id="{17AFC1A1-A608-E2E2-DD3B-D7984048C588}"/>
+                <a16:creationId xmlns:a16="http://schemas.microsoft.com/office/drawing/2014/main" id="{3027B28F-D7E2-4CCA-2166-7D301942D83B}"/>
               </a:ext>
             </a:extLst>
           </p:cNvPr>
@@ -4172,7 +7503,7 @@
           <p:cNvPr id="21" name="TextBox 20">
             <a:extLst>
               <a:ext uri="{FF2B5EF4-FFF2-40B4-BE49-F238E27FC236}">
-                <a16:creationId xmlns:a16="http://schemas.microsoft.com/office/drawing/2014/main" id="{DCB9FF69-1B38-F336-5D1E-4AB4D36599E3}"/>
+                <a16:creationId xmlns:a16="http://schemas.microsoft.com/office/drawing/2014/main" id="{A0269AB0-8EA5-951C-18DA-C7DC95042C31}"/>
               </a:ext>
             </a:extLst>
           </p:cNvPr>
@@ -4256,7 +7587,7 @@
           <p:cNvPr id="32" name="Picture 31">
             <a:extLst>
               <a:ext uri="{FF2B5EF4-FFF2-40B4-BE49-F238E27FC236}">
-                <a16:creationId xmlns:a16="http://schemas.microsoft.com/office/drawing/2014/main" id="{773A8B91-892E-A430-BABB-DD8D0DF57779}"/>
+                <a16:creationId xmlns:a16="http://schemas.microsoft.com/office/drawing/2014/main" id="{72548D5E-3FC5-7E8B-AEED-E919B5D5D0CF}"/>
               </a:ext>
             </a:extLst>
           </p:cNvPr>
@@ -4286,7 +7617,7 @@
           <p:cNvPr id="34" name="Graphic 33">
             <a:extLst>
               <a:ext uri="{FF2B5EF4-FFF2-40B4-BE49-F238E27FC236}">
-                <a16:creationId xmlns:a16="http://schemas.microsoft.com/office/drawing/2014/main" id="{7C32A727-CD0B-CDF0-4DF0-7894B169FF5F}"/>
+                <a16:creationId xmlns:a16="http://schemas.microsoft.com/office/drawing/2014/main" id="{8516B22E-7CCE-A688-E72D-219D2107A208}"/>
               </a:ext>
             </a:extLst>
           </p:cNvPr>
@@ -4322,7 +7653,7 @@
           <p:cNvPr id="2" name="TextBox 1">
             <a:extLst>
               <a:ext uri="{FF2B5EF4-FFF2-40B4-BE49-F238E27FC236}">
-                <a16:creationId xmlns:a16="http://schemas.microsoft.com/office/drawing/2014/main" id="{AC05A1EE-4009-64AE-4DB0-59C1F889EA9B}"/>
+                <a16:creationId xmlns:a16="http://schemas.microsoft.com/office/drawing/2014/main" id="{6E2C15D5-749D-B9B1-A229-FA570E34FA4D}"/>
               </a:ext>
             </a:extLst>
           </p:cNvPr>
@@ -4359,7 +7690,7 @@
           <p:cNvPr id="5" name="TextBox 4">
             <a:extLst>
               <a:ext uri="{FF2B5EF4-FFF2-40B4-BE49-F238E27FC236}">
-                <a16:creationId xmlns:a16="http://schemas.microsoft.com/office/drawing/2014/main" id="{B7D21118-CD4E-3935-22BD-95EFEFFE031B}"/>
+                <a16:creationId xmlns:a16="http://schemas.microsoft.com/office/drawing/2014/main" id="{9E3C2117-A779-D9FB-78D6-E885A2EAF38A}"/>
               </a:ext>
             </a:extLst>
           </p:cNvPr>
@@ -4497,7 +7828,7 @@
           <p:cNvPr id="8" name="TextBox 7">
             <a:extLst>
               <a:ext uri="{FF2B5EF4-FFF2-40B4-BE49-F238E27FC236}">
-                <a16:creationId xmlns:a16="http://schemas.microsoft.com/office/drawing/2014/main" id="{00A5C7C5-F5D5-8176-4BBB-EEC3E36D2A7F}"/>
+                <a16:creationId xmlns:a16="http://schemas.microsoft.com/office/drawing/2014/main" id="{F56277F4-2D65-D596-8761-8B28E4E3A8F3}"/>
               </a:ext>
             </a:extLst>
           </p:cNvPr>
@@ -4581,7 +7912,7 @@
           <p:cNvPr id="12" name="TextBox 11">
             <a:extLst>
               <a:ext uri="{FF2B5EF4-FFF2-40B4-BE49-F238E27FC236}">
-                <a16:creationId xmlns:a16="http://schemas.microsoft.com/office/drawing/2014/main" id="{B69C9B89-0985-A9F4-077E-FAE8D74F4E59}"/>
+                <a16:creationId xmlns:a16="http://schemas.microsoft.com/office/drawing/2014/main" id="{4A0A7528-08C4-8821-8242-A15F2D9540F1}"/>
               </a:ext>
             </a:extLst>
           </p:cNvPr>
@@ -4623,7 +7954,7 @@
           <p:cNvPr id="16" name="TextBox 15">
             <a:extLst>
               <a:ext uri="{FF2B5EF4-FFF2-40B4-BE49-F238E27FC236}">
-                <a16:creationId xmlns:a16="http://schemas.microsoft.com/office/drawing/2014/main" id="{B2AB43A0-62CE-B5F3-C44B-63923AC7EF51}"/>
+                <a16:creationId xmlns:a16="http://schemas.microsoft.com/office/drawing/2014/main" id="{3796F8E6-05E9-CF67-7B10-E320863B242D}"/>
               </a:ext>
             </a:extLst>
           </p:cNvPr>
@@ -4674,20 +8005,14 @@
           <p:cNvPr id="6" name="Table 5">
             <a:extLst>
               <a:ext uri="{FF2B5EF4-FFF2-40B4-BE49-F238E27FC236}">
-                <a16:creationId xmlns:a16="http://schemas.microsoft.com/office/drawing/2014/main" id="{1BAD16F7-3E4E-84AE-B364-CCA27300127C}"/>
+                <a16:creationId xmlns:a16="http://schemas.microsoft.com/office/drawing/2014/main" id="{7D70520E-99D1-1D62-2EC1-68F7136C548E}"/>
               </a:ext>
             </a:extLst>
           </p:cNvPr>
           <p:cNvGraphicFramePr>
             <a:graphicFrameLocks noGrp="1"/>
           </p:cNvGraphicFramePr>
-          <p:nvPr>
-            <p:extLst>
-              <p:ext uri="{D42A27DB-BD31-4B8C-83A1-F6EECF244321}">
-                <p14:modId xmlns:p14="http://schemas.microsoft.com/office/powerpoint/2010/main" val="2347003586"/>
-              </p:ext>
-            </p:extLst>
-          </p:nvPr>
+          <p:nvPr/>
         </p:nvGraphicFramePr>
         <p:xfrm>
           <a:off x="496445" y="2417159"/>
@@ -5498,7 +8823,7 @@
           <p:cNvPr id="14" name="TextBox 13">
             <a:extLst>
               <a:ext uri="{FF2B5EF4-FFF2-40B4-BE49-F238E27FC236}">
-                <a16:creationId xmlns:a16="http://schemas.microsoft.com/office/drawing/2014/main" id="{02E3853E-A774-FA28-DB61-B413E7048685}"/>
+                <a16:creationId xmlns:a16="http://schemas.microsoft.com/office/drawing/2014/main" id="{192B48CF-F30E-FA81-8BB2-A130AC102E93}"/>
               </a:ext>
             </a:extLst>
           </p:cNvPr>
@@ -5648,7 +8973,7 @@
           <p:cNvPr id="3" name="Group 2">
             <a:extLst>
               <a:ext uri="{FF2B5EF4-FFF2-40B4-BE49-F238E27FC236}">
-                <a16:creationId xmlns:a16="http://schemas.microsoft.com/office/drawing/2014/main" id="{284472C1-C8C3-6005-4193-F6FC9642BD03}"/>
+                <a16:creationId xmlns:a16="http://schemas.microsoft.com/office/drawing/2014/main" id="{3DEF42D6-C0C7-74B9-C5D2-5341DC0F7061}"/>
               </a:ext>
             </a:extLst>
           </p:cNvPr>
@@ -5668,7 +8993,7 @@
             <p:cNvPr id="10" name="TextBox 9">
               <a:extLst>
                 <a:ext uri="{FF2B5EF4-FFF2-40B4-BE49-F238E27FC236}">
-                  <a16:creationId xmlns:a16="http://schemas.microsoft.com/office/drawing/2014/main" id="{2DFB7E50-80BB-753B-4893-390C1E282814}"/>
+                  <a16:creationId xmlns:a16="http://schemas.microsoft.com/office/drawing/2014/main" id="{6C40B98A-F12D-6484-26A1-5B214DC6866A}"/>
                 </a:ext>
               </a:extLst>
             </p:cNvPr>
@@ -5735,7 +9060,7 @@
             <p:cNvPr id="23" name="Picture 22" descr="Jaguar Classic Part">
               <a:extLst>
                 <a:ext uri="{FF2B5EF4-FFF2-40B4-BE49-F238E27FC236}">
-                  <a16:creationId xmlns:a16="http://schemas.microsoft.com/office/drawing/2014/main" id="{93224B44-5E2F-7738-6D28-68DF7DF00D1A}"/>
+                  <a16:creationId xmlns:a16="http://schemas.microsoft.com/office/drawing/2014/main" id="{813C4C6B-1433-EE90-1D2A-EB65DC752F81}"/>
                 </a:ext>
               </a:extLst>
             </p:cNvPr>
@@ -5765,7 +9090,7 @@
             <p:cNvPr id="24" name="Picture 23" descr="Supersession">
               <a:extLst>
                 <a:ext uri="{FF2B5EF4-FFF2-40B4-BE49-F238E27FC236}">
-                  <a16:creationId xmlns:a16="http://schemas.microsoft.com/office/drawing/2014/main" id="{BEC95917-5880-048F-76F3-376B7A903BB9}"/>
+                  <a16:creationId xmlns:a16="http://schemas.microsoft.com/office/drawing/2014/main" id="{A4780250-884D-D134-EB8C-A8406F1C2AC6}"/>
                 </a:ext>
               </a:extLst>
             </p:cNvPr>
@@ -5796,7 +9121,7 @@
           <p:cNvPr id="4" name="Rectangle: Rounded Corners 3">
             <a:extLst>
               <a:ext uri="{FF2B5EF4-FFF2-40B4-BE49-F238E27FC236}">
-                <a16:creationId xmlns:a16="http://schemas.microsoft.com/office/drawing/2014/main" id="{0EC45FF4-EEFB-B446-D7C4-C9226B97D96A}"/>
+                <a16:creationId xmlns:a16="http://schemas.microsoft.com/office/drawing/2014/main" id="{888B2456-BEC8-F548-BC45-92A967C3148F}"/>
               </a:ext>
             </a:extLst>
           </p:cNvPr>
@@ -5843,7 +9168,7 @@
           <p:cNvPr id="9" name="Rectangle: Rounded Corners 8">
             <a:extLst>
               <a:ext uri="{FF2B5EF4-FFF2-40B4-BE49-F238E27FC236}">
-                <a16:creationId xmlns:a16="http://schemas.microsoft.com/office/drawing/2014/main" id="{08E5B60B-ABAD-FB24-25C4-DD61D43E9207}"/>
+                <a16:creationId xmlns:a16="http://schemas.microsoft.com/office/drawing/2014/main" id="{73D75D30-A17D-22AA-0A88-06381EAECEE8}"/>
               </a:ext>
             </a:extLst>
           </p:cNvPr>
@@ -5890,7 +9215,7 @@
           <p:cNvPr id="15" name="TextBox 14">
             <a:extLst>
               <a:ext uri="{FF2B5EF4-FFF2-40B4-BE49-F238E27FC236}">
-                <a16:creationId xmlns:a16="http://schemas.microsoft.com/office/drawing/2014/main" id="{6C4DDCFF-6D93-F85F-85FA-0E1418A85086}"/>
+                <a16:creationId xmlns:a16="http://schemas.microsoft.com/office/drawing/2014/main" id="{6CDE4183-76E2-FFC4-7923-B8C19688DB6F}"/>
               </a:ext>
             </a:extLst>
           </p:cNvPr>
@@ -5948,7 +9273,7 @@
           <p:cNvPr id="19" name="Rectangle: Rounded Corners 18">
             <a:extLst>
               <a:ext uri="{FF2B5EF4-FFF2-40B4-BE49-F238E27FC236}">
-                <a16:creationId xmlns:a16="http://schemas.microsoft.com/office/drawing/2014/main" id="{5C20AF56-422F-376B-079B-56CAE9AEA370}"/>
+                <a16:creationId xmlns:a16="http://schemas.microsoft.com/office/drawing/2014/main" id="{FDDFFB84-CC0B-1DEC-72C8-16BB676DE8DD}"/>
               </a:ext>
             </a:extLst>
           </p:cNvPr>
@@ -5995,7 +9320,7 @@
           <p:cNvPr id="22" name="Rectangle: Rounded Corners 21">
             <a:extLst>
               <a:ext uri="{FF2B5EF4-FFF2-40B4-BE49-F238E27FC236}">
-                <a16:creationId xmlns:a16="http://schemas.microsoft.com/office/drawing/2014/main" id="{3C184AB4-3A5A-CB4E-DD2D-64EA265478AB}"/>
+                <a16:creationId xmlns:a16="http://schemas.microsoft.com/office/drawing/2014/main" id="{3DCFA31F-700F-8D9B-F3FA-4F3D7E716B6C}"/>
               </a:ext>
             </a:extLst>
           </p:cNvPr>
@@ -6042,7 +9367,7 @@
           <p:cNvPr id="26" name="Rectangle: Rounded Corners 25">
             <a:extLst>
               <a:ext uri="{FF2B5EF4-FFF2-40B4-BE49-F238E27FC236}">
-                <a16:creationId xmlns:a16="http://schemas.microsoft.com/office/drawing/2014/main" id="{E0CB1401-A237-018D-E021-6379FC0F57B3}"/>
+                <a16:creationId xmlns:a16="http://schemas.microsoft.com/office/drawing/2014/main" id="{7BF47685-867D-9EF3-111E-11FE54D1185F}"/>
               </a:ext>
             </a:extLst>
           </p:cNvPr>
@@ -6089,7 +9414,7 @@
           <p:cNvPr id="11" name="Group 10">
             <a:extLst>
               <a:ext uri="{FF2B5EF4-FFF2-40B4-BE49-F238E27FC236}">
-                <a16:creationId xmlns:a16="http://schemas.microsoft.com/office/drawing/2014/main" id="{6CD2A034-4E76-CFD3-6537-DB021DC36714}"/>
+                <a16:creationId xmlns:a16="http://schemas.microsoft.com/office/drawing/2014/main" id="{37BE847E-43FB-8CDF-5D3F-248B9B9E1959}"/>
               </a:ext>
             </a:extLst>
           </p:cNvPr>
@@ -6109,7 +9434,7 @@
             <p:cNvPr id="17" name="Picture 16">
               <a:extLst>
                 <a:ext uri="{FF2B5EF4-FFF2-40B4-BE49-F238E27FC236}">
-                  <a16:creationId xmlns:a16="http://schemas.microsoft.com/office/drawing/2014/main" id="{1D25B9A8-3B9B-5153-D2A9-6BC407A702B0}"/>
+                  <a16:creationId xmlns:a16="http://schemas.microsoft.com/office/drawing/2014/main" id="{ED78B5A1-9E15-6D3A-1256-2B81AE3FEBC0}"/>
                 </a:ext>
               </a:extLst>
             </p:cNvPr>
@@ -6139,7 +9464,7 @@
             <p:cNvPr id="30" name="TextBox 29">
               <a:extLst>
                 <a:ext uri="{FF2B5EF4-FFF2-40B4-BE49-F238E27FC236}">
-                  <a16:creationId xmlns:a16="http://schemas.microsoft.com/office/drawing/2014/main" id="{C010A92E-A68D-664F-4DA6-9516D354DE86}"/>
+                  <a16:creationId xmlns:a16="http://schemas.microsoft.com/office/drawing/2014/main" id="{441E66B9-27E9-9938-18BD-D9F60BE2D882}"/>
                 </a:ext>
               </a:extLst>
             </p:cNvPr>
@@ -6199,7 +9524,7 @@
           <p:cNvPr id="33" name="Rectangle: Rounded Corners 32">
             <a:extLst>
               <a:ext uri="{FF2B5EF4-FFF2-40B4-BE49-F238E27FC236}">
-                <a16:creationId xmlns:a16="http://schemas.microsoft.com/office/drawing/2014/main" id="{A24F25CB-340D-C6A3-4DD6-45D7B45D8A0C}"/>
+                <a16:creationId xmlns:a16="http://schemas.microsoft.com/office/drawing/2014/main" id="{050CD9D6-92A2-A757-8D8A-E543067A72F6}"/>
               </a:ext>
             </a:extLst>
           </p:cNvPr>
@@ -6246,7 +9571,7 @@
           <p:cNvPr id="20" name="Rectangle: Rounded Corners 19">
             <a:extLst>
               <a:ext uri="{FF2B5EF4-FFF2-40B4-BE49-F238E27FC236}">
-                <a16:creationId xmlns:a16="http://schemas.microsoft.com/office/drawing/2014/main" id="{1CCA70B1-F593-96DA-9E2B-6A4CF1D0B2B2}"/>
+                <a16:creationId xmlns:a16="http://schemas.microsoft.com/office/drawing/2014/main" id="{782A9FC4-80BE-708B-A7C3-B5670EB97C2D}"/>
               </a:ext>
             </a:extLst>
           </p:cNvPr>
@@ -6293,7 +9618,7 @@
           <p:cNvPr id="25" name="TextBox 24">
             <a:extLst>
               <a:ext uri="{FF2B5EF4-FFF2-40B4-BE49-F238E27FC236}">
-                <a16:creationId xmlns:a16="http://schemas.microsoft.com/office/drawing/2014/main" id="{6E4D0859-D71B-9F6E-1178-5695507839BB}"/>
+                <a16:creationId xmlns:a16="http://schemas.microsoft.com/office/drawing/2014/main" id="{456BE5E2-3556-D725-BDA4-18C068BCC95A}"/>
               </a:ext>
             </a:extLst>
           </p:cNvPr>
@@ -6329,7 +9654,7 @@
           <p:cNvPr id="7" name="TextBox 6">
             <a:extLst>
               <a:ext uri="{FF2B5EF4-FFF2-40B4-BE49-F238E27FC236}">
-                <a16:creationId xmlns:a16="http://schemas.microsoft.com/office/drawing/2014/main" id="{272B1F46-BC3D-86B5-4969-535AB0FEA2A6}"/>
+                <a16:creationId xmlns:a16="http://schemas.microsoft.com/office/drawing/2014/main" id="{FA264A0F-C047-40E2-F438-299033BA0459}"/>
               </a:ext>
             </a:extLst>
           </p:cNvPr>
@@ -6370,7 +9695,7 @@
     </p:spTree>
     <p:extLst>
       <p:ext uri="{BB962C8B-B14F-4D97-AF65-F5344CB8AC3E}">
-        <p14:creationId xmlns:p14="http://schemas.microsoft.com/office/powerpoint/2010/main" val="2519818258"/>
+        <p14:creationId xmlns:p14="http://schemas.microsoft.com/office/powerpoint/2010/main" val="3012814094"/>
       </p:ext>
     </p:extLst>
   </p:cSld>
@@ -6380,7 +9705,7 @@
 </p:sld>
 </file>
 
-<file path=ppt/slides/slide2.xml><?xml version="1.0" encoding="utf-8"?>
+<file path=ppt/slides/slide3.xml><?xml version="1.0" encoding="utf-8"?>
 <p:sld xmlns:a="http://schemas.openxmlformats.org/drawingml/2006/main" xmlns:r="http://schemas.openxmlformats.org/officeDocument/2006/relationships" xmlns:p="http://schemas.openxmlformats.org/presentationml/2006/main">
   <p:cSld>
     <p:spTree>
@@ -7992,7 +11317,7 @@
 </p:sld>
 </file>
 
-<file path=ppt/slides/slide3.xml><?xml version="1.0" encoding="utf-8"?>
+<file path=ppt/slides/slide4.xml><?xml version="1.0" encoding="utf-8"?>
 <p:sld xmlns:a="http://schemas.openxmlformats.org/drawingml/2006/main" xmlns:r="http://schemas.openxmlformats.org/officeDocument/2006/relationships" xmlns:p="http://schemas.openxmlformats.org/presentationml/2006/main">
   <p:cSld>
     <p:spTree>
@@ -8466,7 +11791,7 @@
 </p:sld>
 </file>
 
-<file path=ppt/slides/slide4.xml><?xml version="1.0" encoding="utf-8"?>
+<file path=ppt/slides/slide5.xml><?xml version="1.0" encoding="utf-8"?>
 <p:sld xmlns:a="http://schemas.openxmlformats.org/drawingml/2006/main" xmlns:r="http://schemas.openxmlformats.org/officeDocument/2006/relationships" xmlns:p="http://schemas.openxmlformats.org/presentationml/2006/main">
   <p:cSld>
     <p:spTree>
@@ -9240,7 +12565,7 @@
 </p:sld>
 </file>
 
-<file path=ppt/slides/slide5.xml><?xml version="1.0" encoding="utf-8"?>
+<file path=ppt/slides/slide6.xml><?xml version="1.0" encoding="utf-8"?>
 <p:sld xmlns:a="http://schemas.openxmlformats.org/drawingml/2006/main" xmlns:r="http://schemas.openxmlformats.org/officeDocument/2006/relationships" xmlns:p="http://schemas.openxmlformats.org/presentationml/2006/main">
   <p:cSld>
     <p:spTree>

--- a/5-Implementation-Projects/internet/jagports/solution/vieps/UI_CONCEPTS/VIEPS UI-Concepts.pptx
+++ b/5-Implementation-Projects/internet/jagports/solution/vieps/UI_CONCEPTS/VIEPS UI-Concepts.pptx
@@ -130,7 +130,7 @@
   <pc:docChgLst>
     <pc:chgData name="Tomi Lind" userId="8de46aee-b41d-491b-a3c8-daf1b5776a2e" providerId="ADAL" clId="{DA4176E6-4A74-4541-B8FC-EC14009AAF7D}"/>
     <pc:docChg chg="undo redo custSel addSld modSld sldOrd">
-      <pc:chgData name="Tomi Lind" userId="8de46aee-b41d-491b-a3c8-daf1b5776a2e" providerId="ADAL" clId="{DA4176E6-4A74-4541-B8FC-EC14009AAF7D}" dt="2026-09-22T11:45:00.208" v="2016" actId="1076"/>
+      <pc:chgData name="Tomi Lind" userId="8de46aee-b41d-491b-a3c8-daf1b5776a2e" providerId="ADAL" clId="{DA4176E6-4A74-4541-B8FC-EC14009AAF7D}" dt="2026-09-22T12:16:19.817" v="2167" actId="6549"/>
       <pc:docMkLst>
         <pc:docMk/>
       </pc:docMkLst>
@@ -643,7 +643,7 @@
         </pc:picChg>
       </pc:sldChg>
       <pc:sldChg chg="addSp delSp modSp add mod">
-        <pc:chgData name="Tomi Lind" userId="8de46aee-b41d-491b-a3c8-daf1b5776a2e" providerId="ADAL" clId="{DA4176E6-4A74-4541-B8FC-EC14009AAF7D}" dt="2026-09-22T11:45:00.208" v="2016" actId="1076"/>
+        <pc:chgData name="Tomi Lind" userId="8de46aee-b41d-491b-a3c8-daf1b5776a2e" providerId="ADAL" clId="{DA4176E6-4A74-4541-B8FC-EC14009AAF7D}" dt="2026-09-22T12:16:19.817" v="2167" actId="6549"/>
         <pc:sldMkLst>
           <pc:docMk/>
           <pc:sldMk cId="2519818258" sldId="260"/>
@@ -801,7 +801,7 @@
           </ac:spMkLst>
         </pc:spChg>
         <pc:spChg chg="mod">
-          <ac:chgData name="Tomi Lind" userId="8de46aee-b41d-491b-a3c8-daf1b5776a2e" providerId="ADAL" clId="{DA4176E6-4A74-4541-B8FC-EC14009AAF7D}" dt="2026-09-22T11:34:44.593" v="1884" actId="1076"/>
+          <ac:chgData name="Tomi Lind" userId="8de46aee-b41d-491b-a3c8-daf1b5776a2e" providerId="ADAL" clId="{DA4176E6-4A74-4541-B8FC-EC14009AAF7D}" dt="2026-09-22T12:14:34.885" v="2018" actId="14100"/>
           <ac:spMkLst>
             <pc:docMk/>
             <pc:sldMk cId="2519818258" sldId="260"/>
@@ -809,7 +809,7 @@
           </ac:spMkLst>
         </pc:spChg>
         <pc:spChg chg="add mod">
-          <ac:chgData name="Tomi Lind" userId="8de46aee-b41d-491b-a3c8-daf1b5776a2e" providerId="ADAL" clId="{DA4176E6-4A74-4541-B8FC-EC14009AAF7D}" dt="2026-09-22T11:42:20.453" v="1999" actId="14100"/>
+          <ac:chgData name="Tomi Lind" userId="8de46aee-b41d-491b-a3c8-daf1b5776a2e" providerId="ADAL" clId="{DA4176E6-4A74-4541-B8FC-EC14009AAF7D}" dt="2026-09-22T12:14:31.295" v="2017" actId="14100"/>
           <ac:spMkLst>
             <pc:docMk/>
             <pc:sldMk cId="2519818258" sldId="260"/>
@@ -944,6 +944,14 @@
             <ac:spMk id="69" creationId="{F6696454-F025-0AB6-AC03-7B58000E68C4}"/>
           </ac:spMkLst>
         </pc:spChg>
+        <pc:spChg chg="add mod">
+          <ac:chgData name="Tomi Lind" userId="8de46aee-b41d-491b-a3c8-daf1b5776a2e" providerId="ADAL" clId="{DA4176E6-4A74-4541-B8FC-EC14009AAF7D}" dt="2026-09-22T12:16:19.817" v="2167" actId="6549"/>
+          <ac:spMkLst>
+            <pc:docMk/>
+            <pc:sldMk cId="2519818258" sldId="260"/>
+            <ac:spMk id="71" creationId="{8F1FB1CB-DD17-8ED4-3B4D-3804DD84C8D6}"/>
+          </ac:spMkLst>
+        </pc:spChg>
         <pc:grpChg chg="mod">
           <ac:chgData name="Tomi Lind" userId="8de46aee-b41d-491b-a3c8-daf1b5776a2e" providerId="ADAL" clId="{DA4176E6-4A74-4541-B8FC-EC14009AAF7D}" dt="2026-09-22T11:43:17.410" v="2011" actId="1076"/>
           <ac:grpSpMkLst>
@@ -969,7 +977,7 @@
           </ac:picMkLst>
         </pc:picChg>
         <pc:picChg chg="mod">
-          <ac:chgData name="Tomi Lind" userId="8de46aee-b41d-491b-a3c8-daf1b5776a2e" providerId="ADAL" clId="{DA4176E6-4A74-4541-B8FC-EC14009AAF7D}" dt="2026-09-22T11:34:44.593" v="1884" actId="1076"/>
+          <ac:chgData name="Tomi Lind" userId="8de46aee-b41d-491b-a3c8-daf1b5776a2e" providerId="ADAL" clId="{DA4176E6-4A74-4541-B8FC-EC14009AAF7D}" dt="2026-09-22T12:14:40.683" v="2020" actId="1076"/>
           <ac:picMkLst>
             <pc:docMk/>
             <pc:sldMk cId="2519818258" sldId="260"/>
@@ -977,7 +985,7 @@
           </ac:picMkLst>
         </pc:picChg>
         <pc:picChg chg="mod">
-          <ac:chgData name="Tomi Lind" userId="8de46aee-b41d-491b-a3c8-daf1b5776a2e" providerId="ADAL" clId="{DA4176E6-4A74-4541-B8FC-EC14009AAF7D}" dt="2026-09-22T11:34:44.593" v="1884" actId="1076"/>
+          <ac:chgData name="Tomi Lind" userId="8de46aee-b41d-491b-a3c8-daf1b5776a2e" providerId="ADAL" clId="{DA4176E6-4A74-4541-B8FC-EC14009AAF7D}" dt="2026-09-22T12:14:38.274" v="2019" actId="1076"/>
           <ac:picMkLst>
             <pc:docMk/>
             <pc:sldMk cId="2519818258" sldId="260"/>
@@ -4499,7 +4507,7 @@
         </p:blipFill>
         <p:spPr>
           <a:xfrm>
-            <a:off x="2549636" y="2884609"/>
+            <a:off x="2549636" y="3250647"/>
             <a:ext cx="2698044" cy="745067"/>
           </a:xfrm>
           <a:prstGeom prst="rect">
@@ -4535,7 +4543,7 @@
         </p:blipFill>
         <p:spPr>
           <a:xfrm>
-            <a:off x="2556091" y="3701666"/>
+            <a:off x="2549636" y="4460018"/>
             <a:ext cx="2705100" cy="1057275"/>
           </a:xfrm>
           <a:prstGeom prst="rect">
@@ -5745,8 +5753,8 @@
         </p:nvSpPr>
         <p:spPr>
           <a:xfrm>
-            <a:off x="2341947" y="2553336"/>
-            <a:ext cx="3193992" cy="2333922"/>
+            <a:off x="2341947" y="2553335"/>
+            <a:ext cx="3193992" cy="3794301"/>
           </a:xfrm>
           <a:prstGeom prst="roundRect">
             <a:avLst/>
@@ -5887,7 +5895,7 @@
         <p:spPr>
           <a:xfrm>
             <a:off x="5634758" y="2553059"/>
-            <a:ext cx="4662639" cy="2333922"/>
+            <a:ext cx="4662639" cy="3794578"/>
           </a:xfrm>
           <a:prstGeom prst="roundRect">
             <a:avLst/>
@@ -7428,6 +7436,182 @@
               <a:t>BANNER</a:t>
             </a:r>
             <a:endParaRPr lang="LID4096" dirty="0"/>
+          </a:p>
+        </p:txBody>
+      </p:sp>
+      <p:sp>
+        <p:nvSpPr>
+          <p:cNvPr id="71" name="TextBox 13">
+            <a:extLst>
+              <a:ext uri="{FF2B5EF4-FFF2-40B4-BE49-F238E27FC236}">
+                <a16:creationId xmlns:a16="http://schemas.microsoft.com/office/drawing/2014/main" id="{8F1FB1CB-DD17-8ED4-3B4D-3804DD84C8D6}"/>
+              </a:ext>
+            </a:extLst>
+          </p:cNvPr>
+          <p:cNvSpPr txBox="1"/>
+          <p:nvPr/>
+        </p:nvSpPr>
+        <p:spPr>
+          <a:xfrm>
+            <a:off x="4803218" y="5117788"/>
+            <a:ext cx="6288802" cy="400110"/>
+          </a:xfrm>
+          <a:prstGeom prst="rect">
+            <a:avLst/>
+          </a:prstGeom>
+          <a:noFill/>
+        </p:spPr>
+        <p:txBody>
+          <a:bodyPr wrap="square">
+            <a:spAutoFit/>
+          </a:bodyPr>
+          <a:lstStyle>
+            <a:defPPr>
+              <a:defRPr lang="LID4096"/>
+            </a:defPPr>
+            <a:lvl1pPr marL="0" algn="l" defTabSz="914400" rtl="0" eaLnBrk="1" latinLnBrk="0" hangingPunct="1">
+              <a:defRPr sz="1800" kern="1200">
+                <a:solidFill>
+                  <a:schemeClr val="tx1"/>
+                </a:solidFill>
+                <a:latin typeface="+mn-lt"/>
+                <a:ea typeface="+mn-ea"/>
+                <a:cs typeface="+mn-cs"/>
+              </a:defRPr>
+            </a:lvl1pPr>
+            <a:lvl2pPr marL="457200" algn="l" defTabSz="914400" rtl="0" eaLnBrk="1" latinLnBrk="0" hangingPunct="1">
+              <a:defRPr sz="1800" kern="1200">
+                <a:solidFill>
+                  <a:schemeClr val="tx1"/>
+                </a:solidFill>
+                <a:latin typeface="+mn-lt"/>
+                <a:ea typeface="+mn-ea"/>
+                <a:cs typeface="+mn-cs"/>
+              </a:defRPr>
+            </a:lvl2pPr>
+            <a:lvl3pPr marL="914400" algn="l" defTabSz="914400" rtl="0" eaLnBrk="1" latinLnBrk="0" hangingPunct="1">
+              <a:defRPr sz="1800" kern="1200">
+                <a:solidFill>
+                  <a:schemeClr val="tx1"/>
+                </a:solidFill>
+                <a:latin typeface="+mn-lt"/>
+                <a:ea typeface="+mn-ea"/>
+                <a:cs typeface="+mn-cs"/>
+              </a:defRPr>
+            </a:lvl3pPr>
+            <a:lvl4pPr marL="1371600" algn="l" defTabSz="914400" rtl="0" eaLnBrk="1" latinLnBrk="0" hangingPunct="1">
+              <a:defRPr sz="1800" kern="1200">
+                <a:solidFill>
+                  <a:schemeClr val="tx1"/>
+                </a:solidFill>
+                <a:latin typeface="+mn-lt"/>
+                <a:ea typeface="+mn-ea"/>
+                <a:cs typeface="+mn-cs"/>
+              </a:defRPr>
+            </a:lvl4pPr>
+            <a:lvl5pPr marL="1828800" algn="l" defTabSz="914400" rtl="0" eaLnBrk="1" latinLnBrk="0" hangingPunct="1">
+              <a:defRPr sz="1800" kern="1200">
+                <a:solidFill>
+                  <a:schemeClr val="tx1"/>
+                </a:solidFill>
+                <a:latin typeface="+mn-lt"/>
+                <a:ea typeface="+mn-ea"/>
+                <a:cs typeface="+mn-cs"/>
+              </a:defRPr>
+            </a:lvl5pPr>
+            <a:lvl6pPr marL="2286000" algn="l" defTabSz="914400" rtl="0" eaLnBrk="1" latinLnBrk="0" hangingPunct="1">
+              <a:defRPr sz="1800" kern="1200">
+                <a:solidFill>
+                  <a:schemeClr val="tx1"/>
+                </a:solidFill>
+                <a:latin typeface="+mn-lt"/>
+                <a:ea typeface="+mn-ea"/>
+                <a:cs typeface="+mn-cs"/>
+              </a:defRPr>
+            </a:lvl6pPr>
+            <a:lvl7pPr marL="2743200" algn="l" defTabSz="914400" rtl="0" eaLnBrk="1" latinLnBrk="0" hangingPunct="1">
+              <a:defRPr sz="1800" kern="1200">
+                <a:solidFill>
+                  <a:schemeClr val="tx1"/>
+                </a:solidFill>
+                <a:latin typeface="+mn-lt"/>
+                <a:ea typeface="+mn-ea"/>
+                <a:cs typeface="+mn-cs"/>
+              </a:defRPr>
+            </a:lvl7pPr>
+            <a:lvl8pPr marL="3200400" algn="l" defTabSz="914400" rtl="0" eaLnBrk="1" latinLnBrk="0" hangingPunct="1">
+              <a:defRPr sz="1800" kern="1200">
+                <a:solidFill>
+                  <a:schemeClr val="tx1"/>
+                </a:solidFill>
+                <a:latin typeface="+mn-lt"/>
+                <a:ea typeface="+mn-ea"/>
+                <a:cs typeface="+mn-cs"/>
+              </a:defRPr>
+            </a:lvl8pPr>
+            <a:lvl9pPr marL="3657600" algn="l" defTabSz="914400" rtl="0" eaLnBrk="1" latinLnBrk="0" hangingPunct="1">
+              <a:defRPr sz="1800" kern="1200">
+                <a:solidFill>
+                  <a:schemeClr val="tx1"/>
+                </a:solidFill>
+                <a:latin typeface="+mn-lt"/>
+                <a:ea typeface="+mn-ea"/>
+                <a:cs typeface="+mn-cs"/>
+              </a:defRPr>
+            </a:lvl9pPr>
+          </a:lstStyle>
+          <a:p>
+            <a:pPr algn="ctr"/>
+            <a:r>
+              <a:rPr lang="en-GB" sz="1000" dirty="0" err="1">
+                <a:solidFill>
+                  <a:schemeClr val="tx2">
+                    <a:lumMod val="50000"/>
+                    <a:lumOff val="50000"/>
+                  </a:schemeClr>
+                </a:solidFill>
+              </a:rPr>
+              <a:t>Aveilable</a:t>
+            </a:r>
+            <a:r>
+              <a:rPr lang="en-GB" sz="1000" dirty="0">
+                <a:solidFill>
+                  <a:schemeClr val="tx2">
+                    <a:lumMod val="50000"/>
+                    <a:lumOff val="50000"/>
+                  </a:schemeClr>
+                </a:solidFill>
+              </a:rPr>
+              <a:t> at: [Stock Location – Site name(s) – if available]</a:t>
+            </a:r>
+            <a:endParaRPr lang="en-US" sz="1000" dirty="0">
+              <a:solidFill>
+                <a:schemeClr val="tx2">
+                  <a:lumMod val="50000"/>
+                  <a:lumOff val="50000"/>
+                </a:schemeClr>
+              </a:solidFill>
+            </a:endParaRPr>
+          </a:p>
+          <a:p>
+            <a:pPr algn="ctr"/>
+            <a:r>
+              <a:rPr lang="en-US" sz="1000"/>
+              <a:t>Detailed </a:t>
+            </a:r>
+            <a:r>
+              <a:rPr lang="en-US" sz="1000" dirty="0"/>
+              <a:t>location on stock – </a:t>
+            </a:r>
+            <a:r>
+              <a:rPr lang="en-US" sz="1000" dirty="0" err="1"/>
+              <a:t>PostMVP</a:t>
+            </a:r>
+            <a:r>
+              <a:rPr lang="en-US" sz="1000" dirty="0"/>
+              <a:t> visible only to admins</a:t>
+            </a:r>
+            <a:endParaRPr lang="" sz="1000" dirty="0"/>
           </a:p>
         </p:txBody>
       </p:sp>
